--- a/output/pitch_deck.pptx
+++ b/output/pitch_deck.pptx
@@ -3185,6 +3185,30 @@
                 <a:ea typeface="Calibri" pitchFamily="34" charset="-122"/>
                 <a:cs typeface="Calibri" pitchFamily="34" charset="-120"/>
               </a:rPr>
+              <a:t>Numeric time-window constraints</a:t>
+            </a:r>
+            <a:endParaRPr lang="en-US" sz="1350" dirty="0"/>
+          </a:p>
+          <a:p>
+            <a:pPr marL="342900" indent="-342900">
+              <a:lnSpc>
+                <a:spcPct val="125000"/>
+              </a:lnSpc>
+              <a:spcAft>
+                <a:spcPts val="1600"/>
+              </a:spcAft>
+              <a:buSzPct val="100000"/>
+              <a:buChar char="●"/>
+            </a:pPr>
+            <a:r>
+              <a:rPr lang="en-US" sz="1350" dirty="0">
+                <a:solidFill>
+                  <a:srgbClr val="475569"/>
+                </a:solidFill>
+                <a:latin typeface="Calibri" pitchFamily="34" charset="0"/>
+                <a:ea typeface="Calibri" pitchFamily="34" charset="-122"/>
+                <a:cs typeface="Calibri" pitchFamily="34" charset="-120"/>
+              </a:rPr>
               <a:t>Multi-vehicle capacity (count or weight)</a:t>
             </a:r>
             <a:endParaRPr lang="en-US" sz="1350" dirty="0"/>
@@ -3396,7 +3420,7 @@
                 <a:ea typeface="Calibri" pitchFamily="34" charset="-122"/>
                 <a:cs typeface="Calibri" pitchFamily="34" charset="-120"/>
               </a:rPr>
-              <a:t>Numeric time windows (same penalty-term pattern)</a:t>
+              <a:t>A real, paid traffic API (interface already pluggable)</a:t>
             </a:r>
             <a:endParaRPr lang="en-US" sz="1350" dirty="0"/>
           </a:p>
@@ -3420,31 +3444,7 @@
                 <a:ea typeface="Calibri" pitchFamily="34" charset="-122"/>
                 <a:cs typeface="Calibri" pitchFamily="34" charset="-120"/>
               </a:rPr>
-              <a:t>A real, paid traffic API (interface already pluggable)</a:t>
-            </a:r>
-            <a:endParaRPr lang="en-US" sz="1350" dirty="0"/>
-          </a:p>
-          <a:p>
-            <a:pPr marL="342900" indent="-342900">
-              <a:lnSpc>
-                <a:spcPct val="125000"/>
-              </a:lnSpc>
-              <a:spcAft>
-                <a:spcPts val="1600"/>
-              </a:spcAft>
-              <a:buSzPct val="100000"/>
-              <a:buChar char="●"/>
-            </a:pPr>
-            <a:r>
-              <a:rPr lang="en-US" sz="1350" dirty="0">
-                <a:solidFill>
-                  <a:srgbClr val="475569"/>
-                </a:solidFill>
-                <a:latin typeface="Calibri" pitchFamily="34" charset="0"/>
-                <a:ea typeface="Calibri" pitchFamily="34" charset="-122"/>
-                <a:cs typeface="Calibri" pitchFamily="34" charset="-120"/>
-              </a:rPr>
-              <a:t>Cross-cluster precedence above 9 stops</a:t>
+              <a:t>Cross-cluster precedence/time windows above 9 stops</a:t>
             </a:r>
             <a:endParaRPr lang="en-US" sz="1350" dirty="0"/>
           </a:p>
@@ -9067,7 +9067,7 @@
                 <a:ea typeface="Cambria" pitchFamily="34" charset="-122"/>
                 <a:cs typeface="Cambria" pitchFamily="34" charset="-120"/>
               </a:rPr>
-              <a:t>275</a:t>
+              <a:t>476</a:t>
             </a:r>
             <a:endParaRPr lang="en-US" sz="3400" dirty="0"/>
           </a:p>

--- a/output/pitch_deck.pptx
+++ b/output/pitch_deck.pptx
@@ -17,9 +17,12 @@
     <p:sldId id="265" r:id="rId11"/>
     <p:sldId id="266" r:id="rId12"/>
     <p:sldId id="267" r:id="rId13"/>
+    <p:sldId id="268" r:id="rId14"/>
+    <p:sldId id="269" r:id="rId15"/>
+    <p:sldId id="270" r:id="rId16"/>
   </p:sldIdLst>
   <p:notesMasterIdLst>
-    <p:notesMasterId r:id="rId14"/>
+    <p:notesMasterId r:id="rId17"/>
   </p:notesMasterIdLst>
   <p:sldSz cx="12192000" cy="6858000"/>
   <p:notesSz cx="6858000" cy="12192000"/>
@@ -1262,7 +1265,7 @@
           <a:p>
             <a:r>
               <a:rPr lang="en-US" dirty="0"/>
-              <a:t>Backup answers: classical 2-opt beats our QUBO on PLAIN routing and we say so on slide 5 — the real claim is Experiment 2 (constraint satisfaction by construction). QAOA and real D-Wave hardware are both demonstrated via run_qaoa_demo.py and run_on_real_quantum_hardware.py, not just claimed. Analytics/OR-Tools/QAOA are all optional dependencies with graceful degradation — see README.</a:t>
+              <a:t/>
             </a:r>
             <a:endParaRPr lang="en-US" dirty="0"/>
           </a:p>
@@ -1286,6 +1289,270 @@
             <a:fld id="{F7021451-1387-4CA6-816F-3879F97B5CBC}" type="slidenum">
               <a:rPr lang="en-US"/>
               <a:t>12</a:t>
+            </a:fld>
+            <a:endParaRPr lang="en-US"/>
+          </a:p>
+        </p:txBody>
+      </p:sp>
+    </p:spTree>
+    <p:extLst>
+      <p:ext uri="{BB962C8B-B14F-4D97-AF65-F5344CB8AC3E}">
+        <p14:creationId xmlns:p14="http://schemas.microsoft.com/office/powerpoint/2010/main" val="1024086991"/>
+      </p:ext>
+    </p:extLst>
+  </p:cSld>
+  <p:clrMapOvr>
+    <a:masterClrMapping/>
+  </p:clrMapOvr>
+</p:notes>
+</file>
+
+<file path=ppt/notesSlides/notesSlide13.xml><?xml version="1.0" encoding="utf-8"?>
+<p:notes xmlns:a="http://schemas.openxmlformats.org/drawingml/2006/main" xmlns:r="http://schemas.openxmlformats.org/officeDocument/2006/relationships" xmlns:p="http://schemas.openxmlformats.org/presentationml/2006/main">
+  <p:cSld>
+    <p:spTree>
+      <p:nvGrpSpPr>
+        <p:cNvPr id="1" name=""/>
+        <p:cNvGrpSpPr/>
+        <p:nvPr/>
+      </p:nvGrpSpPr>
+      <p:grpSpPr>
+        <a:xfrm>
+          <a:off x="0" y="0"/>
+          <a:ext cx="0" cy="0"/>
+          <a:chOff x="0" y="0"/>
+          <a:chExt cx="0" cy="0"/>
+        </a:xfrm>
+      </p:grpSpPr>
+      <p:sp>
+        <p:nvSpPr>
+          <p:cNvPr id="2" name="Slide Image Placeholder 1"/>
+          <p:cNvSpPr>
+            <a:spLocks noGrp="1" noRot="1" noChangeAspect="1"/>
+          </p:cNvSpPr>
+          <p:nvPr>
+            <p:ph type="sldImg"/>
+          </p:nvPr>
+        </p:nvSpPr>
+        <p:spPr/>
+      </p:sp>
+      <p:sp>
+        <p:nvSpPr>
+          <p:cNvPr id="3" name="Notes Placeholder 2"/>
+          <p:cNvSpPr>
+            <a:spLocks noGrp="1"/>
+          </p:cNvSpPr>
+          <p:nvPr>
+            <p:ph type="body" idx="1"/>
+          </p:nvPr>
+        </p:nvSpPr>
+        <p:spPr/>
+        <p:txBody>
+          <a:bodyPr/>
+          <a:lstStyle/>
+          <a:p>
+            <a:r>
+              <a:rPr lang="en-US" dirty="0"/>
+              <a:t/>
+            </a:r>
+            <a:endParaRPr lang="en-US" dirty="0"/>
+          </a:p>
+        </p:txBody>
+      </p:sp>
+      <p:sp>
+        <p:nvSpPr>
+          <p:cNvPr id="4" name="Slide Number Placeholder 3"/>
+          <p:cNvSpPr>
+            <a:spLocks noGrp="1"/>
+          </p:cNvSpPr>
+          <p:nvPr>
+            <p:ph type="sldNum" sz="quarter" idx="10"/>
+          </p:nvPr>
+        </p:nvSpPr>
+        <p:spPr/>
+        <p:txBody>
+          <a:bodyPr/>
+          <a:lstStyle/>
+          <a:p>
+            <a:fld id="{F7021451-1387-4CA6-816F-3879F97B5CBC}" type="slidenum">
+              <a:rPr lang="en-US"/>
+              <a:t>13</a:t>
+            </a:fld>
+            <a:endParaRPr lang="en-US"/>
+          </a:p>
+        </p:txBody>
+      </p:sp>
+    </p:spTree>
+    <p:extLst>
+      <p:ext uri="{BB962C8B-B14F-4D97-AF65-F5344CB8AC3E}">
+        <p14:creationId xmlns:p14="http://schemas.microsoft.com/office/powerpoint/2010/main" val="1024086991"/>
+      </p:ext>
+    </p:extLst>
+  </p:cSld>
+  <p:clrMapOvr>
+    <a:masterClrMapping/>
+  </p:clrMapOvr>
+</p:notes>
+</file>
+
+<file path=ppt/notesSlides/notesSlide14.xml><?xml version="1.0" encoding="utf-8"?>
+<p:notes xmlns:a="http://schemas.openxmlformats.org/drawingml/2006/main" xmlns:r="http://schemas.openxmlformats.org/officeDocument/2006/relationships" xmlns:p="http://schemas.openxmlformats.org/presentationml/2006/main">
+  <p:cSld>
+    <p:spTree>
+      <p:nvGrpSpPr>
+        <p:cNvPr id="1" name=""/>
+        <p:cNvGrpSpPr/>
+        <p:nvPr/>
+      </p:nvGrpSpPr>
+      <p:grpSpPr>
+        <a:xfrm>
+          <a:off x="0" y="0"/>
+          <a:ext cx="0" cy="0"/>
+          <a:chOff x="0" y="0"/>
+          <a:chExt cx="0" cy="0"/>
+        </a:xfrm>
+      </p:grpSpPr>
+      <p:sp>
+        <p:nvSpPr>
+          <p:cNvPr id="2" name="Slide Image Placeholder 1"/>
+          <p:cNvSpPr>
+            <a:spLocks noGrp="1" noRot="1" noChangeAspect="1"/>
+          </p:cNvSpPr>
+          <p:nvPr>
+            <p:ph type="sldImg"/>
+          </p:nvPr>
+        </p:nvSpPr>
+        <p:spPr/>
+      </p:sp>
+      <p:sp>
+        <p:nvSpPr>
+          <p:cNvPr id="3" name="Notes Placeholder 2"/>
+          <p:cNvSpPr>
+            <a:spLocks noGrp="1"/>
+          </p:cNvSpPr>
+          <p:nvPr>
+            <p:ph type="body" idx="1"/>
+          </p:nvPr>
+        </p:nvSpPr>
+        <p:spPr/>
+        <p:txBody>
+          <a:bodyPr/>
+          <a:lstStyle/>
+          <a:p>
+            <a:r>
+              <a:rPr lang="en-US" dirty="0"/>
+              <a:t/>
+            </a:r>
+            <a:endParaRPr lang="en-US" dirty="0"/>
+          </a:p>
+        </p:txBody>
+      </p:sp>
+      <p:sp>
+        <p:nvSpPr>
+          <p:cNvPr id="4" name="Slide Number Placeholder 3"/>
+          <p:cNvSpPr>
+            <a:spLocks noGrp="1"/>
+          </p:cNvSpPr>
+          <p:nvPr>
+            <p:ph type="sldNum" sz="quarter" idx="10"/>
+          </p:nvPr>
+        </p:nvSpPr>
+        <p:spPr/>
+        <p:txBody>
+          <a:bodyPr/>
+          <a:lstStyle/>
+          <a:p>
+            <a:fld id="{F7021451-1387-4CA6-816F-3879F97B5CBC}" type="slidenum">
+              <a:rPr lang="en-US"/>
+              <a:t>14</a:t>
+            </a:fld>
+            <a:endParaRPr lang="en-US"/>
+          </a:p>
+        </p:txBody>
+      </p:sp>
+    </p:spTree>
+    <p:extLst>
+      <p:ext uri="{BB962C8B-B14F-4D97-AF65-F5344CB8AC3E}">
+        <p14:creationId xmlns:p14="http://schemas.microsoft.com/office/powerpoint/2010/main" val="1024086991"/>
+      </p:ext>
+    </p:extLst>
+  </p:cSld>
+  <p:clrMapOvr>
+    <a:masterClrMapping/>
+  </p:clrMapOvr>
+</p:notes>
+</file>
+
+<file path=ppt/notesSlides/notesSlide15.xml><?xml version="1.0" encoding="utf-8"?>
+<p:notes xmlns:a="http://schemas.openxmlformats.org/drawingml/2006/main" xmlns:r="http://schemas.openxmlformats.org/officeDocument/2006/relationships" xmlns:p="http://schemas.openxmlformats.org/presentationml/2006/main">
+  <p:cSld>
+    <p:spTree>
+      <p:nvGrpSpPr>
+        <p:cNvPr id="1" name=""/>
+        <p:cNvGrpSpPr/>
+        <p:nvPr/>
+      </p:nvGrpSpPr>
+      <p:grpSpPr>
+        <a:xfrm>
+          <a:off x="0" y="0"/>
+          <a:ext cx="0" cy="0"/>
+          <a:chOff x="0" y="0"/>
+          <a:chExt cx="0" cy="0"/>
+        </a:xfrm>
+      </p:grpSpPr>
+      <p:sp>
+        <p:nvSpPr>
+          <p:cNvPr id="2" name="Slide Image Placeholder 1"/>
+          <p:cNvSpPr>
+            <a:spLocks noGrp="1" noRot="1" noChangeAspect="1"/>
+          </p:cNvSpPr>
+          <p:nvPr>
+            <p:ph type="sldImg"/>
+          </p:nvPr>
+        </p:nvSpPr>
+        <p:spPr/>
+      </p:sp>
+      <p:sp>
+        <p:nvSpPr>
+          <p:cNvPr id="3" name="Notes Placeholder 2"/>
+          <p:cNvSpPr>
+            <a:spLocks noGrp="1"/>
+          </p:cNvSpPr>
+          <p:nvPr>
+            <p:ph type="body" idx="1"/>
+          </p:nvPr>
+        </p:nvSpPr>
+        <p:spPr/>
+        <p:txBody>
+          <a:bodyPr/>
+          <a:lstStyle/>
+          <a:p>
+            <a:r>
+              <a:rPr lang="en-US" dirty="0"/>
+              <a:t>Backup answers: classical 2-opt beats our QUBO on PLAIN routing and we say so on slide 5 — the real claim is Experiment 2 (constraint satisfaction by construction). QAOA and real D-Wave hardware are both demonstrated via run_qaoa_demo.py and run_on_real_quantum_hardware.py, not just claimed. Analytics/OR-Tools/QAOA are all optional dependencies with graceful degradation — see README.</a:t>
+            </a:r>
+            <a:endParaRPr lang="en-US" dirty="0"/>
+          </a:p>
+        </p:txBody>
+      </p:sp>
+      <p:sp>
+        <p:nvSpPr>
+          <p:cNvPr id="4" name="Slide Number Placeholder 3"/>
+          <p:cNvSpPr>
+            <a:spLocks noGrp="1"/>
+          </p:cNvSpPr>
+          <p:nvPr>
+            <p:ph type="sldNum" sz="quarter" idx="10"/>
+          </p:nvPr>
+        </p:nvSpPr>
+        <p:spPr/>
+        <p:txBody>
+          <a:bodyPr/>
+          <a:lstStyle/>
+          <a:p>
+            <a:fld id="{F7021451-1387-4CA6-816F-3879F97B5CBC}" type="slidenum">
+              <a:rPr lang="en-US"/>
+              <a:t>15</a:t>
             </a:fld>
             <a:endParaRPr lang="en-US"/>
           </a:p>
@@ -2630,7 +2897,7 @@
                 <a:ea typeface="Calibri" pitchFamily="34" charset="-122"/>
                 <a:cs typeface="Calibri" pitchFamily="34" charset="-120"/>
               </a:rPr>
-              <a:t>WHY THIS IS PATENT-SHAPED, NOT JUST CODE</a:t>
+              <a:t>BEYOND ONE VEHICLE</a:t>
             </a:r>
             <a:endParaRPr lang="en-US" sz="1300" dirty="0"/>
           </a:p>
@@ -2669,7 +2936,7 @@
                 <a:ea typeface="Cambria" pitchFamily="34" charset="-122"/>
                 <a:cs typeface="Cambria" pitchFamily="34" charset="-120"/>
               </a:rPr>
-              <a:t>A concrete, measurable technical effect</a:t>
+              <a:t>Multi-vehicle dispatch, with capacity that means what it says</a:t>
             </a:r>
             <a:endParaRPr lang="en-US" sz="3200" dirty="0"/>
           </a:p>
@@ -2683,25 +2950,18 @@
         </p:nvSpPr>
         <p:spPr>
           <a:xfrm>
-            <a:off x="548640" y="1783080"/>
-            <a:ext cx="11064240" cy="1737360"/>
-          </a:xfrm>
-          <a:prstGeom prst="roundRect">
-            <a:avLst>
-              <a:gd name="adj" fmla="val 6316"/>
-            </a:avLst>
+            <a:off x="548640" y="1874520"/>
+            <a:ext cx="457200" cy="457200"/>
+          </a:xfrm>
+          <a:prstGeom prst="ellipse">
+            <a:avLst/>
           </a:prstGeom>
           <a:solidFill>
-            <a:srgbClr val="1E1B4B"/>
+            <a:srgbClr val="7C3AED">
+              <a:alpha val="15000"/>
+            </a:srgbClr>
           </a:solidFill>
           <a:ln/>
-          <a:effectLst>
-            <a:outerShdw sx="100000" sy="100000" kx="0" ky="0" algn="bl" rotWithShape="0" blurRad="76200" dist="38100" dir="5400000">
-              <a:srgbClr val="0F172A">
-                <a:alpha val="25000"/>
-              </a:srgbClr>
-            </a:outerShdw>
-          </a:effectLst>
         </p:spPr>
       </p:sp>
       <p:sp>
@@ -2712,8 +2972,86 @@
         </p:nvSpPr>
         <p:spPr>
           <a:xfrm>
-            <a:off x="914400" y="1965960"/>
-            <a:ext cx="10332720" cy="1371600"/>
+            <a:off x="548640" y="1874520"/>
+            <a:ext cx="457200" cy="457200"/>
+          </a:xfrm>
+          <a:prstGeom prst="rect">
+            <a:avLst/>
+          </a:prstGeom>
+          <a:noFill/>
+          <a:ln/>
+        </p:spPr>
+        <p:txBody>
+          <a:bodyPr wrap="square" rtlCol="0" anchor="ctr"/>
+          <a:lstStyle/>
+          <a:p>
+            <a:pPr algn="ctr" indent="0" marL="0">
+              <a:buNone/>
+            </a:pPr>
+            <a:r>
+              <a:rPr lang="en-US" sz="1600" b="1" dirty="0">
+                <a:solidFill>
+                  <a:srgbClr val="7C3AED"/>
+                </a:solidFill>
+                <a:latin typeface="Cambria" pitchFamily="34" charset="0"/>
+                <a:ea typeface="Cambria" pitchFamily="34" charset="-122"/>
+                <a:cs typeface="Cambria" pitchFamily="34" charset="-120"/>
+              </a:rPr>
+              <a:t>1</a:t>
+            </a:r>
+            <a:endParaRPr lang="en-US" sz="1600" dirty="0"/>
+          </a:p>
+        </p:txBody>
+      </p:sp>
+      <p:sp>
+        <p:nvSpPr>
+          <p:cNvPr id="6" name="Text 4"/>
+          <p:cNvSpPr txBox="1"/>
+          <p:nvPr/>
+        </p:nvSpPr>
+        <p:spPr>
+          <a:xfrm>
+            <a:off x="1234440" y="1783080"/>
+            <a:ext cx="2834640" cy="1005840"/>
+          </a:xfrm>
+          <a:prstGeom prst="rect">
+            <a:avLst/>
+          </a:prstGeom>
+          <a:noFill/>
+          <a:ln/>
+        </p:spPr>
+        <p:txBody>
+          <a:bodyPr wrap="square" rtlCol="0" anchor="ctr"/>
+          <a:lstStyle/>
+          <a:p>
+            <a:pPr indent="0" marL="0">
+              <a:buNone/>
+            </a:pPr>
+            <a:r>
+              <a:rPr lang="en-US" sz="1450" b="1" dirty="0">
+                <a:solidFill>
+                  <a:srgbClr val="1E1B4B"/>
+                </a:solidFill>
+                <a:latin typeface="Cambria" pitchFamily="34" charset="0"/>
+                <a:ea typeface="Cambria" pitchFamily="34" charset="-122"/>
+                <a:cs typeface="Cambria" pitchFamily="34" charset="-120"/>
+              </a:rPr>
+              <a:t>Balanced by default</a:t>
+            </a:r>
+            <a:endParaRPr lang="en-US" sz="1450" dirty="0"/>
+          </a:p>
+        </p:txBody>
+      </p:sp>
+      <p:sp>
+        <p:nvSpPr>
+          <p:cNvPr id="7" name="Text 5"/>
+          <p:cNvSpPr txBox="1"/>
+          <p:nvPr/>
+        </p:nvSpPr>
+        <p:spPr>
+          <a:xfrm>
+            <a:off x="4206240" y="1783080"/>
+            <a:ext cx="7406640" cy="1005840"/>
           </a:xfrm>
           <a:prstGeom prst="rect">
             <a:avLst/>
@@ -2727,58 +3065,154 @@
           <a:p>
             <a:pPr indent="0" marL="0">
               <a:lnSpc>
-                <a:spcPct val="130000"/>
+                <a:spcPct val="120000"/>
               </a:lnSpc>
               <a:buNone/>
             </a:pPr>
             <a:r>
-              <a:rPr lang="en-US" sz="1550" i="1" dirty="0">
-                <a:solidFill>
-                  <a:srgbClr val="E0E7FF"/>
-                </a:solidFill>
-                <a:latin typeface="Calibri" pitchFamily="34" charset="0"/>
-                <a:ea typeface="Calibri" pitchFamily="34" charset="-122"/>
-                <a:cs typeface="Calibri" pitchFamily="34" charset="-120"/>
-              </a:rPr>
-              <a:t>“A routing optimizer in which additional real-world dispatch constraints are incorporated as composable penalty terms within a single QUBO formulation, guaranteeing constraint satisfaction by construction — compared to a measured tendency of unconstrained classical local-search heuristics to violate such constraints and require costly post-hoc repair.”</a:t>
-            </a:r>
-            <a:endParaRPr lang="en-US" sz="1550" dirty="0"/>
-          </a:p>
-        </p:txBody>
-      </p:sp>
-      <p:sp>
-        <p:nvSpPr>
-          <p:cNvPr id="6" name="Text 4"/>
-          <p:cNvSpPr txBox="1"/>
-          <p:nvPr/>
-        </p:nvSpPr>
-        <p:spPr>
-          <a:xfrm>
-            <a:off x="548640" y="3794760"/>
-            <a:ext cx="11064240" cy="2377440"/>
-          </a:xfrm>
-          <a:prstGeom prst="rect">
-            <a:avLst/>
-          </a:prstGeom>
-          <a:noFill/>
-          <a:ln/>
-        </p:spPr>
-        <p:txBody>
-          <a:bodyPr wrap="square" rtlCol="0" anchor="ctr"/>
-          <a:lstStyle/>
-          <a:p>
-            <a:pPr marL="342900" indent="-342900">
+              <a:rPr lang="en-US" sz="1250" dirty="0">
+                <a:solidFill>
+                  <a:srgbClr val="475569"/>
+                </a:solidFill>
+                <a:latin typeface="Calibri" pitchFamily="34" charset="0"/>
+                <a:ea typeface="Calibri" pitchFamily="34" charset="-122"/>
+                <a:cs typeface="Calibri" pitchFamily="34" charset="-120"/>
+              </a:rPr>
+              <a:t>Farthest-point clustering alone can hand one vehicle 14 stops and another 2 — every split is rebalanced against a fair-share target automatically.</a:t>
+            </a:r>
+            <a:endParaRPr lang="en-US" sz="1250" dirty="0"/>
+          </a:p>
+        </p:txBody>
+      </p:sp>
+      <p:sp>
+        <p:nvSpPr>
+          <p:cNvPr id="8" name="Shape 6"/>
+          <p:cNvSpPr/>
+          <p:nvPr/>
+        </p:nvSpPr>
+        <p:spPr>
+          <a:xfrm>
+            <a:off x="548640" y="2953512"/>
+            <a:ext cx="457200" cy="457200"/>
+          </a:xfrm>
+          <a:prstGeom prst="ellipse">
+            <a:avLst/>
+          </a:prstGeom>
+          <a:solidFill>
+            <a:srgbClr val="7C3AED">
+              <a:alpha val="15000"/>
+            </a:srgbClr>
+          </a:solidFill>
+          <a:ln/>
+        </p:spPr>
+      </p:sp>
+      <p:sp>
+        <p:nvSpPr>
+          <p:cNvPr id="9" name="Text 7"/>
+          <p:cNvSpPr txBox="1"/>
+          <p:nvPr/>
+        </p:nvSpPr>
+        <p:spPr>
+          <a:xfrm>
+            <a:off x="548640" y="2953512"/>
+            <a:ext cx="457200" cy="457200"/>
+          </a:xfrm>
+          <a:prstGeom prst="rect">
+            <a:avLst/>
+          </a:prstGeom>
+          <a:noFill/>
+          <a:ln/>
+        </p:spPr>
+        <p:txBody>
+          <a:bodyPr wrap="square" rtlCol="0" anchor="ctr"/>
+          <a:lstStyle/>
+          <a:p>
+            <a:pPr algn="ctr" indent="0" marL="0">
+              <a:buNone/>
+            </a:pPr>
+            <a:r>
+              <a:rPr lang="en-US" sz="1600" b="1" dirty="0">
+                <a:solidFill>
+                  <a:srgbClr val="7C3AED"/>
+                </a:solidFill>
+                <a:latin typeface="Cambria" pitchFamily="34" charset="0"/>
+                <a:ea typeface="Cambria" pitchFamily="34" charset="-122"/>
+                <a:cs typeface="Cambria" pitchFamily="34" charset="-120"/>
+              </a:rPr>
+              <a:t>2</a:t>
+            </a:r>
+            <a:endParaRPr lang="en-US" sz="1600" dirty="0"/>
+          </a:p>
+        </p:txBody>
+      </p:sp>
+      <p:sp>
+        <p:nvSpPr>
+          <p:cNvPr id="10" name="Text 8"/>
+          <p:cNvSpPr txBox="1"/>
+          <p:nvPr/>
+        </p:nvSpPr>
+        <p:spPr>
+          <a:xfrm>
+            <a:off x="1234440" y="2862072"/>
+            <a:ext cx="2834640" cy="1005840"/>
+          </a:xfrm>
+          <a:prstGeom prst="rect">
+            <a:avLst/>
+          </a:prstGeom>
+          <a:noFill/>
+          <a:ln/>
+        </p:spPr>
+        <p:txBody>
+          <a:bodyPr wrap="square" rtlCol="0" anchor="ctr"/>
+          <a:lstStyle/>
+          <a:p>
+            <a:pPr indent="0" marL="0">
+              <a:buNone/>
+            </a:pPr>
+            <a:r>
+              <a:rPr lang="en-US" sz="1450" b="1" dirty="0">
+                <a:solidFill>
+                  <a:srgbClr val="1E1B4B"/>
+                </a:solidFill>
+                <a:latin typeface="Cambria" pitchFamily="34" charset="0"/>
+                <a:ea typeface="Cambria" pitchFamily="34" charset="-122"/>
+                <a:cs typeface="Cambria" pitchFamily="34" charset="-120"/>
+              </a:rPr>
+              <a:t>A real, enforced cap</a:t>
+            </a:r>
+            <a:endParaRPr lang="en-US" sz="1450" dirty="0"/>
+          </a:p>
+        </p:txBody>
+      </p:sp>
+      <p:sp>
+        <p:nvSpPr>
+          <p:cNvPr id="11" name="Text 9"/>
+          <p:cNvSpPr txBox="1"/>
+          <p:nvPr/>
+        </p:nvSpPr>
+        <p:spPr>
+          <a:xfrm>
+            <a:off x="4206240" y="2862072"/>
+            <a:ext cx="7406640" cy="1005840"/>
+          </a:xfrm>
+          <a:prstGeom prst="rect">
+            <a:avLst/>
+          </a:prstGeom>
+          <a:noFill/>
+          <a:ln/>
+        </p:spPr>
+        <p:txBody>
+          <a:bodyPr wrap="square" rtlCol="0" anchor="ctr"/>
+          <a:lstStyle/>
+          <a:p>
+            <a:pPr indent="0" marL="0">
               <a:lnSpc>
-                <a:spcPct val="125000"/>
+                <a:spcPct val="120000"/>
               </a:lnSpc>
-              <a:spcAft>
-                <a:spcPts val="1200"/>
-              </a:spcAft>
-              <a:buSzPct val="100000"/>
-              <a:buChar char="●"/>
-            </a:pPr>
-            <a:r>
-              <a:rPr lang="en-US" sz="1450" dirty="0">
+              <a:buNone/>
+            </a:pPr>
+            <a:r>
+              <a:rPr lang="en-US" sz="1250" dirty="0">
                 <a:solidFill>
                   <a:srgbClr val="475569"/>
                 </a:solidFill>
@@ -2786,23 +3220,141 @@
                 <a:ea typeface="Calibri" pitchFamily="34" charset="-122"/>
                 <a:cs typeface="Calibri" pitchFamily="34" charset="-120"/>
               </a:rPr>
-              <a:t>Measured, not asserted: Experiment 2's 15/15 vs 8/15 gap is reproducible with `python3 src/benchmark.py`.</a:t>
+              <a:t>“Max/vehicle” genuinely limits every vehicle's stop count, auto-raising the fleet size if the requested vehicles can't satisfy it — not a suggestion.</a:t>
+            </a:r>
+            <a:endParaRPr lang="en-US" sz="1250" dirty="0"/>
+          </a:p>
+        </p:txBody>
+      </p:sp>
+      <p:sp>
+        <p:nvSpPr>
+          <p:cNvPr id="12" name="Shape 10"/>
+          <p:cNvSpPr/>
+          <p:nvPr/>
+        </p:nvSpPr>
+        <p:spPr>
+          <a:xfrm>
+            <a:off x="548640" y="4032504"/>
+            <a:ext cx="457200" cy="457200"/>
+          </a:xfrm>
+          <a:prstGeom prst="ellipse">
+            <a:avLst/>
+          </a:prstGeom>
+          <a:solidFill>
+            <a:srgbClr val="7C3AED">
+              <a:alpha val="15000"/>
+            </a:srgbClr>
+          </a:solidFill>
+          <a:ln/>
+        </p:spPr>
+      </p:sp>
+      <p:sp>
+        <p:nvSpPr>
+          <p:cNvPr id="13" name="Text 11"/>
+          <p:cNvSpPr txBox="1"/>
+          <p:nvPr/>
+        </p:nvSpPr>
+        <p:spPr>
+          <a:xfrm>
+            <a:off x="548640" y="4032504"/>
+            <a:ext cx="457200" cy="457200"/>
+          </a:xfrm>
+          <a:prstGeom prst="rect">
+            <a:avLst/>
+          </a:prstGeom>
+          <a:noFill/>
+          <a:ln/>
+        </p:spPr>
+        <p:txBody>
+          <a:bodyPr wrap="square" rtlCol="0" anchor="ctr"/>
+          <a:lstStyle/>
+          <a:p>
+            <a:pPr algn="ctr" indent="0" marL="0">
+              <a:buNone/>
+            </a:pPr>
+            <a:r>
+              <a:rPr lang="en-US" sz="1600" b="1" dirty="0">
+                <a:solidFill>
+                  <a:srgbClr val="7C3AED"/>
+                </a:solidFill>
+                <a:latin typeface="Cambria" pitchFamily="34" charset="0"/>
+                <a:ea typeface="Cambria" pitchFamily="34" charset="-122"/>
+                <a:cs typeface="Cambria" pitchFamily="34" charset="-120"/>
+              </a:rPr>
+              <a:t>3</a:t>
+            </a:r>
+            <a:endParaRPr lang="en-US" sz="1600" dirty="0"/>
+          </a:p>
+        </p:txBody>
+      </p:sp>
+      <p:sp>
+        <p:nvSpPr>
+          <p:cNvPr id="14" name="Text 12"/>
+          <p:cNvSpPr txBox="1"/>
+          <p:nvPr/>
+        </p:nvSpPr>
+        <p:spPr>
+          <a:xfrm>
+            <a:off x="1234440" y="3941064"/>
+            <a:ext cx="2834640" cy="1005840"/>
+          </a:xfrm>
+          <a:prstGeom prst="rect">
+            <a:avLst/>
+          </a:prstGeom>
+          <a:noFill/>
+          <a:ln/>
+        </p:spPr>
+        <p:txBody>
+          <a:bodyPr wrap="square" rtlCol="0" anchor="ctr"/>
+          <a:lstStyle/>
+          <a:p>
+            <a:pPr indent="0" marL="0">
+              <a:buNone/>
+            </a:pPr>
+            <a:r>
+              <a:rPr lang="en-US" sz="1450" b="1" dirty="0">
+                <a:solidFill>
+                  <a:srgbClr val="1E1B4B"/>
+                </a:solidFill>
+                <a:latin typeface="Cambria" pitchFamily="34" charset="0"/>
+                <a:ea typeface="Cambria" pitchFamily="34" charset="-122"/>
+                <a:cs typeface="Cambria" pitchFamily="34" charset="-120"/>
+              </a:rPr>
+              <a:t>Capacity by load, not just count</a:t>
             </a:r>
             <a:endParaRPr lang="en-US" sz="1450" dirty="0"/>
           </a:p>
-          <a:p>
-            <a:pPr marL="342900" indent="-342900">
+        </p:txBody>
+      </p:sp>
+      <p:sp>
+        <p:nvSpPr>
+          <p:cNvPr id="15" name="Text 13"/>
+          <p:cNvSpPr txBox="1"/>
+          <p:nvPr/>
+        </p:nvSpPr>
+        <p:spPr>
+          <a:xfrm>
+            <a:off x="4206240" y="3941064"/>
+            <a:ext cx="7406640" cy="1005840"/>
+          </a:xfrm>
+          <a:prstGeom prst="rect">
+            <a:avLst/>
+          </a:prstGeom>
+          <a:noFill/>
+          <a:ln/>
+        </p:spPr>
+        <p:txBody>
+          <a:bodyPr wrap="square" rtlCol="0" anchor="ctr"/>
+          <a:lstStyle/>
+          <a:p>
+            <a:pPr indent="0" marL="0">
               <a:lnSpc>
-                <a:spcPct val="125000"/>
+                <a:spcPct val="120000"/>
               </a:lnSpc>
-              <a:spcAft>
-                <a:spcPts val="1200"/>
-              </a:spcAft>
-              <a:buSzPct val="100000"/>
-              <a:buChar char="●"/>
-            </a:pPr>
-            <a:r>
-              <a:rPr lang="en-US" sz="1450" dirty="0">
+              <a:buNone/>
+            </a:pPr>
+            <a:r>
+              <a:rPr lang="en-US" sz="1250" dirty="0">
                 <a:solidFill>
                   <a:srgbClr val="475569"/>
                 </a:solidFill>
@@ -2810,23 +3362,141 @@
                 <a:ea typeface="Calibri" pitchFamily="34" charset="-122"/>
                 <a:cs typeface="Calibri" pitchFamily="34" charset="-120"/>
               </a:rPr>
-              <a:t>Composable by design: precedence and multi-vehicle capacity are each one more penalty term — not a bespoke solver per rule, unlike classical VRP tooling.</a:t>
+              <a:t>Per-stop demand weights turn the same cap into a total-weight limit, for when a crate and a pallet aren't the same “one stop.”</a:t>
+            </a:r>
+            <a:endParaRPr lang="en-US" sz="1250" dirty="0"/>
+          </a:p>
+        </p:txBody>
+      </p:sp>
+      <p:sp>
+        <p:nvSpPr>
+          <p:cNvPr id="16" name="Shape 14"/>
+          <p:cNvSpPr/>
+          <p:nvPr/>
+        </p:nvSpPr>
+        <p:spPr>
+          <a:xfrm>
+            <a:off x="548640" y="5111496"/>
+            <a:ext cx="457200" cy="457200"/>
+          </a:xfrm>
+          <a:prstGeom prst="ellipse">
+            <a:avLst/>
+          </a:prstGeom>
+          <a:solidFill>
+            <a:srgbClr val="7C3AED">
+              <a:alpha val="15000"/>
+            </a:srgbClr>
+          </a:solidFill>
+          <a:ln/>
+        </p:spPr>
+      </p:sp>
+      <p:sp>
+        <p:nvSpPr>
+          <p:cNvPr id="17" name="Text 15"/>
+          <p:cNvSpPr txBox="1"/>
+          <p:nvPr/>
+        </p:nvSpPr>
+        <p:spPr>
+          <a:xfrm>
+            <a:off x="548640" y="5111496"/>
+            <a:ext cx="457200" cy="457200"/>
+          </a:xfrm>
+          <a:prstGeom prst="rect">
+            <a:avLst/>
+          </a:prstGeom>
+          <a:noFill/>
+          <a:ln/>
+        </p:spPr>
+        <p:txBody>
+          <a:bodyPr wrap="square" rtlCol="0" anchor="ctr"/>
+          <a:lstStyle/>
+          <a:p>
+            <a:pPr algn="ctr" indent="0" marL="0">
+              <a:buNone/>
+            </a:pPr>
+            <a:r>
+              <a:rPr lang="en-US" sz="1600" b="1" dirty="0">
+                <a:solidFill>
+                  <a:srgbClr val="7C3AED"/>
+                </a:solidFill>
+                <a:latin typeface="Cambria" pitchFamily="34" charset="0"/>
+                <a:ea typeface="Cambria" pitchFamily="34" charset="-122"/>
+                <a:cs typeface="Cambria" pitchFamily="34" charset="-120"/>
+              </a:rPr>
+              <a:t>4</a:t>
+            </a:r>
+            <a:endParaRPr lang="en-US" sz="1600" dirty="0"/>
+          </a:p>
+        </p:txBody>
+      </p:sp>
+      <p:sp>
+        <p:nvSpPr>
+          <p:cNvPr id="18" name="Text 16"/>
+          <p:cNvSpPr txBox="1"/>
+          <p:nvPr/>
+        </p:nvSpPr>
+        <p:spPr>
+          <a:xfrm>
+            <a:off x="1234440" y="5020056"/>
+            <a:ext cx="2834640" cy="1005840"/>
+          </a:xfrm>
+          <a:prstGeom prst="rect">
+            <a:avLst/>
+          </a:prstGeom>
+          <a:noFill/>
+          <a:ln/>
+        </p:spPr>
+        <p:txBody>
+          <a:bodyPr wrap="square" rtlCol="0" anchor="ctr"/>
+          <a:lstStyle/>
+          <a:p>
+            <a:pPr indent="0" marL="0">
+              <a:buNone/>
+            </a:pPr>
+            <a:r>
+              <a:rPr lang="en-US" sz="1450" b="1" dirty="0">
+                <a:solidFill>
+                  <a:srgbClr val="1E1B4B"/>
+                </a:solidFill>
+                <a:latin typeface="Cambria" pitchFamily="34" charset="0"/>
+                <a:ea typeface="Cambria" pitchFamily="34" charset="-122"/>
+                <a:cs typeface="Cambria" pitchFamily="34" charset="-120"/>
+              </a:rPr>
+              <a:t>A bin-packing bug we caught ourselves</a:t>
             </a:r>
             <a:endParaRPr lang="en-US" sz="1450" dirty="0"/>
           </a:p>
-          <a:p>
-            <a:pPr marL="342900" indent="-342900">
+        </p:txBody>
+      </p:sp>
+      <p:sp>
+        <p:nvSpPr>
+          <p:cNvPr id="19" name="Text 17"/>
+          <p:cNvSpPr txBox="1"/>
+          <p:nvPr/>
+        </p:nvSpPr>
+        <p:spPr>
+          <a:xfrm>
+            <a:off x="4206240" y="5020056"/>
+            <a:ext cx="7406640" cy="1005840"/>
+          </a:xfrm>
+          <a:prstGeom prst="rect">
+            <a:avLst/>
+          </a:prstGeom>
+          <a:noFill/>
+          <a:ln/>
+        </p:spPr>
+        <p:txBody>
+          <a:bodyPr wrap="square" rtlCol="0" anchor="ctr"/>
+          <a:lstStyle/>
+          <a:p>
+            <a:pPr indent="0" marL="0">
               <a:lnSpc>
-                <a:spcPct val="125000"/>
+                <a:spcPct val="120000"/>
               </a:lnSpc>
-              <a:spcAft>
-                <a:spcPts val="1200"/>
-              </a:spcAft>
-              <a:buSzPct val="100000"/>
-              <a:buChar char="●"/>
-            </a:pPr>
-            <a:r>
-              <a:rPr lang="en-US" sz="1450" dirty="0">
+              <a:buNone/>
+            </a:pPr>
+            <a:r>
+              <a:rPr lang="en-US" sz="1250" dirty="0">
                 <a:solidFill>
                   <a:srgbClr val="475569"/>
                 </a:solidFill>
@@ -2834,15 +3504,15 @@
                 <a:ea typeface="Calibri" pitchFamily="34" charset="-122"/>
                 <a:cs typeface="Calibri" pitchFamily="34" charset="-120"/>
               </a:rPr>
-              <a:t>Aligned with the 2025 CRI patent guidance's bar for a “concrete, measurable technical effect,” not an abstract algorithm claim.</a:t>
-            </a:r>
-            <a:endParaRPr lang="en-US" sz="1450" dirty="0"/>
-          </a:p>
-        </p:txBody>
-      </p:sp>
-      <p:sp>
-        <p:nvSpPr>
-          <p:cNvPr id="7" name="Text 5"/>
+              <a:t>ceil(total demand / capacity) is only a lower bound with uneven weights — our own test suite caught the undercount; fixed with a retry loop that's now covered by regression tests.</a:t>
+            </a:r>
+            <a:endParaRPr lang="en-US" sz="1250" dirty="0"/>
+          </a:p>
+        </p:txBody>
+      </p:sp>
+      <p:sp>
+        <p:nvSpPr>
+          <p:cNvPr id="20" name="Text 18"/>
           <p:cNvSpPr txBox="1"/>
           <p:nvPr/>
         </p:nvSpPr>
@@ -2881,7 +3551,7 @@
       </p:sp>
       <p:sp>
         <p:nvSpPr>
-          <p:cNvPr id="8" name="Text 6"/>
+          <p:cNvPr id="21" name="Text 19"/>
           <p:cNvSpPr txBox="1"/>
           <p:nvPr/>
         </p:nvSpPr>
@@ -2983,7 +3653,7 @@
                 <a:ea typeface="Calibri" pitchFamily="34" charset="-122"/>
                 <a:cs typeface="Calibri" pitchFamily="34" charset="-120"/>
               </a:rPr>
-              <a:t>WHAT'S NEXT</a:t>
+              <a:t>A PRODUCT, NOT JUST AN ALGORITHM</a:t>
             </a:r>
             <a:endParaRPr lang="en-US" sz="1300" dirty="0"/>
           </a:p>
@@ -3022,7 +3692,7 @@
                 <a:ea typeface="Cambria" pitchFamily="34" charset="-122"/>
                 <a:cs typeface="Cambria" pitchFamily="34" charset="-120"/>
               </a:rPr>
-              <a:t>Already live vs. the honest next steps</a:t>
+              <a:t>Everything a judge can click, today</a:t>
             </a:r>
             <a:endParaRPr lang="en-US" sz="3200" dirty="0"/>
           </a:p>
@@ -3037,11 +3707,11 @@
         <p:spPr>
           <a:xfrm>
             <a:off x="548640" y="1828800"/>
-            <a:ext cx="5394960" cy="4114800"/>
+            <a:ext cx="2724912" cy="1965960"/>
           </a:xfrm>
           <a:prstGeom prst="roundRect">
             <a:avLst>
-              <a:gd name="adj" fmla="val 2667"/>
+              <a:gd name="adj" fmla="val 4651"/>
             </a:avLst>
           </a:prstGeom>
           <a:solidFill>
@@ -3070,14 +3740,14 @@
         </p:nvSpPr>
         <p:spPr>
           <a:xfrm>
-            <a:off x="868680" y="2148840"/>
-            <a:ext cx="320040" cy="320040"/>
+            <a:off x="749808" y="2029968"/>
+            <a:ext cx="384048" cy="384048"/>
           </a:xfrm>
           <a:prstGeom prst="ellipse">
             <a:avLst/>
           </a:prstGeom>
           <a:solidFill>
-            <a:srgbClr val="22C55E"/>
+            <a:srgbClr val="7C3AED"/>
           </a:solidFill>
           <a:ln/>
         </p:spPr>
@@ -3090,8 +3760,8 @@
         </p:nvSpPr>
         <p:spPr>
           <a:xfrm>
-            <a:off x="1325880" y="2121408"/>
-            <a:ext cx="4297680" cy="411480"/>
+            <a:off x="731520" y="2542032"/>
+            <a:ext cx="2359152" cy="457200"/>
           </a:xfrm>
           <a:prstGeom prst="rect">
             <a:avLst/>
@@ -3107,7 +3777,7 @@
               <a:buNone/>
             </a:pPr>
             <a:r>
-              <a:rPr lang="en-US" sz="1700" b="1" dirty="0">
+              <a:rPr lang="en-US" sz="1350" b="1" dirty="0">
                 <a:solidFill>
                   <a:srgbClr val="1E1B4B"/>
                 </a:solidFill>
@@ -3115,9 +3785,9 @@
                 <a:ea typeface="Cambria" pitchFamily="34" charset="-122"/>
                 <a:cs typeface="Cambria" pitchFamily="34" charset="-120"/>
               </a:rPr>
-              <a:t>Already shipped</a:t>
-            </a:r>
-            <a:endParaRPr lang="en-US" sz="1700" dirty="0"/>
+              <a:t>Bulk import</a:t>
+            </a:r>
+            <a:endParaRPr lang="en-US" sz="1350" dirty="0"/>
           </a:p>
         </p:txBody>
       </p:sp>
@@ -3129,31 +3799,27 @@
         </p:nvSpPr>
         <p:spPr>
           <a:xfrm>
-            <a:off x="914400" y="2788920"/>
-            <a:ext cx="4663440" cy="2834640"/>
-          </a:xfrm>
-          <a:prstGeom prst="rect">
-            <a:avLst/>
-          </a:prstGeom>
-          <a:noFill/>
-          <a:ln/>
-        </p:spPr>
-        <p:txBody>
-          <a:bodyPr wrap="square" rtlCol="0" anchor="ctr"/>
-          <a:lstStyle/>
-          <a:p>
-            <a:pPr marL="342900" indent="-342900">
+            <a:off x="731520" y="2971800"/>
+            <a:ext cx="2359152" cy="777240"/>
+          </a:xfrm>
+          <a:prstGeom prst="rect">
+            <a:avLst/>
+          </a:prstGeom>
+          <a:noFill/>
+          <a:ln/>
+        </p:spPr>
+        <p:txBody>
+          <a:bodyPr wrap="square" rtlCol="0" anchor="ctr"/>
+          <a:lstStyle/>
+          <a:p>
+            <a:pPr indent="0" marL="0">
               <a:lnSpc>
-                <a:spcPct val="125000"/>
+                <a:spcPct val="120000"/>
               </a:lnSpc>
-              <a:spcAft>
-                <a:spcPts val="1600"/>
-              </a:spcAft>
-              <a:buSzPct val="100000"/>
-              <a:buChar char="●"/>
-            </a:pPr>
-            <a:r>
-              <a:rPr lang="en-US" sz="1350" dirty="0">
+              <a:buNone/>
+            </a:pPr>
+            <a:r>
+              <a:rPr lang="en-US" sz="1050" dirty="0">
                 <a:solidFill>
                   <a:srgbClr val="475569"/>
                 </a:solidFill>
@@ -3161,129 +3827,9 @@
                 <a:ea typeface="Calibri" pitchFamily="34" charset="-122"/>
                 <a:cs typeface="Calibri" pitchFamily="34" charset="-120"/>
               </a:rPr>
-              <a:t>Precedence constraints</a:t>
-            </a:r>
-            <a:endParaRPr lang="en-US" sz="1350" dirty="0"/>
-          </a:p>
-          <a:p>
-            <a:pPr marL="342900" indent="-342900">
-              <a:lnSpc>
-                <a:spcPct val="125000"/>
-              </a:lnSpc>
-              <a:spcAft>
-                <a:spcPts val="1600"/>
-              </a:spcAft>
-              <a:buSzPct val="100000"/>
-              <a:buChar char="●"/>
-            </a:pPr>
-            <a:r>
-              <a:rPr lang="en-US" sz="1350" dirty="0">
-                <a:solidFill>
-                  <a:srgbClr val="475569"/>
-                </a:solidFill>
-                <a:latin typeface="Calibri" pitchFamily="34" charset="0"/>
-                <a:ea typeface="Calibri" pitchFamily="34" charset="-122"/>
-                <a:cs typeface="Calibri" pitchFamily="34" charset="-120"/>
-              </a:rPr>
-              <a:t>Numeric time-window constraints</a:t>
-            </a:r>
-            <a:endParaRPr lang="en-US" sz="1350" dirty="0"/>
-          </a:p>
-          <a:p>
-            <a:pPr marL="342900" indent="-342900">
-              <a:lnSpc>
-                <a:spcPct val="125000"/>
-              </a:lnSpc>
-              <a:spcAft>
-                <a:spcPts val="1600"/>
-              </a:spcAft>
-              <a:buSzPct val="100000"/>
-              <a:buChar char="●"/>
-            </a:pPr>
-            <a:r>
-              <a:rPr lang="en-US" sz="1350" dirty="0">
-                <a:solidFill>
-                  <a:srgbClr val="475569"/>
-                </a:solidFill>
-                <a:latin typeface="Calibri" pitchFamily="34" charset="0"/>
-                <a:ea typeface="Calibri" pitchFamily="34" charset="-122"/>
-                <a:cs typeface="Calibri" pitchFamily="34" charset="-120"/>
-              </a:rPr>
-              <a:t>Multi-vehicle capacity (count or weight)</a:t>
-            </a:r>
-            <a:endParaRPr lang="en-US" sz="1350" dirty="0"/>
-          </a:p>
-          <a:p>
-            <a:pPr marL="342900" indent="-342900">
-              <a:lnSpc>
-                <a:spcPct val="125000"/>
-              </a:lnSpc>
-              <a:spcAft>
-                <a:spcPts val="1600"/>
-              </a:spcAft>
-              <a:buSzPct val="100000"/>
-              <a:buChar char="●"/>
-            </a:pPr>
-            <a:r>
-              <a:rPr lang="en-US" sz="1350" dirty="0">
-                <a:solidFill>
-                  <a:srgbClr val="475569"/>
-                </a:solidFill>
-                <a:latin typeface="Calibri" pitchFamily="34" charset="0"/>
-                <a:ea typeface="Calibri" pitchFamily="34" charset="-122"/>
-                <a:cs typeface="Calibri" pitchFamily="34" charset="-120"/>
-              </a:rPr>
-              <a:t>OR-Tools + QAOA comparisons</a:t>
-            </a:r>
-            <a:endParaRPr lang="en-US" sz="1350" dirty="0"/>
-          </a:p>
-          <a:p>
-            <a:pPr marL="342900" indent="-342900">
-              <a:lnSpc>
-                <a:spcPct val="125000"/>
-              </a:lnSpc>
-              <a:spcAft>
-                <a:spcPts val="1600"/>
-              </a:spcAft>
-              <a:buSzPct val="100000"/>
-              <a:buChar char="●"/>
-            </a:pPr>
-            <a:r>
-              <a:rPr lang="en-US" sz="1350" dirty="0">
-                <a:solidFill>
-                  <a:srgbClr val="475569"/>
-                </a:solidFill>
-                <a:latin typeface="Calibri" pitchFamily="34" charset="0"/>
-                <a:ea typeface="Calibri" pitchFamily="34" charset="-122"/>
-                <a:cs typeface="Calibri" pitchFamily="34" charset="-120"/>
-              </a:rPr>
-              <a:t>Live usage analytics</a:t>
-            </a:r>
-            <a:endParaRPr lang="en-US" sz="1350" dirty="0"/>
-          </a:p>
-          <a:p>
-            <a:pPr marL="342900" indent="-342900">
-              <a:lnSpc>
-                <a:spcPct val="125000"/>
-              </a:lnSpc>
-              <a:spcAft>
-                <a:spcPts val="1600"/>
-              </a:spcAft>
-              <a:buSzPct val="100000"/>
-              <a:buChar char="●"/>
-            </a:pPr>
-            <a:r>
-              <a:rPr lang="en-US" sz="1350" dirty="0">
-                <a:solidFill>
-                  <a:srgbClr val="475569"/>
-                </a:solidFill>
-                <a:latin typeface="Calibri" pitchFamily="34" charset="0"/>
-                <a:ea typeface="Calibri" pitchFamily="34" charset="-122"/>
-                <a:cs typeface="Calibri" pitchFamily="34" charset="-120"/>
-              </a:rPr>
-              <a:t>Docker + OpenAPI</a:t>
-            </a:r>
-            <a:endParaRPr lang="en-US" sz="1350" dirty="0"/>
+              <a:t>Paste or upload a CSV of stops — geocoded automatically.</a:t>
+            </a:r>
+            <a:endParaRPr lang="en-US" sz="1050" dirty="0"/>
           </a:p>
         </p:txBody>
       </p:sp>
@@ -3295,12 +3841,12 @@
         </p:nvSpPr>
         <p:spPr>
           <a:xfrm>
-            <a:off x="6217920" y="1828800"/>
-            <a:ext cx="5394960" cy="4114800"/>
+            <a:off x="3328416" y="1828800"/>
+            <a:ext cx="2724912" cy="1965960"/>
           </a:xfrm>
           <a:prstGeom prst="roundRect">
             <a:avLst>
-              <a:gd name="adj" fmla="val 2667"/>
+              <a:gd name="adj" fmla="val 4651"/>
             </a:avLst>
           </a:prstGeom>
           <a:solidFill>
@@ -3329,14 +3875,14 @@
         </p:nvSpPr>
         <p:spPr>
           <a:xfrm>
-            <a:off x="6537960" y="2148840"/>
-            <a:ext cx="320040" cy="320040"/>
+            <a:off x="3529584" y="2029968"/>
+            <a:ext cx="384048" cy="384048"/>
           </a:xfrm>
           <a:prstGeom prst="ellipse">
             <a:avLst/>
           </a:prstGeom>
           <a:solidFill>
-            <a:srgbClr val="F97316"/>
+            <a:srgbClr val="22D3EE"/>
           </a:solidFill>
           <a:ln/>
         </p:spPr>
@@ -3349,8 +3895,8 @@
         </p:nvSpPr>
         <p:spPr>
           <a:xfrm>
-            <a:off x="6995160" y="2121408"/>
-            <a:ext cx="4297680" cy="411480"/>
+            <a:off x="3511296" y="2542032"/>
+            <a:ext cx="2359152" cy="457200"/>
           </a:xfrm>
           <a:prstGeom prst="rect">
             <a:avLst/>
@@ -3366,7 +3912,7 @@
               <a:buNone/>
             </a:pPr>
             <a:r>
-              <a:rPr lang="en-US" sz="1700" b="1" dirty="0">
+              <a:rPr lang="en-US" sz="1350" b="1" dirty="0">
                 <a:solidFill>
                   <a:srgbClr val="1E1B4B"/>
                 </a:solidFill>
@@ -3374,9 +3920,9 @@
                 <a:ea typeface="Cambria" pitchFamily="34" charset="-122"/>
                 <a:cs typeface="Cambria" pitchFamily="34" charset="-120"/>
               </a:rPr>
-              <a:t>Honest next steps</a:t>
-            </a:r>
-            <a:endParaRPr lang="en-US" sz="1700" dirty="0"/>
+              <a:t>Shareable link</a:t>
+            </a:r>
+            <a:endParaRPr lang="en-US" sz="1350" dirty="0"/>
           </a:p>
         </p:txBody>
       </p:sp>
@@ -3388,31 +3934,27 @@
         </p:nvSpPr>
         <p:spPr>
           <a:xfrm>
-            <a:off x="6583680" y="2788920"/>
-            <a:ext cx="4663440" cy="2834640"/>
-          </a:xfrm>
-          <a:prstGeom prst="rect">
-            <a:avLst/>
-          </a:prstGeom>
-          <a:noFill/>
-          <a:ln/>
-        </p:spPr>
-        <p:txBody>
-          <a:bodyPr wrap="square" rtlCol="0" anchor="ctr"/>
-          <a:lstStyle/>
-          <a:p>
-            <a:pPr marL="342900" indent="-342900">
+            <a:off x="3511296" y="2971800"/>
+            <a:ext cx="2359152" cy="777240"/>
+          </a:xfrm>
+          <a:prstGeom prst="rect">
+            <a:avLst/>
+          </a:prstGeom>
+          <a:noFill/>
+          <a:ln/>
+        </p:spPr>
+        <p:txBody>
+          <a:bodyPr wrap="square" rtlCol="0" anchor="ctr"/>
+          <a:lstStyle/>
+          <a:p>
+            <a:pPr indent="0" marL="0">
               <a:lnSpc>
-                <a:spcPct val="125000"/>
+                <a:spcPct val="120000"/>
               </a:lnSpc>
-              <a:spcAft>
-                <a:spcPts val="1600"/>
-              </a:spcAft>
-              <a:buSzPct val="100000"/>
-              <a:buChar char="●"/>
-            </a:pPr>
-            <a:r>
-              <a:rPr lang="en-US" sz="1350" dirty="0">
+              <a:buNone/>
+            </a:pPr>
+            <a:r>
+              <a:rPr lang="en-US" sz="1050" dirty="0">
                 <a:solidFill>
                   <a:srgbClr val="475569"/>
                 </a:solidFill>
@@ -3420,23 +3962,134 @@
                 <a:ea typeface="Calibri" pitchFamily="34" charset="-122"/>
                 <a:cs typeface="Calibri" pitchFamily="34" charset="-120"/>
               </a:rPr>
-              <a:t>A real, paid traffic API (interface already pluggable)</a:t>
+              <a:t>One URL encodes the whole route — city, stops, method, rules.</a:t>
+            </a:r>
+            <a:endParaRPr lang="en-US" sz="1050" dirty="0"/>
+          </a:p>
+        </p:txBody>
+      </p:sp>
+      <p:sp>
+        <p:nvSpPr>
+          <p:cNvPr id="12" name="Shape 10"/>
+          <p:cNvSpPr/>
+          <p:nvPr/>
+        </p:nvSpPr>
+        <p:spPr>
+          <a:xfrm>
+            <a:off x="6108192" y="1828800"/>
+            <a:ext cx="2724912" cy="1965960"/>
+          </a:xfrm>
+          <a:prstGeom prst="roundRect">
+            <a:avLst>
+              <a:gd name="adj" fmla="val 4651"/>
+            </a:avLst>
+          </a:prstGeom>
+          <a:solidFill>
+            <a:srgbClr val="FFFFFF"/>
+          </a:solidFill>
+          <a:ln w="12700">
+            <a:solidFill>
+              <a:srgbClr val="E2E8F0"/>
+            </a:solidFill>
+            <a:prstDash val="solid"/>
+          </a:ln>
+          <a:effectLst>
+            <a:outerShdw sx="100000" sy="100000" kx="0" ky="0" algn="bl" rotWithShape="0" blurRad="76200" dist="38100" dir="5400000">
+              <a:srgbClr val="0F172A">
+                <a:alpha val="25000"/>
+              </a:srgbClr>
+            </a:outerShdw>
+          </a:effectLst>
+        </p:spPr>
+      </p:sp>
+      <p:sp>
+        <p:nvSpPr>
+          <p:cNvPr id="13" name="Shape 11"/>
+          <p:cNvSpPr/>
+          <p:nvPr/>
+        </p:nvSpPr>
+        <p:spPr>
+          <a:xfrm>
+            <a:off x="6309360" y="2029968"/>
+            <a:ext cx="384048" cy="384048"/>
+          </a:xfrm>
+          <a:prstGeom prst="ellipse">
+            <a:avLst/>
+          </a:prstGeom>
+          <a:solidFill>
+            <a:srgbClr val="7C3AED"/>
+          </a:solidFill>
+          <a:ln/>
+        </p:spPr>
+      </p:sp>
+      <p:sp>
+        <p:nvSpPr>
+          <p:cNvPr id="14" name="Text 12"/>
+          <p:cNvSpPr txBox="1"/>
+          <p:nvPr/>
+        </p:nvSpPr>
+        <p:spPr>
+          <a:xfrm>
+            <a:off x="6291072" y="2542032"/>
+            <a:ext cx="2359152" cy="457200"/>
+          </a:xfrm>
+          <a:prstGeom prst="rect">
+            <a:avLst/>
+          </a:prstGeom>
+          <a:noFill/>
+          <a:ln/>
+        </p:spPr>
+        <p:txBody>
+          <a:bodyPr wrap="square" rtlCol="0" anchor="ctr"/>
+          <a:lstStyle/>
+          <a:p>
+            <a:pPr indent="0" marL="0">
+              <a:buNone/>
+            </a:pPr>
+            <a:r>
+              <a:rPr lang="en-US" sz="1350" b="1" dirty="0">
+                <a:solidFill>
+                  <a:srgbClr val="1E1B4B"/>
+                </a:solidFill>
+                <a:latin typeface="Cambria" pitchFamily="34" charset="0"/>
+                <a:ea typeface="Cambria" pitchFamily="34" charset="-122"/>
+                <a:cs typeface="Cambria" pitchFamily="34" charset="-120"/>
+              </a:rPr>
+              <a:t>GPX + PDF export</a:t>
             </a:r>
             <a:endParaRPr lang="en-US" sz="1350" dirty="0"/>
           </a:p>
-          <a:p>
-            <a:pPr marL="342900" indent="-342900">
+        </p:txBody>
+      </p:sp>
+      <p:sp>
+        <p:nvSpPr>
+          <p:cNvPr id="15" name="Text 13"/>
+          <p:cNvSpPr txBox="1"/>
+          <p:nvPr/>
+        </p:nvSpPr>
+        <p:spPr>
+          <a:xfrm>
+            <a:off x="6291072" y="2971800"/>
+            <a:ext cx="2359152" cy="777240"/>
+          </a:xfrm>
+          <a:prstGeom prst="rect">
+            <a:avLst/>
+          </a:prstGeom>
+          <a:noFill/>
+          <a:ln/>
+        </p:spPr>
+        <p:txBody>
+          <a:bodyPr wrap="square" rtlCol="0" anchor="ctr"/>
+          <a:lstStyle/>
+          <a:p>
+            <a:pPr indent="0" marL="0">
               <a:lnSpc>
-                <a:spcPct val="125000"/>
+                <a:spcPct val="120000"/>
               </a:lnSpc>
-              <a:spcAft>
-                <a:spcPts val="1600"/>
-              </a:spcAft>
-              <a:buSzPct val="100000"/>
-              <a:buChar char="●"/>
-            </a:pPr>
-            <a:r>
-              <a:rPr lang="en-US" sz="1350" dirty="0">
+              <a:buNone/>
+            </a:pPr>
+            <a:r>
+              <a:rPr lang="en-US" sz="1050" dirty="0">
                 <a:solidFill>
                   <a:srgbClr val="475569"/>
                 </a:solidFill>
@@ -3444,23 +4097,134 @@
                 <a:ea typeface="Calibri" pitchFamily="34" charset="-122"/>
                 <a:cs typeface="Calibri" pitchFamily="34" charset="-120"/>
               </a:rPr>
-              <a:t>Cross-cluster precedence/time windows above 9 stops</a:t>
+              <a:t>Take the solved route into any GPS device, or print it.</a:t>
+            </a:r>
+            <a:endParaRPr lang="en-US" sz="1050" dirty="0"/>
+          </a:p>
+        </p:txBody>
+      </p:sp>
+      <p:sp>
+        <p:nvSpPr>
+          <p:cNvPr id="16" name="Shape 14"/>
+          <p:cNvSpPr/>
+          <p:nvPr/>
+        </p:nvSpPr>
+        <p:spPr>
+          <a:xfrm>
+            <a:off x="8887968" y="1828800"/>
+            <a:ext cx="2724912" cy="1965960"/>
+          </a:xfrm>
+          <a:prstGeom prst="roundRect">
+            <a:avLst>
+              <a:gd name="adj" fmla="val 4651"/>
+            </a:avLst>
+          </a:prstGeom>
+          <a:solidFill>
+            <a:srgbClr val="FFFFFF"/>
+          </a:solidFill>
+          <a:ln w="12700">
+            <a:solidFill>
+              <a:srgbClr val="E2E8F0"/>
+            </a:solidFill>
+            <a:prstDash val="solid"/>
+          </a:ln>
+          <a:effectLst>
+            <a:outerShdw sx="100000" sy="100000" kx="0" ky="0" algn="bl" rotWithShape="0" blurRad="76200" dist="38100" dir="5400000">
+              <a:srgbClr val="0F172A">
+                <a:alpha val="25000"/>
+              </a:srgbClr>
+            </a:outerShdw>
+          </a:effectLst>
+        </p:spPr>
+      </p:sp>
+      <p:sp>
+        <p:nvSpPr>
+          <p:cNvPr id="17" name="Shape 15"/>
+          <p:cNvSpPr/>
+          <p:nvPr/>
+        </p:nvSpPr>
+        <p:spPr>
+          <a:xfrm>
+            <a:off x="9089136" y="2029968"/>
+            <a:ext cx="384048" cy="384048"/>
+          </a:xfrm>
+          <a:prstGeom prst="ellipse">
+            <a:avLst/>
+          </a:prstGeom>
+          <a:solidFill>
+            <a:srgbClr val="22D3EE"/>
+          </a:solidFill>
+          <a:ln/>
+        </p:spPr>
+      </p:sp>
+      <p:sp>
+        <p:nvSpPr>
+          <p:cNvPr id="18" name="Text 16"/>
+          <p:cNvSpPr txBox="1"/>
+          <p:nvPr/>
+        </p:nvSpPr>
+        <p:spPr>
+          <a:xfrm>
+            <a:off x="9070848" y="2542032"/>
+            <a:ext cx="2359152" cy="457200"/>
+          </a:xfrm>
+          <a:prstGeom prst="rect">
+            <a:avLst/>
+          </a:prstGeom>
+          <a:noFill/>
+          <a:ln/>
+        </p:spPr>
+        <p:txBody>
+          <a:bodyPr wrap="square" rtlCol="0" anchor="ctr"/>
+          <a:lstStyle/>
+          <a:p>
+            <a:pPr indent="0" marL="0">
+              <a:buNone/>
+            </a:pPr>
+            <a:r>
+              <a:rPr lang="en-US" sz="1350" b="1" dirty="0">
+                <a:solidFill>
+                  <a:srgbClr val="1E1B4B"/>
+                </a:solidFill>
+                <a:latin typeface="Cambria" pitchFamily="34" charset="0"/>
+                <a:ea typeface="Cambria" pitchFamily="34" charset="-122"/>
+                <a:cs typeface="Cambria" pitchFamily="34" charset="-120"/>
+              </a:rPr>
+              <a:t>Dark / light theme</a:t>
             </a:r>
             <a:endParaRPr lang="en-US" sz="1350" dirty="0"/>
           </a:p>
-          <a:p>
-            <a:pPr marL="342900" indent="-342900">
+        </p:txBody>
+      </p:sp>
+      <p:sp>
+        <p:nvSpPr>
+          <p:cNvPr id="19" name="Text 17"/>
+          <p:cNvSpPr txBox="1"/>
+          <p:nvPr/>
+        </p:nvSpPr>
+        <p:spPr>
+          <a:xfrm>
+            <a:off x="9070848" y="2971800"/>
+            <a:ext cx="2359152" cy="777240"/>
+          </a:xfrm>
+          <a:prstGeom prst="rect">
+            <a:avLst/>
+          </a:prstGeom>
+          <a:noFill/>
+          <a:ln/>
+        </p:spPr>
+        <p:txBody>
+          <a:bodyPr wrap="square" rtlCol="0" anchor="ctr"/>
+          <a:lstStyle/>
+          <a:p>
+            <a:pPr indent="0" marL="0">
               <a:lnSpc>
-                <a:spcPct val="125000"/>
+                <a:spcPct val="120000"/>
               </a:lnSpc>
-              <a:spcAft>
-                <a:spcPts val="1600"/>
-              </a:spcAft>
-              <a:buSzPct val="100000"/>
-              <a:buChar char="●"/>
-            </a:pPr>
-            <a:r>
-              <a:rPr lang="en-US" sz="1350" dirty="0">
+              <a:buNone/>
+            </a:pPr>
+            <a:r>
+              <a:rPr lang="en-US" sz="1050" dirty="0">
                 <a:solidFill>
                   <a:srgbClr val="475569"/>
                 </a:solidFill>
@@ -3468,7 +4232,100 @@
                 <a:ea typeface="Calibri" pitchFamily="34" charset="-122"/>
                 <a:cs typeface="Calibri" pitchFamily="34" charset="-120"/>
               </a:rPr>
-              <a:t>Shared, durable analytics storage past a single worker</a:t>
+              <a:t>A real design system, not default browser styling.</a:t>
+            </a:r>
+            <a:endParaRPr lang="en-US" sz="1050" dirty="0"/>
+          </a:p>
+        </p:txBody>
+      </p:sp>
+      <p:sp>
+        <p:nvSpPr>
+          <p:cNvPr id="20" name="Shape 18"/>
+          <p:cNvSpPr/>
+          <p:nvPr/>
+        </p:nvSpPr>
+        <p:spPr>
+          <a:xfrm>
+            <a:off x="548640" y="3931920"/>
+            <a:ext cx="2724912" cy="1965960"/>
+          </a:xfrm>
+          <a:prstGeom prst="roundRect">
+            <a:avLst>
+              <a:gd name="adj" fmla="val 4651"/>
+            </a:avLst>
+          </a:prstGeom>
+          <a:solidFill>
+            <a:srgbClr val="FFFFFF"/>
+          </a:solidFill>
+          <a:ln w="12700">
+            <a:solidFill>
+              <a:srgbClr val="E2E8F0"/>
+            </a:solidFill>
+            <a:prstDash val="solid"/>
+          </a:ln>
+          <a:effectLst>
+            <a:outerShdw sx="100000" sy="100000" kx="0" ky="0" algn="bl" rotWithShape="0" blurRad="76200" dist="38100" dir="5400000">
+              <a:srgbClr val="0F172A">
+                <a:alpha val="25000"/>
+              </a:srgbClr>
+            </a:outerShdw>
+          </a:effectLst>
+        </p:spPr>
+      </p:sp>
+      <p:sp>
+        <p:nvSpPr>
+          <p:cNvPr id="21" name="Shape 19"/>
+          <p:cNvSpPr/>
+          <p:nvPr/>
+        </p:nvSpPr>
+        <p:spPr>
+          <a:xfrm>
+            <a:off x="749808" y="4133088"/>
+            <a:ext cx="384048" cy="384048"/>
+          </a:xfrm>
+          <a:prstGeom prst="ellipse">
+            <a:avLst/>
+          </a:prstGeom>
+          <a:solidFill>
+            <a:srgbClr val="7C3AED"/>
+          </a:solidFill>
+          <a:ln/>
+        </p:spPr>
+      </p:sp>
+      <p:sp>
+        <p:nvSpPr>
+          <p:cNvPr id="22" name="Text 20"/>
+          <p:cNvSpPr txBox="1"/>
+          <p:nvPr/>
+        </p:nvSpPr>
+        <p:spPr>
+          <a:xfrm>
+            <a:off x="731520" y="4645152"/>
+            <a:ext cx="2359152" cy="457200"/>
+          </a:xfrm>
+          <a:prstGeom prst="rect">
+            <a:avLst/>
+          </a:prstGeom>
+          <a:noFill/>
+          <a:ln/>
+        </p:spPr>
+        <p:txBody>
+          <a:bodyPr wrap="square" rtlCol="0" anchor="ctr"/>
+          <a:lstStyle/>
+          <a:p>
+            <a:pPr indent="0" marL="0">
+              <a:buNone/>
+            </a:pPr>
+            <a:r>
+              <a:rPr lang="en-US" sz="1350" b="1" dirty="0">
+                <a:solidFill>
+                  <a:srgbClr val="1E1B4B"/>
+                </a:solidFill>
+                <a:latin typeface="Cambria" pitchFamily="34" charset="0"/>
+                <a:ea typeface="Cambria" pitchFamily="34" charset="-122"/>
+                <a:cs typeface="Cambria" pitchFamily="34" charset="-120"/>
+              </a:rPr>
+              <a:t>Precedence rules</a:t>
             </a:r>
             <a:endParaRPr lang="en-US" sz="1350" dirty="0"/>
           </a:p>
@@ -3476,7 +4333,454 @@
       </p:sp>
       <p:sp>
         <p:nvSpPr>
-          <p:cNvPr id="12" name="Text 10"/>
+          <p:cNvPr id="23" name="Text 21"/>
+          <p:cNvSpPr txBox="1"/>
+          <p:nvPr/>
+        </p:nvSpPr>
+        <p:spPr>
+          <a:xfrm>
+            <a:off x="731520" y="5074920"/>
+            <a:ext cx="2359152" cy="777240"/>
+          </a:xfrm>
+          <a:prstGeom prst="rect">
+            <a:avLst/>
+          </a:prstGeom>
+          <a:noFill/>
+          <a:ln/>
+        </p:spPr>
+        <p:txBody>
+          <a:bodyPr wrap="square" rtlCol="0" anchor="ctr"/>
+          <a:lstStyle/>
+          <a:p>
+            <a:pPr indent="0" marL="0">
+              <a:lnSpc>
+                <a:spcPct val="120000"/>
+              </a:lnSpc>
+              <a:buNone/>
+            </a:pPr>
+            <a:r>
+              <a:rPr lang="en-US" sz="1050" dirty="0">
+                <a:solidFill>
+                  <a:srgbClr val="475569"/>
+                </a:solidFill>
+                <a:latin typeface="Calibri" pitchFamily="34" charset="0"/>
+                <a:ea typeface="Calibri" pitchFamily="34" charset="-122"/>
+                <a:cs typeface="Calibri" pitchFamily="34" charset="-120"/>
+              </a:rPr>
+              <a:t>“Visit A before B” — baked into the same QUBO, not bolted on.</a:t>
+            </a:r>
+            <a:endParaRPr lang="en-US" sz="1050" dirty="0"/>
+          </a:p>
+        </p:txBody>
+      </p:sp>
+      <p:sp>
+        <p:nvSpPr>
+          <p:cNvPr id="24" name="Shape 22"/>
+          <p:cNvSpPr/>
+          <p:nvPr/>
+        </p:nvSpPr>
+        <p:spPr>
+          <a:xfrm>
+            <a:off x="3328416" y="3931920"/>
+            <a:ext cx="2724912" cy="1965960"/>
+          </a:xfrm>
+          <a:prstGeom prst="roundRect">
+            <a:avLst>
+              <a:gd name="adj" fmla="val 4651"/>
+            </a:avLst>
+          </a:prstGeom>
+          <a:solidFill>
+            <a:srgbClr val="FFFFFF"/>
+          </a:solidFill>
+          <a:ln w="12700">
+            <a:solidFill>
+              <a:srgbClr val="E2E8F0"/>
+            </a:solidFill>
+            <a:prstDash val="solid"/>
+          </a:ln>
+          <a:effectLst>
+            <a:outerShdw sx="100000" sy="100000" kx="0" ky="0" algn="bl" rotWithShape="0" blurRad="76200" dist="38100" dir="5400000">
+              <a:srgbClr val="0F172A">
+                <a:alpha val="25000"/>
+              </a:srgbClr>
+            </a:outerShdw>
+          </a:effectLst>
+        </p:spPr>
+      </p:sp>
+      <p:sp>
+        <p:nvSpPr>
+          <p:cNvPr id="25" name="Shape 23"/>
+          <p:cNvSpPr/>
+          <p:nvPr/>
+        </p:nvSpPr>
+        <p:spPr>
+          <a:xfrm>
+            <a:off x="3529584" y="4133088"/>
+            <a:ext cx="384048" cy="384048"/>
+          </a:xfrm>
+          <a:prstGeom prst="ellipse">
+            <a:avLst/>
+          </a:prstGeom>
+          <a:solidFill>
+            <a:srgbClr val="22D3EE"/>
+          </a:solidFill>
+          <a:ln/>
+        </p:spPr>
+      </p:sp>
+      <p:sp>
+        <p:nvSpPr>
+          <p:cNvPr id="26" name="Text 24"/>
+          <p:cNvSpPr txBox="1"/>
+          <p:nvPr/>
+        </p:nvSpPr>
+        <p:spPr>
+          <a:xfrm>
+            <a:off x="3511296" y="4645152"/>
+            <a:ext cx="2359152" cy="457200"/>
+          </a:xfrm>
+          <a:prstGeom prst="rect">
+            <a:avLst/>
+          </a:prstGeom>
+          <a:noFill/>
+          <a:ln/>
+        </p:spPr>
+        <p:txBody>
+          <a:bodyPr wrap="square" rtlCol="0" anchor="ctr"/>
+          <a:lstStyle/>
+          <a:p>
+            <a:pPr indent="0" marL="0">
+              <a:buNone/>
+            </a:pPr>
+            <a:r>
+              <a:rPr lang="en-US" sz="1350" b="1" dirty="0">
+                <a:solidFill>
+                  <a:srgbClr val="1E1B4B"/>
+                </a:solidFill>
+                <a:latin typeface="Cambria" pitchFamily="34" charset="0"/>
+                <a:ea typeface="Cambria" pitchFamily="34" charset="-122"/>
+                <a:cs typeface="Cambria" pitchFamily="34" charset="-120"/>
+              </a:rPr>
+              <a:t>Live analytics</a:t>
+            </a:r>
+            <a:endParaRPr lang="en-US" sz="1350" dirty="0"/>
+          </a:p>
+        </p:txBody>
+      </p:sp>
+      <p:sp>
+        <p:nvSpPr>
+          <p:cNvPr id="27" name="Text 25"/>
+          <p:cNvSpPr txBox="1"/>
+          <p:nvPr/>
+        </p:nvSpPr>
+        <p:spPr>
+          <a:xfrm>
+            <a:off x="3511296" y="5074920"/>
+            <a:ext cx="2359152" cy="777240"/>
+          </a:xfrm>
+          <a:prstGeom prst="rect">
+            <a:avLst/>
+          </a:prstGeom>
+          <a:noFill/>
+          <a:ln/>
+        </p:spPr>
+        <p:txBody>
+          <a:bodyPr wrap="square" rtlCol="0" anchor="ctr"/>
+          <a:lstStyle/>
+          <a:p>
+            <a:pPr indent="0" marL="0">
+              <a:lnSpc>
+                <a:spcPct val="120000"/>
+              </a:lnSpc>
+              <a:buNone/>
+            </a:pPr>
+            <a:r>
+              <a:rPr lang="en-US" sz="1050" dirty="0">
+                <a:solidFill>
+                  <a:srgbClr val="475569"/>
+                </a:solidFill>
+                <a:latin typeface="Calibri" pitchFamily="34" charset="0"/>
+                <a:ea typeface="Calibri" pitchFamily="34" charset="-122"/>
+                <a:cs typeface="Calibri" pitchFamily="34" charset="-120"/>
+              </a:rPr>
+              <a:t>GET /api/analytics — a real usage counter, honestly scoped.</a:t>
+            </a:r>
+            <a:endParaRPr lang="en-US" sz="1050" dirty="0"/>
+          </a:p>
+        </p:txBody>
+      </p:sp>
+      <p:sp>
+        <p:nvSpPr>
+          <p:cNvPr id="28" name="Shape 26"/>
+          <p:cNvSpPr/>
+          <p:nvPr/>
+        </p:nvSpPr>
+        <p:spPr>
+          <a:xfrm>
+            <a:off x="6108192" y="3931920"/>
+            <a:ext cx="2724912" cy="1965960"/>
+          </a:xfrm>
+          <a:prstGeom prst="roundRect">
+            <a:avLst>
+              <a:gd name="adj" fmla="val 4651"/>
+            </a:avLst>
+          </a:prstGeom>
+          <a:solidFill>
+            <a:srgbClr val="FFFFFF"/>
+          </a:solidFill>
+          <a:ln w="12700">
+            <a:solidFill>
+              <a:srgbClr val="E2E8F0"/>
+            </a:solidFill>
+            <a:prstDash val="solid"/>
+          </a:ln>
+          <a:effectLst>
+            <a:outerShdw sx="100000" sy="100000" kx="0" ky="0" algn="bl" rotWithShape="0" blurRad="76200" dist="38100" dir="5400000">
+              <a:srgbClr val="0F172A">
+                <a:alpha val="25000"/>
+              </a:srgbClr>
+            </a:outerShdw>
+          </a:effectLst>
+        </p:spPr>
+      </p:sp>
+      <p:sp>
+        <p:nvSpPr>
+          <p:cNvPr id="29" name="Shape 27"/>
+          <p:cNvSpPr/>
+          <p:nvPr/>
+        </p:nvSpPr>
+        <p:spPr>
+          <a:xfrm>
+            <a:off x="6309360" y="4133088"/>
+            <a:ext cx="384048" cy="384048"/>
+          </a:xfrm>
+          <a:prstGeom prst="ellipse">
+            <a:avLst/>
+          </a:prstGeom>
+          <a:solidFill>
+            <a:srgbClr val="7C3AED"/>
+          </a:solidFill>
+          <a:ln/>
+        </p:spPr>
+      </p:sp>
+      <p:sp>
+        <p:nvSpPr>
+          <p:cNvPr id="30" name="Text 28"/>
+          <p:cNvSpPr txBox="1"/>
+          <p:nvPr/>
+        </p:nvSpPr>
+        <p:spPr>
+          <a:xfrm>
+            <a:off x="6291072" y="4645152"/>
+            <a:ext cx="2359152" cy="457200"/>
+          </a:xfrm>
+          <a:prstGeom prst="rect">
+            <a:avLst/>
+          </a:prstGeom>
+          <a:noFill/>
+          <a:ln/>
+        </p:spPr>
+        <p:txBody>
+          <a:bodyPr wrap="square" rtlCol="0" anchor="ctr"/>
+          <a:lstStyle/>
+          <a:p>
+            <a:pPr indent="0" marL="0">
+              <a:buNone/>
+            </a:pPr>
+            <a:r>
+              <a:rPr lang="en-US" sz="1350" b="1" dirty="0">
+                <a:solidFill>
+                  <a:srgbClr val="1E1B4B"/>
+                </a:solidFill>
+                <a:latin typeface="Cambria" pitchFamily="34" charset="0"/>
+                <a:ea typeface="Cambria" pitchFamily="34" charset="-122"/>
+                <a:cs typeface="Cambria" pitchFamily="34" charset="-120"/>
+              </a:rPr>
+              <a:t>OpenAPI spec</a:t>
+            </a:r>
+            <a:endParaRPr lang="en-US" sz="1350" dirty="0"/>
+          </a:p>
+        </p:txBody>
+      </p:sp>
+      <p:sp>
+        <p:nvSpPr>
+          <p:cNvPr id="31" name="Text 29"/>
+          <p:cNvSpPr txBox="1"/>
+          <p:nvPr/>
+        </p:nvSpPr>
+        <p:spPr>
+          <a:xfrm>
+            <a:off x="6291072" y="5074920"/>
+            <a:ext cx="2359152" cy="777240"/>
+          </a:xfrm>
+          <a:prstGeom prst="rect">
+            <a:avLst/>
+          </a:prstGeom>
+          <a:noFill/>
+          <a:ln/>
+        </p:spPr>
+        <p:txBody>
+          <a:bodyPr wrap="square" rtlCol="0" anchor="ctr"/>
+          <a:lstStyle/>
+          <a:p>
+            <a:pPr indent="0" marL="0">
+              <a:lnSpc>
+                <a:spcPct val="120000"/>
+              </a:lnSpc>
+              <a:buNone/>
+            </a:pPr>
+            <a:r>
+              <a:rPr lang="en-US" sz="1050" dirty="0">
+                <a:solidFill>
+                  <a:srgbClr val="475569"/>
+                </a:solidFill>
+                <a:latin typeface="Calibri" pitchFamily="34" charset="0"/>
+                <a:ea typeface="Calibri" pitchFamily="34" charset="-122"/>
+                <a:cs typeface="Calibri" pitchFamily="34" charset="-120"/>
+              </a:rPr>
+              <a:t>Every field tested against the real Flask responses.</a:t>
+            </a:r>
+            <a:endParaRPr lang="en-US" sz="1050" dirty="0"/>
+          </a:p>
+        </p:txBody>
+      </p:sp>
+      <p:sp>
+        <p:nvSpPr>
+          <p:cNvPr id="32" name="Shape 30"/>
+          <p:cNvSpPr/>
+          <p:nvPr/>
+        </p:nvSpPr>
+        <p:spPr>
+          <a:xfrm>
+            <a:off x="8887968" y="3931920"/>
+            <a:ext cx="2724912" cy="1965960"/>
+          </a:xfrm>
+          <a:prstGeom prst="roundRect">
+            <a:avLst>
+              <a:gd name="adj" fmla="val 4651"/>
+            </a:avLst>
+          </a:prstGeom>
+          <a:solidFill>
+            <a:srgbClr val="FFFFFF"/>
+          </a:solidFill>
+          <a:ln w="12700">
+            <a:solidFill>
+              <a:srgbClr val="E2E8F0"/>
+            </a:solidFill>
+            <a:prstDash val="solid"/>
+          </a:ln>
+          <a:effectLst>
+            <a:outerShdw sx="100000" sy="100000" kx="0" ky="0" algn="bl" rotWithShape="0" blurRad="76200" dist="38100" dir="5400000">
+              <a:srgbClr val="0F172A">
+                <a:alpha val="25000"/>
+              </a:srgbClr>
+            </a:outerShdw>
+          </a:effectLst>
+        </p:spPr>
+      </p:sp>
+      <p:sp>
+        <p:nvSpPr>
+          <p:cNvPr id="33" name="Shape 31"/>
+          <p:cNvSpPr/>
+          <p:nvPr/>
+        </p:nvSpPr>
+        <p:spPr>
+          <a:xfrm>
+            <a:off x="9089136" y="4133088"/>
+            <a:ext cx="384048" cy="384048"/>
+          </a:xfrm>
+          <a:prstGeom prst="ellipse">
+            <a:avLst/>
+          </a:prstGeom>
+          <a:solidFill>
+            <a:srgbClr val="22D3EE"/>
+          </a:solidFill>
+          <a:ln/>
+        </p:spPr>
+      </p:sp>
+      <p:sp>
+        <p:nvSpPr>
+          <p:cNvPr id="34" name="Text 32"/>
+          <p:cNvSpPr txBox="1"/>
+          <p:nvPr/>
+        </p:nvSpPr>
+        <p:spPr>
+          <a:xfrm>
+            <a:off x="9070848" y="4645152"/>
+            <a:ext cx="2359152" cy="457200"/>
+          </a:xfrm>
+          <a:prstGeom prst="rect">
+            <a:avLst/>
+          </a:prstGeom>
+          <a:noFill/>
+          <a:ln/>
+        </p:spPr>
+        <p:txBody>
+          <a:bodyPr wrap="square" rtlCol="0" anchor="ctr"/>
+          <a:lstStyle/>
+          <a:p>
+            <a:pPr indent="0" marL="0">
+              <a:buNone/>
+            </a:pPr>
+            <a:r>
+              <a:rPr lang="en-US" sz="1350" b="1" dirty="0">
+                <a:solidFill>
+                  <a:srgbClr val="1E1B4B"/>
+                </a:solidFill>
+                <a:latin typeface="Cambria" pitchFamily="34" charset="0"/>
+                <a:ea typeface="Cambria" pitchFamily="34" charset="-122"/>
+                <a:cs typeface="Cambria" pitchFamily="34" charset="-120"/>
+              </a:rPr>
+              <a:t>One-command deploy</a:t>
+            </a:r>
+            <a:endParaRPr lang="en-US" sz="1350" dirty="0"/>
+          </a:p>
+        </p:txBody>
+      </p:sp>
+      <p:sp>
+        <p:nvSpPr>
+          <p:cNvPr id="35" name="Text 33"/>
+          <p:cNvSpPr txBox="1"/>
+          <p:nvPr/>
+        </p:nvSpPr>
+        <p:spPr>
+          <a:xfrm>
+            <a:off x="9070848" y="5074920"/>
+            <a:ext cx="2359152" cy="777240"/>
+          </a:xfrm>
+          <a:prstGeom prst="rect">
+            <a:avLst/>
+          </a:prstGeom>
+          <a:noFill/>
+          <a:ln/>
+        </p:spPr>
+        <p:txBody>
+          <a:bodyPr wrap="square" rtlCol="0" anchor="ctr"/>
+          <a:lstStyle/>
+          <a:p>
+            <a:pPr indent="0" marL="0">
+              <a:lnSpc>
+                <a:spcPct val="120000"/>
+              </a:lnSpc>
+              <a:buNone/>
+            </a:pPr>
+            <a:r>
+              <a:rPr lang="en-US" sz="1050" dirty="0">
+                <a:solidFill>
+                  <a:srgbClr val="475569"/>
+                </a:solidFill>
+                <a:latin typeface="Calibri" pitchFamily="34" charset="0"/>
+                <a:ea typeface="Calibri" pitchFamily="34" charset="-122"/>
+                <a:cs typeface="Calibri" pitchFamily="34" charset="-120"/>
+              </a:rPr>
+              <a:t>Dockerfile + Render/GitHub Pages guides included.</a:t>
+            </a:r>
+            <a:endParaRPr lang="en-US" sz="1050" dirty="0"/>
+          </a:p>
+        </p:txBody>
+      </p:sp>
+      <p:sp>
+        <p:nvSpPr>
+          <p:cNvPr id="36" name="Text 34"/>
           <p:cNvSpPr txBox="1"/>
           <p:nvPr/>
         </p:nvSpPr>
@@ -3515,7 +4819,7 @@
       </p:sp>
       <p:sp>
         <p:nvSpPr>
-          <p:cNvPr id="13" name="Text 11"/>
+          <p:cNvPr id="37" name="Text 35"/>
           <p:cNvSpPr txBox="1"/>
           <p:nvPr/>
         </p:nvSpPr>
@@ -3586,6 +4890,1791 @@
       </p:grpSpPr>
       <p:sp>
         <p:nvSpPr>
+          <p:cNvPr id="2" name="Text 0"/>
+          <p:cNvSpPr txBox="1"/>
+          <p:nvPr/>
+        </p:nvSpPr>
+        <p:spPr>
+          <a:xfrm>
+            <a:off x="548640" y="320040"/>
+            <a:ext cx="7315200" cy="365760"/>
+          </a:xfrm>
+          <a:prstGeom prst="rect">
+            <a:avLst/>
+          </a:prstGeom>
+          <a:noFill/>
+          <a:ln/>
+        </p:spPr>
+        <p:txBody>
+          <a:bodyPr wrap="square" rtlCol="0" anchor="ctr"/>
+          <a:lstStyle/>
+          <a:p>
+            <a:pPr indent="0" marL="0">
+              <a:buNone/>
+            </a:pPr>
+            <a:r>
+              <a:rPr lang="en-US" sz="1300" b="1" spc="200" kern="0" dirty="0">
+                <a:solidFill>
+                  <a:srgbClr val="22D3EE"/>
+                </a:solidFill>
+                <a:latin typeface="Calibri" pitchFamily="34" charset="0"/>
+                <a:ea typeface="Calibri" pitchFamily="34" charset="-122"/>
+                <a:cs typeface="Calibri" pitchFamily="34" charset="-120"/>
+              </a:rPr>
+              <a:t>NOT JUST A NOTEBOOK DEMO</a:t>
+            </a:r>
+            <a:endParaRPr lang="en-US" sz="1300" dirty="0"/>
+          </a:p>
+        </p:txBody>
+      </p:sp>
+      <p:sp>
+        <p:nvSpPr>
+          <p:cNvPr id="3" name="Text 1"/>
+          <p:cNvSpPr txBox="1"/>
+          <p:nvPr/>
+        </p:nvSpPr>
+        <p:spPr>
+          <a:xfrm>
+            <a:off x="548640" y="640080"/>
+            <a:ext cx="10789920" cy="822960"/>
+          </a:xfrm>
+          <a:prstGeom prst="rect">
+            <a:avLst/>
+          </a:prstGeom>
+          <a:noFill/>
+          <a:ln/>
+        </p:spPr>
+        <p:txBody>
+          <a:bodyPr wrap="square" rtlCol="0" anchor="ctr"/>
+          <a:lstStyle/>
+          <a:p>
+            <a:pPr indent="0" marL="0">
+              <a:buNone/>
+            </a:pPr>
+            <a:r>
+              <a:rPr lang="en-US" sz="3200" b="1" dirty="0">
+                <a:solidFill>
+                  <a:srgbClr val="FFFFFF"/>
+                </a:solidFill>
+                <a:latin typeface="Cambria" pitchFamily="34" charset="0"/>
+                <a:ea typeface="Cambria" pitchFamily="34" charset="-122"/>
+                <a:cs typeface="Cambria" pitchFamily="34" charset="-120"/>
+              </a:rPr>
+              <a:t>Tested, documented, and deployable</a:t>
+            </a:r>
+            <a:endParaRPr lang="en-US" sz="3200" dirty="0"/>
+          </a:p>
+        </p:txBody>
+      </p:sp>
+      <p:sp>
+        <p:nvSpPr>
+          <p:cNvPr id="4" name="Shape 2"/>
+          <p:cNvSpPr/>
+          <p:nvPr/>
+        </p:nvSpPr>
+        <p:spPr>
+          <a:xfrm>
+            <a:off x="548640" y="1965960"/>
+            <a:ext cx="2606040" cy="2286000"/>
+          </a:xfrm>
+          <a:prstGeom prst="roundRect">
+            <a:avLst>
+              <a:gd name="adj" fmla="val 4800"/>
+            </a:avLst>
+          </a:prstGeom>
+          <a:solidFill>
+            <a:srgbClr val="312E81"/>
+          </a:solidFill>
+          <a:ln/>
+          <a:effectLst>
+            <a:outerShdw sx="100000" sy="100000" kx="0" ky="0" algn="bl" rotWithShape="0" blurRad="76200" dist="38100" dir="5400000">
+              <a:srgbClr val="0F172A">
+                <a:alpha val="25000"/>
+              </a:srgbClr>
+            </a:outerShdw>
+          </a:effectLst>
+        </p:spPr>
+      </p:sp>
+      <p:sp>
+        <p:nvSpPr>
+          <p:cNvPr id="5" name="Text 3"/>
+          <p:cNvSpPr txBox="1"/>
+          <p:nvPr/>
+        </p:nvSpPr>
+        <p:spPr>
+          <a:xfrm>
+            <a:off x="548640" y="2148840"/>
+            <a:ext cx="2606040" cy="1005840"/>
+          </a:xfrm>
+          <a:prstGeom prst="rect">
+            <a:avLst/>
+          </a:prstGeom>
+          <a:noFill/>
+          <a:ln/>
+        </p:spPr>
+        <p:txBody>
+          <a:bodyPr wrap="square" rtlCol="0" anchor="ctr"/>
+          <a:lstStyle/>
+          <a:p>
+            <a:pPr algn="ctr" indent="0" marL="0">
+              <a:buNone/>
+            </a:pPr>
+            <a:r>
+              <a:rPr lang="en-US" sz="3400" b="1" dirty="0">
+                <a:solidFill>
+                  <a:srgbClr val="22D3EE"/>
+                </a:solidFill>
+                <a:latin typeface="Cambria" pitchFamily="34" charset="0"/>
+                <a:ea typeface="Cambria" pitchFamily="34" charset="-122"/>
+                <a:cs typeface="Cambria" pitchFamily="34" charset="-120"/>
+              </a:rPr>
+              <a:t>491</a:t>
+            </a:r>
+            <a:endParaRPr lang="en-US" sz="3400" dirty="0"/>
+          </a:p>
+        </p:txBody>
+      </p:sp>
+      <p:sp>
+        <p:nvSpPr>
+          <p:cNvPr id="6" name="Text 4"/>
+          <p:cNvSpPr txBox="1"/>
+          <p:nvPr/>
+        </p:nvSpPr>
+        <p:spPr>
+          <a:xfrm>
+            <a:off x="685800" y="3200400"/>
+            <a:ext cx="2331720" cy="914400"/>
+          </a:xfrm>
+          <a:prstGeom prst="rect">
+            <a:avLst/>
+          </a:prstGeom>
+          <a:noFill/>
+          <a:ln/>
+        </p:spPr>
+        <p:txBody>
+          <a:bodyPr wrap="square" rtlCol="0" anchor="ctr"/>
+          <a:lstStyle/>
+          <a:p>
+            <a:pPr algn="ctr" indent="0" marL="0">
+              <a:lnSpc>
+                <a:spcPct val="120000"/>
+              </a:lnSpc>
+              <a:buNone/>
+            </a:pPr>
+            <a:r>
+              <a:rPr lang="en-US" sz="1150" dirty="0">
+                <a:solidFill>
+                  <a:srgbClr val="C7D2FE"/>
+                </a:solidFill>
+                <a:latin typeface="Calibri" pitchFamily="34" charset="0"/>
+                <a:ea typeface="Calibri" pitchFamily="34" charset="-122"/>
+                <a:cs typeface="Calibri" pitchFamily="34" charset="-120"/>
+              </a:rPr>
+              <a:t>automated tests</a:t>
+            </a:r>
+            <a:endParaRPr lang="en-US" sz="1150" dirty="0"/>
+          </a:p>
+          <a:p>
+            <a:pPr algn="ctr" indent="0" marL="0">
+              <a:lnSpc>
+                <a:spcPct val="120000"/>
+              </a:lnSpc>
+              <a:buNone/>
+            </a:pPr>
+            <a:r>
+              <a:rPr lang="en-US" sz="1150" dirty="0">
+                <a:solidFill>
+                  <a:srgbClr val="C7D2FE"/>
+                </a:solidFill>
+                <a:latin typeface="Calibri" pitchFamily="34" charset="0"/>
+                <a:ea typeface="Calibri" pitchFamily="34" charset="-122"/>
+                <a:cs typeface="Calibri" pitchFamily="34" charset="-120"/>
+              </a:rPr>
+              <a:t>(pytest + Playwright + Node)</a:t>
+            </a:r>
+            <a:endParaRPr lang="en-US" sz="1150" dirty="0"/>
+          </a:p>
+        </p:txBody>
+      </p:sp>
+      <p:sp>
+        <p:nvSpPr>
+          <p:cNvPr id="7" name="Shape 5"/>
+          <p:cNvSpPr/>
+          <p:nvPr/>
+        </p:nvSpPr>
+        <p:spPr>
+          <a:xfrm>
+            <a:off x="3355848" y="1965960"/>
+            <a:ext cx="2606040" cy="2286000"/>
+          </a:xfrm>
+          <a:prstGeom prst="roundRect">
+            <a:avLst>
+              <a:gd name="adj" fmla="val 4800"/>
+            </a:avLst>
+          </a:prstGeom>
+          <a:solidFill>
+            <a:srgbClr val="312E81"/>
+          </a:solidFill>
+          <a:ln/>
+          <a:effectLst>
+            <a:outerShdw sx="100000" sy="100000" kx="0" ky="0" algn="bl" rotWithShape="0" blurRad="76200" dist="38100" dir="5400000">
+              <a:srgbClr val="0F172A">
+                <a:alpha val="25000"/>
+              </a:srgbClr>
+            </a:outerShdw>
+          </a:effectLst>
+        </p:spPr>
+      </p:sp>
+      <p:sp>
+        <p:nvSpPr>
+          <p:cNvPr id="8" name="Text 6"/>
+          <p:cNvSpPr txBox="1"/>
+          <p:nvPr/>
+        </p:nvSpPr>
+        <p:spPr>
+          <a:xfrm>
+            <a:off x="3355848" y="2148840"/>
+            <a:ext cx="2606040" cy="1005840"/>
+          </a:xfrm>
+          <a:prstGeom prst="rect">
+            <a:avLst/>
+          </a:prstGeom>
+          <a:noFill/>
+          <a:ln/>
+        </p:spPr>
+        <p:txBody>
+          <a:bodyPr wrap="square" rtlCol="0" anchor="ctr"/>
+          <a:lstStyle/>
+          <a:p>
+            <a:pPr algn="ctr" indent="0" marL="0">
+              <a:buNone/>
+            </a:pPr>
+            <a:r>
+              <a:rPr lang="en-US" sz="3400" b="1" dirty="0">
+                <a:solidFill>
+                  <a:srgbClr val="22D3EE"/>
+                </a:solidFill>
+                <a:latin typeface="Cambria" pitchFamily="34" charset="0"/>
+                <a:ea typeface="Cambria" pitchFamily="34" charset="-122"/>
+                <a:cs typeface="Cambria" pitchFamily="34" charset="-120"/>
+              </a:rPr>
+              <a:t>100%</a:t>
+            </a:r>
+            <a:endParaRPr lang="en-US" sz="3400" dirty="0"/>
+          </a:p>
+        </p:txBody>
+      </p:sp>
+      <p:sp>
+        <p:nvSpPr>
+          <p:cNvPr id="9" name="Text 7"/>
+          <p:cNvSpPr txBox="1"/>
+          <p:nvPr/>
+        </p:nvSpPr>
+        <p:spPr>
+          <a:xfrm>
+            <a:off x="3493008" y="3200400"/>
+            <a:ext cx="2331720" cy="914400"/>
+          </a:xfrm>
+          <a:prstGeom prst="rect">
+            <a:avLst/>
+          </a:prstGeom>
+          <a:noFill/>
+          <a:ln/>
+        </p:spPr>
+        <p:txBody>
+          <a:bodyPr wrap="square" rtlCol="0" anchor="ctr"/>
+          <a:lstStyle/>
+          <a:p>
+            <a:pPr algn="ctr" indent="0" marL="0">
+              <a:lnSpc>
+                <a:spcPct val="120000"/>
+              </a:lnSpc>
+              <a:buNone/>
+            </a:pPr>
+            <a:r>
+              <a:rPr lang="en-US" sz="1150" dirty="0">
+                <a:solidFill>
+                  <a:srgbClr val="C7D2FE"/>
+                </a:solidFill>
+                <a:latin typeface="Calibri" pitchFamily="34" charset="0"/>
+                <a:ea typeface="Calibri" pitchFamily="34" charset="-122"/>
+                <a:cs typeface="Calibri" pitchFamily="34" charset="-120"/>
+              </a:rPr>
+              <a:t>of the test suite runs</a:t>
+            </a:r>
+            <a:endParaRPr lang="en-US" sz="1150" dirty="0"/>
+          </a:p>
+          <a:p>
+            <a:pPr algn="ctr" indent="0" marL="0">
+              <a:lnSpc>
+                <a:spcPct val="120000"/>
+              </a:lnSpc>
+              <a:buNone/>
+            </a:pPr>
+            <a:r>
+              <a:rPr lang="en-US" sz="1150" dirty="0">
+                <a:solidFill>
+                  <a:srgbClr val="C7D2FE"/>
+                </a:solidFill>
+                <a:latin typeface="Calibri" pitchFamily="34" charset="0"/>
+                <a:ea typeface="Calibri" pitchFamily="34" charset="-122"/>
+                <a:cs typeface="Calibri" pitchFamily="34" charset="-120"/>
+              </a:rPr>
+              <a:t>on every push via CI</a:t>
+            </a:r>
+            <a:endParaRPr lang="en-US" sz="1150" dirty="0"/>
+          </a:p>
+        </p:txBody>
+      </p:sp>
+      <p:sp>
+        <p:nvSpPr>
+          <p:cNvPr id="10" name="Shape 8"/>
+          <p:cNvSpPr/>
+          <p:nvPr/>
+        </p:nvSpPr>
+        <p:spPr>
+          <a:xfrm>
+            <a:off x="6163056" y="1965960"/>
+            <a:ext cx="2606040" cy="2286000"/>
+          </a:xfrm>
+          <a:prstGeom prst="roundRect">
+            <a:avLst>
+              <a:gd name="adj" fmla="val 4800"/>
+            </a:avLst>
+          </a:prstGeom>
+          <a:solidFill>
+            <a:srgbClr val="312E81"/>
+          </a:solidFill>
+          <a:ln/>
+          <a:effectLst>
+            <a:outerShdw sx="100000" sy="100000" kx="0" ky="0" algn="bl" rotWithShape="0" blurRad="76200" dist="38100" dir="5400000">
+              <a:srgbClr val="0F172A">
+                <a:alpha val="25000"/>
+              </a:srgbClr>
+            </a:outerShdw>
+          </a:effectLst>
+        </p:spPr>
+      </p:sp>
+      <p:sp>
+        <p:nvSpPr>
+          <p:cNvPr id="11" name="Text 9"/>
+          <p:cNvSpPr txBox="1"/>
+          <p:nvPr/>
+        </p:nvSpPr>
+        <p:spPr>
+          <a:xfrm>
+            <a:off x="6163056" y="2148840"/>
+            <a:ext cx="2606040" cy="1005840"/>
+          </a:xfrm>
+          <a:prstGeom prst="rect">
+            <a:avLst/>
+          </a:prstGeom>
+          <a:noFill/>
+          <a:ln/>
+        </p:spPr>
+        <p:txBody>
+          <a:bodyPr wrap="square" rtlCol="0" anchor="ctr"/>
+          <a:lstStyle/>
+          <a:p>
+            <a:pPr algn="ctr" indent="0" marL="0">
+              <a:buNone/>
+            </a:pPr>
+            <a:r>
+              <a:rPr lang="en-US" sz="3400" b="1" dirty="0">
+                <a:solidFill>
+                  <a:srgbClr val="22D3EE"/>
+                </a:solidFill>
+                <a:latin typeface="Cambria" pitchFamily="34" charset="0"/>
+                <a:ea typeface="Cambria" pitchFamily="34" charset="-122"/>
+                <a:cs typeface="Cambria" pitchFamily="34" charset="-120"/>
+              </a:rPr>
+              <a:t>3</a:t>
+            </a:r>
+            <a:endParaRPr lang="en-US" sz="3400" dirty="0"/>
+          </a:p>
+        </p:txBody>
+      </p:sp>
+      <p:sp>
+        <p:nvSpPr>
+          <p:cNvPr id="12" name="Text 10"/>
+          <p:cNvSpPr txBox="1"/>
+          <p:nvPr/>
+        </p:nvSpPr>
+        <p:spPr>
+          <a:xfrm>
+            <a:off x="6300216" y="3200400"/>
+            <a:ext cx="2331720" cy="914400"/>
+          </a:xfrm>
+          <a:prstGeom prst="rect">
+            <a:avLst/>
+          </a:prstGeom>
+          <a:noFill/>
+          <a:ln/>
+        </p:spPr>
+        <p:txBody>
+          <a:bodyPr wrap="square" rtlCol="0" anchor="ctr"/>
+          <a:lstStyle/>
+          <a:p>
+            <a:pPr algn="ctr" indent="0" marL="0">
+              <a:lnSpc>
+                <a:spcPct val="120000"/>
+              </a:lnSpc>
+              <a:buNone/>
+            </a:pPr>
+            <a:r>
+              <a:rPr lang="en-US" sz="1150" dirty="0">
+                <a:solidFill>
+                  <a:srgbClr val="C7D2FE"/>
+                </a:solidFill>
+                <a:latin typeface="Calibri" pitchFamily="34" charset="0"/>
+                <a:ea typeface="Calibri" pitchFamily="34" charset="-122"/>
+                <a:cs typeface="Calibri" pitchFamily="34" charset="-120"/>
+              </a:rPr>
+              <a:t>solvers benchmarked side by side</a:t>
+            </a:r>
+            <a:endParaRPr lang="en-US" sz="1150" dirty="0"/>
+          </a:p>
+          <a:p>
+            <a:pPr algn="ctr" indent="0" marL="0">
+              <a:lnSpc>
+                <a:spcPct val="120000"/>
+              </a:lnSpc>
+              <a:buNone/>
+            </a:pPr>
+            <a:r>
+              <a:rPr lang="en-US" sz="1150" dirty="0">
+                <a:solidFill>
+                  <a:srgbClr val="C7D2FE"/>
+                </a:solidFill>
+                <a:latin typeface="Calibri" pitchFamily="34" charset="0"/>
+                <a:ea typeface="Calibri" pitchFamily="34" charset="-122"/>
+                <a:cs typeface="Calibri" pitchFamily="34" charset="-120"/>
+              </a:rPr>
+              <a:t>(2-opt, OR-Tools, QUBO+SA)</a:t>
+            </a:r>
+            <a:endParaRPr lang="en-US" sz="1150" dirty="0"/>
+          </a:p>
+        </p:txBody>
+      </p:sp>
+      <p:sp>
+        <p:nvSpPr>
+          <p:cNvPr id="13" name="Shape 11"/>
+          <p:cNvSpPr/>
+          <p:nvPr/>
+        </p:nvSpPr>
+        <p:spPr>
+          <a:xfrm>
+            <a:off x="8970264" y="1965960"/>
+            <a:ext cx="2606040" cy="2286000"/>
+          </a:xfrm>
+          <a:prstGeom prst="roundRect">
+            <a:avLst>
+              <a:gd name="adj" fmla="val 4800"/>
+            </a:avLst>
+          </a:prstGeom>
+          <a:solidFill>
+            <a:srgbClr val="312E81"/>
+          </a:solidFill>
+          <a:ln/>
+          <a:effectLst>
+            <a:outerShdw sx="100000" sy="100000" kx="0" ky="0" algn="bl" rotWithShape="0" blurRad="76200" dist="38100" dir="5400000">
+              <a:srgbClr val="0F172A">
+                <a:alpha val="25000"/>
+              </a:srgbClr>
+            </a:outerShdw>
+          </a:effectLst>
+        </p:spPr>
+      </p:sp>
+      <p:sp>
+        <p:nvSpPr>
+          <p:cNvPr id="14" name="Text 12"/>
+          <p:cNvSpPr txBox="1"/>
+          <p:nvPr/>
+        </p:nvSpPr>
+        <p:spPr>
+          <a:xfrm>
+            <a:off x="8970264" y="2148840"/>
+            <a:ext cx="2606040" cy="1005840"/>
+          </a:xfrm>
+          <a:prstGeom prst="rect">
+            <a:avLst/>
+          </a:prstGeom>
+          <a:noFill/>
+          <a:ln/>
+        </p:spPr>
+        <p:txBody>
+          <a:bodyPr wrap="square" rtlCol="0" anchor="ctr"/>
+          <a:lstStyle/>
+          <a:p>
+            <a:pPr algn="ctr" indent="0" marL="0">
+              <a:buNone/>
+            </a:pPr>
+            <a:r>
+              <a:rPr lang="en-US" sz="3400" b="1" dirty="0">
+                <a:solidFill>
+                  <a:srgbClr val="22D3EE"/>
+                </a:solidFill>
+                <a:latin typeface="Cambria" pitchFamily="34" charset="0"/>
+                <a:ea typeface="Cambria" pitchFamily="34" charset="-122"/>
+                <a:cs typeface="Cambria" pitchFamily="34" charset="-120"/>
+              </a:rPr>
+              <a:t>1</a:t>
+            </a:r>
+            <a:endParaRPr lang="en-US" sz="3400" dirty="0"/>
+          </a:p>
+        </p:txBody>
+      </p:sp>
+      <p:sp>
+        <p:nvSpPr>
+          <p:cNvPr id="15" name="Text 13"/>
+          <p:cNvSpPr txBox="1"/>
+          <p:nvPr/>
+        </p:nvSpPr>
+        <p:spPr>
+          <a:xfrm>
+            <a:off x="9107424" y="3200400"/>
+            <a:ext cx="2331720" cy="914400"/>
+          </a:xfrm>
+          <a:prstGeom prst="rect">
+            <a:avLst/>
+          </a:prstGeom>
+          <a:noFill/>
+          <a:ln/>
+        </p:spPr>
+        <p:txBody>
+          <a:bodyPr wrap="square" rtlCol="0" anchor="ctr"/>
+          <a:lstStyle/>
+          <a:p>
+            <a:pPr algn="ctr" indent="0" marL="0">
+              <a:lnSpc>
+                <a:spcPct val="120000"/>
+              </a:lnSpc>
+              <a:buNone/>
+            </a:pPr>
+            <a:r>
+              <a:rPr lang="en-US" sz="1150" dirty="0">
+                <a:solidFill>
+                  <a:srgbClr val="C7D2FE"/>
+                </a:solidFill>
+                <a:latin typeface="Calibri" pitchFamily="34" charset="0"/>
+                <a:ea typeface="Calibri" pitchFamily="34" charset="-122"/>
+                <a:cs typeface="Calibri" pitchFamily="34" charset="-120"/>
+              </a:rPr>
+              <a:t>command to self-host</a:t>
+            </a:r>
+            <a:endParaRPr lang="en-US" sz="1150" dirty="0"/>
+          </a:p>
+          <a:p>
+            <a:pPr algn="ctr" indent="0" marL="0">
+              <a:lnSpc>
+                <a:spcPct val="120000"/>
+              </a:lnSpc>
+              <a:buNone/>
+            </a:pPr>
+            <a:r>
+              <a:rPr lang="en-US" sz="1150" dirty="0">
+                <a:solidFill>
+                  <a:srgbClr val="C7D2FE"/>
+                </a:solidFill>
+                <a:latin typeface="Calibri" pitchFamily="34" charset="0"/>
+                <a:ea typeface="Calibri" pitchFamily="34" charset="-122"/>
+                <a:cs typeface="Calibri" pitchFamily="34" charset="-120"/>
+              </a:rPr>
+              <a:t>(Dockerfile included)</a:t>
+            </a:r>
+            <a:endParaRPr lang="en-US" sz="1150" dirty="0"/>
+          </a:p>
+        </p:txBody>
+      </p:sp>
+      <p:sp>
+        <p:nvSpPr>
+          <p:cNvPr id="16" name="Text 14"/>
+          <p:cNvSpPr txBox="1"/>
+          <p:nvPr/>
+        </p:nvSpPr>
+        <p:spPr>
+          <a:xfrm>
+            <a:off x="548640" y="4663440"/>
+            <a:ext cx="11064240" cy="914400"/>
+          </a:xfrm>
+          <a:prstGeom prst="rect">
+            <a:avLst/>
+          </a:prstGeom>
+          <a:noFill/>
+          <a:ln/>
+        </p:spPr>
+        <p:txBody>
+          <a:bodyPr wrap="square" rtlCol="0" anchor="ctr"/>
+          <a:lstStyle/>
+          <a:p>
+            <a:pPr indent="0" marL="0">
+              <a:lnSpc>
+                <a:spcPct val="130000"/>
+              </a:lnSpc>
+              <a:buNone/>
+            </a:pPr>
+            <a:r>
+              <a:rPr lang="en-US" sz="1400" i="1" dirty="0">
+                <a:solidFill>
+                  <a:srgbClr val="C7D2FE"/>
+                </a:solidFill>
+                <a:latin typeface="Calibri" pitchFamily="34" charset="0"/>
+                <a:ea typeface="Calibri" pitchFamily="34" charset="-122"/>
+                <a:cs typeface="Calibri" pitchFamily="34" charset="-120"/>
+              </a:rPr>
+              <a:t>openapi.yaml is checked against the live Flask responses by the test suite itself — so the documentation can't silently drift from what the API actually returns.</a:t>
+            </a:r>
+            <a:endParaRPr lang="en-US" sz="1400" dirty="0"/>
+          </a:p>
+        </p:txBody>
+      </p:sp>
+      <p:sp>
+        <p:nvSpPr>
+          <p:cNvPr id="17" name="Text 15"/>
+          <p:cNvSpPr txBox="1"/>
+          <p:nvPr/>
+        </p:nvSpPr>
+        <p:spPr>
+          <a:xfrm>
+            <a:off x="548640" y="6473952"/>
+            <a:ext cx="7315200" cy="274320"/>
+          </a:xfrm>
+          <a:prstGeom prst="rect">
+            <a:avLst/>
+          </a:prstGeom>
+          <a:noFill/>
+          <a:ln/>
+        </p:spPr>
+        <p:txBody>
+          <a:bodyPr wrap="square" rtlCol="0" anchor="ctr"/>
+          <a:lstStyle/>
+          <a:p>
+            <a:pPr indent="0" marL="0">
+              <a:buNone/>
+            </a:pPr>
+            <a:r>
+              <a:rPr lang="en-US" sz="900" dirty="0">
+                <a:solidFill>
+                  <a:srgbClr val="94A3B8"/>
+                </a:solidFill>
+                <a:latin typeface="Calibri" pitchFamily="34" charset="0"/>
+                <a:ea typeface="Calibri" pitchFamily="34" charset="-122"/>
+                <a:cs typeface="Calibri" pitchFamily="34" charset="-120"/>
+              </a:rPr>
+              <a:t>Quantum-Inspired Traffic Router  ·  SIH26137</a:t>
+            </a:r>
+            <a:endParaRPr lang="en-US" sz="900" dirty="0"/>
+          </a:p>
+        </p:txBody>
+      </p:sp>
+      <p:sp>
+        <p:nvSpPr>
+          <p:cNvPr id="18" name="Text 16"/>
+          <p:cNvSpPr txBox="1"/>
+          <p:nvPr/>
+        </p:nvSpPr>
+        <p:spPr>
+          <a:xfrm>
+            <a:off x="11521440" y="6473952"/>
+            <a:ext cx="365760" cy="274320"/>
+          </a:xfrm>
+          <a:prstGeom prst="rect">
+            <a:avLst/>
+          </a:prstGeom>
+          <a:noFill/>
+          <a:ln/>
+        </p:spPr>
+        <p:txBody>
+          <a:bodyPr wrap="square" rtlCol="0" anchor="ctr"/>
+          <a:lstStyle/>
+          <a:p>
+            <a:pPr algn="r" indent="0" marL="0">
+              <a:buNone/>
+            </a:pPr>
+            <a:r>
+              <a:rPr lang="en-US" sz="900" dirty="0">
+                <a:solidFill>
+                  <a:srgbClr val="94A3B8"/>
+                </a:solidFill>
+                <a:latin typeface="Calibri" pitchFamily="34" charset="0"/>
+                <a:ea typeface="Calibri" pitchFamily="34" charset="-122"/>
+                <a:cs typeface="Calibri" pitchFamily="34" charset="-120"/>
+              </a:rPr>
+              <a:t>12</a:t>
+            </a:r>
+            <a:endParaRPr lang="en-US" sz="900" dirty="0"/>
+          </a:p>
+        </p:txBody>
+      </p:sp>
+    </p:spTree>
+  </p:cSld>
+  <p:clrMapOvr>
+    <a:masterClrMapping/>
+  </p:clrMapOvr>
+</p:sld>
+</file>
+
+<file path=ppt/slides/slide13.xml><?xml version="1.0" encoding="utf-8"?>
+<p:sld xmlns:a="http://schemas.openxmlformats.org/drawingml/2006/main" xmlns:r="http://schemas.openxmlformats.org/officeDocument/2006/relationships" xmlns:p="http://schemas.openxmlformats.org/presentationml/2006/main">
+  <p:cSld name="Slide 13">
+    <p:bg>
+      <p:bgPr>
+        <a:solidFill>
+          <a:srgbClr val="F8FAFC"/>
+        </a:solidFill>
+      </p:bgPr>
+    </p:bg>
+    <p:spTree>
+      <p:nvGrpSpPr>
+        <p:cNvPr id="1" name=""/>
+        <p:cNvGrpSpPr/>
+        <p:nvPr/>
+      </p:nvGrpSpPr>
+      <p:grpSpPr>
+        <a:xfrm>
+          <a:off x="0" y="0"/>
+          <a:ext cx="0" cy="0"/>
+          <a:chOff x="0" y="0"/>
+          <a:chExt cx="0" cy="0"/>
+        </a:xfrm>
+      </p:grpSpPr>
+      <p:sp>
+        <p:nvSpPr>
+          <p:cNvPr id="2" name="Text 0"/>
+          <p:cNvSpPr txBox="1"/>
+          <p:nvPr/>
+        </p:nvSpPr>
+        <p:spPr>
+          <a:xfrm>
+            <a:off x="548640" y="320040"/>
+            <a:ext cx="7315200" cy="365760"/>
+          </a:xfrm>
+          <a:prstGeom prst="rect">
+            <a:avLst/>
+          </a:prstGeom>
+          <a:noFill/>
+          <a:ln/>
+        </p:spPr>
+        <p:txBody>
+          <a:bodyPr wrap="square" rtlCol="0" anchor="ctr"/>
+          <a:lstStyle/>
+          <a:p>
+            <a:pPr indent="0" marL="0">
+              <a:buNone/>
+            </a:pPr>
+            <a:r>
+              <a:rPr lang="en-US" sz="1300" b="1" spc="200" kern="0" dirty="0">
+                <a:solidFill>
+                  <a:srgbClr val="7C3AED"/>
+                </a:solidFill>
+                <a:latin typeface="Calibri" pitchFamily="34" charset="0"/>
+                <a:ea typeface="Calibri" pitchFamily="34" charset="-122"/>
+                <a:cs typeface="Calibri" pitchFamily="34" charset="-120"/>
+              </a:rPr>
+              <a:t>WHY THIS IS PATENT-SHAPED, NOT JUST CODE</a:t>
+            </a:r>
+            <a:endParaRPr lang="en-US" sz="1300" dirty="0"/>
+          </a:p>
+        </p:txBody>
+      </p:sp>
+      <p:sp>
+        <p:nvSpPr>
+          <p:cNvPr id="3" name="Text 1"/>
+          <p:cNvSpPr txBox="1"/>
+          <p:nvPr/>
+        </p:nvSpPr>
+        <p:spPr>
+          <a:xfrm>
+            <a:off x="548640" y="640080"/>
+            <a:ext cx="10789920" cy="822960"/>
+          </a:xfrm>
+          <a:prstGeom prst="rect">
+            <a:avLst/>
+          </a:prstGeom>
+          <a:noFill/>
+          <a:ln/>
+        </p:spPr>
+        <p:txBody>
+          <a:bodyPr wrap="square" rtlCol="0" anchor="ctr"/>
+          <a:lstStyle/>
+          <a:p>
+            <a:pPr indent="0" marL="0">
+              <a:buNone/>
+            </a:pPr>
+            <a:r>
+              <a:rPr lang="en-US" sz="3200" b="1" dirty="0">
+                <a:solidFill>
+                  <a:srgbClr val="1E1B4B"/>
+                </a:solidFill>
+                <a:latin typeface="Cambria" pitchFamily="34" charset="0"/>
+                <a:ea typeface="Cambria" pitchFamily="34" charset="-122"/>
+                <a:cs typeface="Cambria" pitchFamily="34" charset="-120"/>
+              </a:rPr>
+              <a:t>A concrete, measurable technical effect</a:t>
+            </a:r>
+            <a:endParaRPr lang="en-US" sz="3200" dirty="0"/>
+          </a:p>
+        </p:txBody>
+      </p:sp>
+      <p:sp>
+        <p:nvSpPr>
+          <p:cNvPr id="4" name="Shape 2"/>
+          <p:cNvSpPr/>
+          <p:nvPr/>
+        </p:nvSpPr>
+        <p:spPr>
+          <a:xfrm>
+            <a:off x="548640" y="1783080"/>
+            <a:ext cx="11064240" cy="1737360"/>
+          </a:xfrm>
+          <a:prstGeom prst="roundRect">
+            <a:avLst>
+              <a:gd name="adj" fmla="val 6316"/>
+            </a:avLst>
+          </a:prstGeom>
+          <a:solidFill>
+            <a:srgbClr val="1E1B4B"/>
+          </a:solidFill>
+          <a:ln/>
+          <a:effectLst>
+            <a:outerShdw sx="100000" sy="100000" kx="0" ky="0" algn="bl" rotWithShape="0" blurRad="76200" dist="38100" dir="5400000">
+              <a:srgbClr val="0F172A">
+                <a:alpha val="25000"/>
+              </a:srgbClr>
+            </a:outerShdw>
+          </a:effectLst>
+        </p:spPr>
+      </p:sp>
+      <p:sp>
+        <p:nvSpPr>
+          <p:cNvPr id="5" name="Text 3"/>
+          <p:cNvSpPr txBox="1"/>
+          <p:nvPr/>
+        </p:nvSpPr>
+        <p:spPr>
+          <a:xfrm>
+            <a:off x="914400" y="1965960"/>
+            <a:ext cx="10332720" cy="1371600"/>
+          </a:xfrm>
+          <a:prstGeom prst="rect">
+            <a:avLst/>
+          </a:prstGeom>
+          <a:noFill/>
+          <a:ln/>
+        </p:spPr>
+        <p:txBody>
+          <a:bodyPr wrap="square" rtlCol="0" anchor="ctr"/>
+          <a:lstStyle/>
+          <a:p>
+            <a:pPr indent="0" marL="0">
+              <a:lnSpc>
+                <a:spcPct val="130000"/>
+              </a:lnSpc>
+              <a:buNone/>
+            </a:pPr>
+            <a:r>
+              <a:rPr lang="en-US" sz="1550" i="1" dirty="0">
+                <a:solidFill>
+                  <a:srgbClr val="E0E7FF"/>
+                </a:solidFill>
+                <a:latin typeface="Calibri" pitchFamily="34" charset="0"/>
+                <a:ea typeface="Calibri" pitchFamily="34" charset="-122"/>
+                <a:cs typeface="Calibri" pitchFamily="34" charset="-120"/>
+              </a:rPr>
+              <a:t>“A routing optimizer in which additional real-world dispatch constraints are incorporated as composable penalty terms within a single QUBO formulation, guaranteeing constraint satisfaction by construction — compared to a measured tendency of unconstrained classical local-search heuristics to violate such constraints and require costly post-hoc repair.”</a:t>
+            </a:r>
+            <a:endParaRPr lang="en-US" sz="1550" dirty="0"/>
+          </a:p>
+        </p:txBody>
+      </p:sp>
+      <p:sp>
+        <p:nvSpPr>
+          <p:cNvPr id="6" name="Text 4"/>
+          <p:cNvSpPr txBox="1"/>
+          <p:nvPr/>
+        </p:nvSpPr>
+        <p:spPr>
+          <a:xfrm>
+            <a:off x="548640" y="3794760"/>
+            <a:ext cx="11064240" cy="2377440"/>
+          </a:xfrm>
+          <a:prstGeom prst="rect">
+            <a:avLst/>
+          </a:prstGeom>
+          <a:noFill/>
+          <a:ln/>
+        </p:spPr>
+        <p:txBody>
+          <a:bodyPr wrap="square" rtlCol="0" anchor="ctr"/>
+          <a:lstStyle/>
+          <a:p>
+            <a:pPr marL="342900" indent="-342900">
+              <a:lnSpc>
+                <a:spcPct val="125000"/>
+              </a:lnSpc>
+              <a:spcAft>
+                <a:spcPts val="1200"/>
+              </a:spcAft>
+              <a:buSzPct val="100000"/>
+              <a:buChar char="●"/>
+            </a:pPr>
+            <a:r>
+              <a:rPr lang="en-US" sz="1450" dirty="0">
+                <a:solidFill>
+                  <a:srgbClr val="475569"/>
+                </a:solidFill>
+                <a:latin typeface="Calibri" pitchFamily="34" charset="0"/>
+                <a:ea typeface="Calibri" pitchFamily="34" charset="-122"/>
+                <a:cs typeface="Calibri" pitchFamily="34" charset="-120"/>
+              </a:rPr>
+              <a:t>Measured, not asserted: Experiment 2's 15/15 vs 8/15 gap is reproducible with `python3 src/benchmark.py`.</a:t>
+            </a:r>
+            <a:endParaRPr lang="en-US" sz="1450" dirty="0"/>
+          </a:p>
+          <a:p>
+            <a:pPr marL="342900" indent="-342900">
+              <a:lnSpc>
+                <a:spcPct val="125000"/>
+              </a:lnSpc>
+              <a:spcAft>
+                <a:spcPts val="1200"/>
+              </a:spcAft>
+              <a:buSzPct val="100000"/>
+              <a:buChar char="●"/>
+            </a:pPr>
+            <a:r>
+              <a:rPr lang="en-US" sz="1450" dirty="0">
+                <a:solidFill>
+                  <a:srgbClr val="475569"/>
+                </a:solidFill>
+                <a:latin typeface="Calibri" pitchFamily="34" charset="0"/>
+                <a:ea typeface="Calibri" pitchFamily="34" charset="-122"/>
+                <a:cs typeface="Calibri" pitchFamily="34" charset="-120"/>
+              </a:rPr>
+              <a:t>Composable by design: precedence and multi-vehicle capacity are each one more penalty term — not a bespoke solver per rule, unlike classical VRP tooling.</a:t>
+            </a:r>
+            <a:endParaRPr lang="en-US" sz="1450" dirty="0"/>
+          </a:p>
+          <a:p>
+            <a:pPr marL="342900" indent="-342900">
+              <a:lnSpc>
+                <a:spcPct val="125000"/>
+              </a:lnSpc>
+              <a:spcAft>
+                <a:spcPts val="1200"/>
+              </a:spcAft>
+              <a:buSzPct val="100000"/>
+              <a:buChar char="●"/>
+            </a:pPr>
+            <a:r>
+              <a:rPr lang="en-US" sz="1450" dirty="0">
+                <a:solidFill>
+                  <a:srgbClr val="475569"/>
+                </a:solidFill>
+                <a:latin typeface="Calibri" pitchFamily="34" charset="0"/>
+                <a:ea typeface="Calibri" pitchFamily="34" charset="-122"/>
+                <a:cs typeface="Calibri" pitchFamily="34" charset="-120"/>
+              </a:rPr>
+              <a:t>Aligned with the 2025 CRI patent guidance's bar for a “concrete, measurable technical effect,” not an abstract algorithm claim.</a:t>
+            </a:r>
+            <a:endParaRPr lang="en-US" sz="1450" dirty="0"/>
+          </a:p>
+        </p:txBody>
+      </p:sp>
+      <p:sp>
+        <p:nvSpPr>
+          <p:cNvPr id="7" name="Text 5"/>
+          <p:cNvSpPr txBox="1"/>
+          <p:nvPr/>
+        </p:nvSpPr>
+        <p:spPr>
+          <a:xfrm>
+            <a:off x="548640" y="6473952"/>
+            <a:ext cx="7315200" cy="274320"/>
+          </a:xfrm>
+          <a:prstGeom prst="rect">
+            <a:avLst/>
+          </a:prstGeom>
+          <a:noFill/>
+          <a:ln/>
+        </p:spPr>
+        <p:txBody>
+          <a:bodyPr wrap="square" rtlCol="0" anchor="ctr"/>
+          <a:lstStyle/>
+          <a:p>
+            <a:pPr indent="0" marL="0">
+              <a:buNone/>
+            </a:pPr>
+            <a:r>
+              <a:rPr lang="en-US" sz="900" dirty="0">
+                <a:solidFill>
+                  <a:srgbClr val="94A3B8"/>
+                </a:solidFill>
+                <a:latin typeface="Calibri" pitchFamily="34" charset="0"/>
+                <a:ea typeface="Calibri" pitchFamily="34" charset="-122"/>
+                <a:cs typeface="Calibri" pitchFamily="34" charset="-120"/>
+              </a:rPr>
+              <a:t>Quantum-Inspired Traffic Router  ·  SIH26137</a:t>
+            </a:r>
+            <a:endParaRPr lang="en-US" sz="900" dirty="0"/>
+          </a:p>
+        </p:txBody>
+      </p:sp>
+      <p:sp>
+        <p:nvSpPr>
+          <p:cNvPr id="8" name="Text 6"/>
+          <p:cNvSpPr txBox="1"/>
+          <p:nvPr/>
+        </p:nvSpPr>
+        <p:spPr>
+          <a:xfrm>
+            <a:off x="11521440" y="6473952"/>
+            <a:ext cx="365760" cy="274320"/>
+          </a:xfrm>
+          <a:prstGeom prst="rect">
+            <a:avLst/>
+          </a:prstGeom>
+          <a:noFill/>
+          <a:ln/>
+        </p:spPr>
+        <p:txBody>
+          <a:bodyPr wrap="square" rtlCol="0" anchor="ctr"/>
+          <a:lstStyle/>
+          <a:p>
+            <a:pPr algn="r" indent="0" marL="0">
+              <a:buNone/>
+            </a:pPr>
+            <a:r>
+              <a:rPr lang="en-US" sz="900" dirty="0">
+                <a:solidFill>
+                  <a:srgbClr val="94A3B8"/>
+                </a:solidFill>
+                <a:latin typeface="Calibri" pitchFamily="34" charset="0"/>
+                <a:ea typeface="Calibri" pitchFamily="34" charset="-122"/>
+                <a:cs typeface="Calibri" pitchFamily="34" charset="-120"/>
+              </a:rPr>
+              <a:t>13</a:t>
+            </a:r>
+            <a:endParaRPr lang="en-US" sz="900" dirty="0"/>
+          </a:p>
+        </p:txBody>
+      </p:sp>
+    </p:spTree>
+  </p:cSld>
+  <p:clrMapOvr>
+    <a:masterClrMapping/>
+  </p:clrMapOvr>
+</p:sld>
+</file>
+
+<file path=ppt/slides/slide14.xml><?xml version="1.0" encoding="utf-8"?>
+<p:sld xmlns:a="http://schemas.openxmlformats.org/drawingml/2006/main" xmlns:r="http://schemas.openxmlformats.org/officeDocument/2006/relationships" xmlns:p="http://schemas.openxmlformats.org/presentationml/2006/main">
+  <p:cSld name="Slide 14">
+    <p:bg>
+      <p:bgPr>
+        <a:solidFill>
+          <a:srgbClr val="F8FAFC"/>
+        </a:solidFill>
+      </p:bgPr>
+    </p:bg>
+    <p:spTree>
+      <p:nvGrpSpPr>
+        <p:cNvPr id="1" name=""/>
+        <p:cNvGrpSpPr/>
+        <p:nvPr/>
+      </p:nvGrpSpPr>
+      <p:grpSpPr>
+        <a:xfrm>
+          <a:off x="0" y="0"/>
+          <a:ext cx="0" cy="0"/>
+          <a:chOff x="0" y="0"/>
+          <a:chExt cx="0" cy="0"/>
+        </a:xfrm>
+      </p:grpSpPr>
+      <p:sp>
+        <p:nvSpPr>
+          <p:cNvPr id="2" name="Text 0"/>
+          <p:cNvSpPr txBox="1"/>
+          <p:nvPr/>
+        </p:nvSpPr>
+        <p:spPr>
+          <a:xfrm>
+            <a:off x="548640" y="320040"/>
+            <a:ext cx="7315200" cy="365760"/>
+          </a:xfrm>
+          <a:prstGeom prst="rect">
+            <a:avLst/>
+          </a:prstGeom>
+          <a:noFill/>
+          <a:ln/>
+        </p:spPr>
+        <p:txBody>
+          <a:bodyPr wrap="square" rtlCol="0" anchor="ctr"/>
+          <a:lstStyle/>
+          <a:p>
+            <a:pPr indent="0" marL="0">
+              <a:buNone/>
+            </a:pPr>
+            <a:r>
+              <a:rPr lang="en-US" sz="1300" b="1" spc="200" kern="0" dirty="0">
+                <a:solidFill>
+                  <a:srgbClr val="7C3AED"/>
+                </a:solidFill>
+                <a:latin typeface="Calibri" pitchFamily="34" charset="0"/>
+                <a:ea typeface="Calibri" pitchFamily="34" charset="-122"/>
+                <a:cs typeface="Calibri" pitchFamily="34" charset="-120"/>
+              </a:rPr>
+              <a:t>WHAT'S NEXT</a:t>
+            </a:r>
+            <a:endParaRPr lang="en-US" sz="1300" dirty="0"/>
+          </a:p>
+        </p:txBody>
+      </p:sp>
+      <p:sp>
+        <p:nvSpPr>
+          <p:cNvPr id="3" name="Text 1"/>
+          <p:cNvSpPr txBox="1"/>
+          <p:nvPr/>
+        </p:nvSpPr>
+        <p:spPr>
+          <a:xfrm>
+            <a:off x="548640" y="640080"/>
+            <a:ext cx="10789920" cy="822960"/>
+          </a:xfrm>
+          <a:prstGeom prst="rect">
+            <a:avLst/>
+          </a:prstGeom>
+          <a:noFill/>
+          <a:ln/>
+        </p:spPr>
+        <p:txBody>
+          <a:bodyPr wrap="square" rtlCol="0" anchor="ctr"/>
+          <a:lstStyle/>
+          <a:p>
+            <a:pPr indent="0" marL="0">
+              <a:buNone/>
+            </a:pPr>
+            <a:r>
+              <a:rPr lang="en-US" sz="3200" b="1" dirty="0">
+                <a:solidFill>
+                  <a:srgbClr val="1E1B4B"/>
+                </a:solidFill>
+                <a:latin typeface="Cambria" pitchFamily="34" charset="0"/>
+                <a:ea typeface="Cambria" pitchFamily="34" charset="-122"/>
+                <a:cs typeface="Cambria" pitchFamily="34" charset="-120"/>
+              </a:rPr>
+              <a:t>Already live vs. the honest next steps</a:t>
+            </a:r>
+            <a:endParaRPr lang="en-US" sz="3200" dirty="0"/>
+          </a:p>
+        </p:txBody>
+      </p:sp>
+      <p:sp>
+        <p:nvSpPr>
+          <p:cNvPr id="4" name="Shape 2"/>
+          <p:cNvSpPr/>
+          <p:nvPr/>
+        </p:nvSpPr>
+        <p:spPr>
+          <a:xfrm>
+            <a:off x="548640" y="1828800"/>
+            <a:ext cx="5394960" cy="4114800"/>
+          </a:xfrm>
+          <a:prstGeom prst="roundRect">
+            <a:avLst>
+              <a:gd name="adj" fmla="val 2667"/>
+            </a:avLst>
+          </a:prstGeom>
+          <a:solidFill>
+            <a:srgbClr val="FFFFFF"/>
+          </a:solidFill>
+          <a:ln w="12700">
+            <a:solidFill>
+              <a:srgbClr val="E2E8F0"/>
+            </a:solidFill>
+            <a:prstDash val="solid"/>
+          </a:ln>
+          <a:effectLst>
+            <a:outerShdw sx="100000" sy="100000" kx="0" ky="0" algn="bl" rotWithShape="0" blurRad="76200" dist="38100" dir="5400000">
+              <a:srgbClr val="0F172A">
+                <a:alpha val="25000"/>
+              </a:srgbClr>
+            </a:outerShdw>
+          </a:effectLst>
+        </p:spPr>
+      </p:sp>
+      <p:sp>
+        <p:nvSpPr>
+          <p:cNvPr id="5" name="Shape 3"/>
+          <p:cNvSpPr/>
+          <p:nvPr/>
+        </p:nvSpPr>
+        <p:spPr>
+          <a:xfrm>
+            <a:off x="868680" y="2148840"/>
+            <a:ext cx="320040" cy="320040"/>
+          </a:xfrm>
+          <a:prstGeom prst="ellipse">
+            <a:avLst/>
+          </a:prstGeom>
+          <a:solidFill>
+            <a:srgbClr val="22C55E"/>
+          </a:solidFill>
+          <a:ln/>
+        </p:spPr>
+      </p:sp>
+      <p:sp>
+        <p:nvSpPr>
+          <p:cNvPr id="6" name="Text 4"/>
+          <p:cNvSpPr txBox="1"/>
+          <p:nvPr/>
+        </p:nvSpPr>
+        <p:spPr>
+          <a:xfrm>
+            <a:off x="1325880" y="2121408"/>
+            <a:ext cx="4297680" cy="411480"/>
+          </a:xfrm>
+          <a:prstGeom prst="rect">
+            <a:avLst/>
+          </a:prstGeom>
+          <a:noFill/>
+          <a:ln/>
+        </p:spPr>
+        <p:txBody>
+          <a:bodyPr wrap="square" rtlCol="0" anchor="ctr"/>
+          <a:lstStyle/>
+          <a:p>
+            <a:pPr indent="0" marL="0">
+              <a:buNone/>
+            </a:pPr>
+            <a:r>
+              <a:rPr lang="en-US" sz="1700" b="1" dirty="0">
+                <a:solidFill>
+                  <a:srgbClr val="1E1B4B"/>
+                </a:solidFill>
+                <a:latin typeface="Cambria" pitchFamily="34" charset="0"/>
+                <a:ea typeface="Cambria" pitchFamily="34" charset="-122"/>
+                <a:cs typeface="Cambria" pitchFamily="34" charset="-120"/>
+              </a:rPr>
+              <a:t>Already shipped</a:t>
+            </a:r>
+            <a:endParaRPr lang="en-US" sz="1700" dirty="0"/>
+          </a:p>
+        </p:txBody>
+      </p:sp>
+      <p:sp>
+        <p:nvSpPr>
+          <p:cNvPr id="7" name="Text 5"/>
+          <p:cNvSpPr txBox="1"/>
+          <p:nvPr/>
+        </p:nvSpPr>
+        <p:spPr>
+          <a:xfrm>
+            <a:off x="914400" y="2788920"/>
+            <a:ext cx="4663440" cy="2834640"/>
+          </a:xfrm>
+          <a:prstGeom prst="rect">
+            <a:avLst/>
+          </a:prstGeom>
+          <a:noFill/>
+          <a:ln/>
+        </p:spPr>
+        <p:txBody>
+          <a:bodyPr wrap="square" rtlCol="0" anchor="ctr"/>
+          <a:lstStyle/>
+          <a:p>
+            <a:pPr marL="342900" indent="-342900">
+              <a:lnSpc>
+                <a:spcPct val="125000"/>
+              </a:lnSpc>
+              <a:spcAft>
+                <a:spcPts val="1600"/>
+              </a:spcAft>
+              <a:buSzPct val="100000"/>
+              <a:buChar char="●"/>
+            </a:pPr>
+            <a:r>
+              <a:rPr lang="en-US" sz="1350" dirty="0">
+                <a:solidFill>
+                  <a:srgbClr val="475569"/>
+                </a:solidFill>
+                <a:latin typeface="Calibri" pitchFamily="34" charset="0"/>
+                <a:ea typeface="Calibri" pitchFamily="34" charset="-122"/>
+                <a:cs typeface="Calibri" pitchFamily="34" charset="-120"/>
+              </a:rPr>
+              <a:t>Precedence constraints, single-vehicle AND fleet</a:t>
+            </a:r>
+            <a:endParaRPr lang="en-US" sz="1350" dirty="0"/>
+          </a:p>
+          <a:p>
+            <a:pPr marL="342900" indent="-342900">
+              <a:lnSpc>
+                <a:spcPct val="125000"/>
+              </a:lnSpc>
+              <a:spcAft>
+                <a:spcPts val="1600"/>
+              </a:spcAft>
+              <a:buSzPct val="100000"/>
+              <a:buChar char="●"/>
+            </a:pPr>
+            <a:r>
+              <a:rPr lang="en-US" sz="1350" dirty="0">
+                <a:solidFill>
+                  <a:srgbClr val="475569"/>
+                </a:solidFill>
+                <a:latin typeface="Calibri" pitchFamily="34" charset="0"/>
+                <a:ea typeface="Calibri" pitchFamily="34" charset="-122"/>
+                <a:cs typeface="Calibri" pitchFamily="34" charset="-120"/>
+              </a:rPr>
+              <a:t>Cross-cluster precedence (auto-co-located onto one vehicle)</a:t>
+            </a:r>
+            <a:endParaRPr lang="en-US" sz="1350" dirty="0"/>
+          </a:p>
+          <a:p>
+            <a:pPr marL="342900" indent="-342900">
+              <a:lnSpc>
+                <a:spcPct val="125000"/>
+              </a:lnSpc>
+              <a:spcAft>
+                <a:spcPts val="1600"/>
+              </a:spcAft>
+              <a:buSzPct val="100000"/>
+              <a:buChar char="●"/>
+            </a:pPr>
+            <a:r>
+              <a:rPr lang="en-US" sz="1350" dirty="0">
+                <a:solidFill>
+                  <a:srgbClr val="475569"/>
+                </a:solidFill>
+                <a:latin typeface="Calibri" pitchFamily="34" charset="0"/>
+                <a:ea typeface="Calibri" pitchFamily="34" charset="-122"/>
+                <a:cs typeface="Calibri" pitchFamily="34" charset="-120"/>
+              </a:rPr>
+              <a:t>Numeric time-window constraints</a:t>
+            </a:r>
+            <a:endParaRPr lang="en-US" sz="1350" dirty="0"/>
+          </a:p>
+          <a:p>
+            <a:pPr marL="342900" indent="-342900">
+              <a:lnSpc>
+                <a:spcPct val="125000"/>
+              </a:lnSpc>
+              <a:spcAft>
+                <a:spcPts val="1600"/>
+              </a:spcAft>
+              <a:buSzPct val="100000"/>
+              <a:buChar char="●"/>
+            </a:pPr>
+            <a:r>
+              <a:rPr lang="en-US" sz="1350" dirty="0">
+                <a:solidFill>
+                  <a:srgbClr val="475569"/>
+                </a:solidFill>
+                <a:latin typeface="Calibri" pitchFamily="34" charset="0"/>
+                <a:ea typeface="Calibri" pitchFamily="34" charset="-122"/>
+                <a:cs typeface="Calibri" pitchFamily="34" charset="-120"/>
+              </a:rPr>
+              <a:t>Multi-vehicle capacity (count or weight)</a:t>
+            </a:r>
+            <a:endParaRPr lang="en-US" sz="1350" dirty="0"/>
+          </a:p>
+          <a:p>
+            <a:pPr marL="342900" indent="-342900">
+              <a:lnSpc>
+                <a:spcPct val="125000"/>
+              </a:lnSpc>
+              <a:spcAft>
+                <a:spcPts val="1600"/>
+              </a:spcAft>
+              <a:buSzPct val="100000"/>
+              <a:buChar char="●"/>
+            </a:pPr>
+            <a:r>
+              <a:rPr lang="en-US" sz="1350" dirty="0">
+                <a:solidFill>
+                  <a:srgbClr val="475569"/>
+                </a:solidFill>
+                <a:latin typeface="Calibri" pitchFamily="34" charset="0"/>
+                <a:ea typeface="Calibri" pitchFamily="34" charset="-122"/>
+                <a:cs typeface="Calibri" pitchFamily="34" charset="-120"/>
+              </a:rPr>
+              <a:t>OR-Tools + QAOA comparisons</a:t>
+            </a:r>
+            <a:endParaRPr lang="en-US" sz="1350" dirty="0"/>
+          </a:p>
+          <a:p>
+            <a:pPr marL="342900" indent="-342900">
+              <a:lnSpc>
+                <a:spcPct val="125000"/>
+              </a:lnSpc>
+              <a:spcAft>
+                <a:spcPts val="1600"/>
+              </a:spcAft>
+              <a:buSzPct val="100000"/>
+              <a:buChar char="●"/>
+            </a:pPr>
+            <a:r>
+              <a:rPr lang="en-US" sz="1350" dirty="0">
+                <a:solidFill>
+                  <a:srgbClr val="475569"/>
+                </a:solidFill>
+                <a:latin typeface="Calibri" pitchFamily="34" charset="0"/>
+                <a:ea typeface="Calibri" pitchFamily="34" charset="-122"/>
+                <a:cs typeface="Calibri" pitchFamily="34" charset="-120"/>
+              </a:rPr>
+              <a:t>Live usage analytics</a:t>
+            </a:r>
+            <a:endParaRPr lang="en-US" sz="1350" dirty="0"/>
+          </a:p>
+          <a:p>
+            <a:pPr marL="342900" indent="-342900">
+              <a:lnSpc>
+                <a:spcPct val="125000"/>
+              </a:lnSpc>
+              <a:spcAft>
+                <a:spcPts val="1600"/>
+              </a:spcAft>
+              <a:buSzPct val="100000"/>
+              <a:buChar char="●"/>
+            </a:pPr>
+            <a:r>
+              <a:rPr lang="en-US" sz="1350" dirty="0">
+                <a:solidFill>
+                  <a:srgbClr val="475569"/>
+                </a:solidFill>
+                <a:latin typeface="Calibri" pitchFamily="34" charset="0"/>
+                <a:ea typeface="Calibri" pitchFamily="34" charset="-122"/>
+                <a:cs typeface="Calibri" pitchFamily="34" charset="-120"/>
+              </a:rPr>
+              <a:t>Docker + OpenAPI</a:t>
+            </a:r>
+            <a:endParaRPr lang="en-US" sz="1350" dirty="0"/>
+          </a:p>
+        </p:txBody>
+      </p:sp>
+      <p:sp>
+        <p:nvSpPr>
+          <p:cNvPr id="8" name="Shape 6"/>
+          <p:cNvSpPr/>
+          <p:nvPr/>
+        </p:nvSpPr>
+        <p:spPr>
+          <a:xfrm>
+            <a:off x="6217920" y="1828800"/>
+            <a:ext cx="5394960" cy="4114800"/>
+          </a:xfrm>
+          <a:prstGeom prst="roundRect">
+            <a:avLst>
+              <a:gd name="adj" fmla="val 2667"/>
+            </a:avLst>
+          </a:prstGeom>
+          <a:solidFill>
+            <a:srgbClr val="FFFFFF"/>
+          </a:solidFill>
+          <a:ln w="12700">
+            <a:solidFill>
+              <a:srgbClr val="E2E8F0"/>
+            </a:solidFill>
+            <a:prstDash val="solid"/>
+          </a:ln>
+          <a:effectLst>
+            <a:outerShdw sx="100000" sy="100000" kx="0" ky="0" algn="bl" rotWithShape="0" blurRad="76200" dist="38100" dir="5400000">
+              <a:srgbClr val="0F172A">
+                <a:alpha val="25000"/>
+              </a:srgbClr>
+            </a:outerShdw>
+          </a:effectLst>
+        </p:spPr>
+      </p:sp>
+      <p:sp>
+        <p:nvSpPr>
+          <p:cNvPr id="9" name="Shape 7"/>
+          <p:cNvSpPr/>
+          <p:nvPr/>
+        </p:nvSpPr>
+        <p:spPr>
+          <a:xfrm>
+            <a:off x="6537960" y="2148840"/>
+            <a:ext cx="320040" cy="320040"/>
+          </a:xfrm>
+          <a:prstGeom prst="ellipse">
+            <a:avLst/>
+          </a:prstGeom>
+          <a:solidFill>
+            <a:srgbClr val="F97316"/>
+          </a:solidFill>
+          <a:ln/>
+        </p:spPr>
+      </p:sp>
+      <p:sp>
+        <p:nvSpPr>
+          <p:cNvPr id="10" name="Text 8"/>
+          <p:cNvSpPr txBox="1"/>
+          <p:nvPr/>
+        </p:nvSpPr>
+        <p:spPr>
+          <a:xfrm>
+            <a:off x="6995160" y="2121408"/>
+            <a:ext cx="4297680" cy="411480"/>
+          </a:xfrm>
+          <a:prstGeom prst="rect">
+            <a:avLst/>
+          </a:prstGeom>
+          <a:noFill/>
+          <a:ln/>
+        </p:spPr>
+        <p:txBody>
+          <a:bodyPr wrap="square" rtlCol="0" anchor="ctr"/>
+          <a:lstStyle/>
+          <a:p>
+            <a:pPr indent="0" marL="0">
+              <a:buNone/>
+            </a:pPr>
+            <a:r>
+              <a:rPr lang="en-US" sz="1700" b="1" dirty="0">
+                <a:solidFill>
+                  <a:srgbClr val="1E1B4B"/>
+                </a:solidFill>
+                <a:latin typeface="Cambria" pitchFamily="34" charset="0"/>
+                <a:ea typeface="Cambria" pitchFamily="34" charset="-122"/>
+                <a:cs typeface="Cambria" pitchFamily="34" charset="-120"/>
+              </a:rPr>
+              <a:t>Honest next steps</a:t>
+            </a:r>
+            <a:endParaRPr lang="en-US" sz="1700" dirty="0"/>
+          </a:p>
+        </p:txBody>
+      </p:sp>
+      <p:sp>
+        <p:nvSpPr>
+          <p:cNvPr id="11" name="Text 9"/>
+          <p:cNvSpPr txBox="1"/>
+          <p:nvPr/>
+        </p:nvSpPr>
+        <p:spPr>
+          <a:xfrm>
+            <a:off x="6583680" y="2788920"/>
+            <a:ext cx="4663440" cy="2834640"/>
+          </a:xfrm>
+          <a:prstGeom prst="rect">
+            <a:avLst/>
+          </a:prstGeom>
+          <a:noFill/>
+          <a:ln/>
+        </p:spPr>
+        <p:txBody>
+          <a:bodyPr wrap="square" rtlCol="0" anchor="ctr"/>
+          <a:lstStyle/>
+          <a:p>
+            <a:pPr marL="342900" indent="-342900">
+              <a:lnSpc>
+                <a:spcPct val="125000"/>
+              </a:lnSpc>
+              <a:spcAft>
+                <a:spcPts val="1600"/>
+              </a:spcAft>
+              <a:buSzPct val="100000"/>
+              <a:buChar char="●"/>
+            </a:pPr>
+            <a:r>
+              <a:rPr lang="en-US" sz="1350" dirty="0">
+                <a:solidFill>
+                  <a:srgbClr val="475569"/>
+                </a:solidFill>
+                <a:latin typeface="Calibri" pitchFamily="34" charset="0"/>
+                <a:ea typeface="Calibri" pitchFamily="34" charset="-122"/>
+                <a:cs typeface="Calibri" pitchFamily="34" charset="-120"/>
+              </a:rPr>
+              <a:t>A real, paid traffic API (interface already pluggable)</a:t>
+            </a:r>
+            <a:endParaRPr lang="en-US" sz="1350" dirty="0"/>
+          </a:p>
+          <a:p>
+            <a:pPr marL="342900" indent="-342900">
+              <a:lnSpc>
+                <a:spcPct val="125000"/>
+              </a:lnSpc>
+              <a:spcAft>
+                <a:spcPts val="1600"/>
+              </a:spcAft>
+              <a:buSzPct val="100000"/>
+              <a:buChar char="●"/>
+            </a:pPr>
+            <a:r>
+              <a:rPr lang="en-US" sz="1350" dirty="0">
+                <a:solidFill>
+                  <a:srgbClr val="475569"/>
+                </a:solidFill>
+                <a:latin typeface="Calibri" pitchFamily="34" charset="0"/>
+                <a:ea typeface="Calibri" pitchFamily="34" charset="-122"/>
+                <a:cs typeface="Calibri" pitchFamily="34" charset="-120"/>
+              </a:rPr>
+              <a:t>Time windows above 9 interior stops (position-based QUBO limit)</a:t>
+            </a:r>
+            <a:endParaRPr lang="en-US" sz="1350" dirty="0"/>
+          </a:p>
+          <a:p>
+            <a:pPr marL="342900" indent="-342900">
+              <a:lnSpc>
+                <a:spcPct val="125000"/>
+              </a:lnSpc>
+              <a:spcAft>
+                <a:spcPts val="1600"/>
+              </a:spcAft>
+              <a:buSzPct val="100000"/>
+              <a:buChar char="●"/>
+            </a:pPr>
+            <a:r>
+              <a:rPr lang="en-US" sz="1350" dirty="0">
+                <a:solidFill>
+                  <a:srgbClr val="475569"/>
+                </a:solidFill>
+                <a:latin typeface="Calibri" pitchFamily="34" charset="0"/>
+                <a:ea typeface="Calibri" pitchFamily="34" charset="-122"/>
+                <a:cs typeface="Calibri" pitchFamily="34" charset="-120"/>
+              </a:rPr>
+              <a:t>Real wall-clock time-window guarantees (needs a different formulation)</a:t>
+            </a:r>
+            <a:endParaRPr lang="en-US" sz="1350" dirty="0"/>
+          </a:p>
+          <a:p>
+            <a:pPr marL="342900" indent="-342900">
+              <a:lnSpc>
+                <a:spcPct val="125000"/>
+              </a:lnSpc>
+              <a:spcAft>
+                <a:spcPts val="1600"/>
+              </a:spcAft>
+              <a:buSzPct val="100000"/>
+              <a:buChar char="●"/>
+            </a:pPr>
+            <a:r>
+              <a:rPr lang="en-US" sz="1350" dirty="0">
+                <a:solidFill>
+                  <a:srgbClr val="475569"/>
+                </a:solidFill>
+                <a:latin typeface="Calibri" pitchFamily="34" charset="0"/>
+                <a:ea typeface="Calibri" pitchFamily="34" charset="-122"/>
+                <a:cs typeface="Calibri" pitchFamily="34" charset="-120"/>
+              </a:rPr>
+              <a:t>Shared, durable analytics storage past a single worker</a:t>
+            </a:r>
+            <a:endParaRPr lang="en-US" sz="1350" dirty="0"/>
+          </a:p>
+        </p:txBody>
+      </p:sp>
+      <p:sp>
+        <p:nvSpPr>
+          <p:cNvPr id="12" name="Text 10"/>
+          <p:cNvSpPr txBox="1"/>
+          <p:nvPr/>
+        </p:nvSpPr>
+        <p:spPr>
+          <a:xfrm>
+            <a:off x="548640" y="6473952"/>
+            <a:ext cx="7315200" cy="274320"/>
+          </a:xfrm>
+          <a:prstGeom prst="rect">
+            <a:avLst/>
+          </a:prstGeom>
+          <a:noFill/>
+          <a:ln/>
+        </p:spPr>
+        <p:txBody>
+          <a:bodyPr wrap="square" rtlCol="0" anchor="ctr"/>
+          <a:lstStyle/>
+          <a:p>
+            <a:pPr indent="0" marL="0">
+              <a:buNone/>
+            </a:pPr>
+            <a:r>
+              <a:rPr lang="en-US" sz="900" dirty="0">
+                <a:solidFill>
+                  <a:srgbClr val="94A3B8"/>
+                </a:solidFill>
+                <a:latin typeface="Calibri" pitchFamily="34" charset="0"/>
+                <a:ea typeface="Calibri" pitchFamily="34" charset="-122"/>
+                <a:cs typeface="Calibri" pitchFamily="34" charset="-120"/>
+              </a:rPr>
+              <a:t>Quantum-Inspired Traffic Router  ·  SIH26137</a:t>
+            </a:r>
+            <a:endParaRPr lang="en-US" sz="900" dirty="0"/>
+          </a:p>
+        </p:txBody>
+      </p:sp>
+      <p:sp>
+        <p:nvSpPr>
+          <p:cNvPr id="13" name="Text 11"/>
+          <p:cNvSpPr txBox="1"/>
+          <p:nvPr/>
+        </p:nvSpPr>
+        <p:spPr>
+          <a:xfrm>
+            <a:off x="11521440" y="6473952"/>
+            <a:ext cx="365760" cy="274320"/>
+          </a:xfrm>
+          <a:prstGeom prst="rect">
+            <a:avLst/>
+          </a:prstGeom>
+          <a:noFill/>
+          <a:ln/>
+        </p:spPr>
+        <p:txBody>
+          <a:bodyPr wrap="square" rtlCol="0" anchor="ctr"/>
+          <a:lstStyle/>
+          <a:p>
+            <a:pPr algn="r" indent="0" marL="0">
+              <a:buNone/>
+            </a:pPr>
+            <a:r>
+              <a:rPr lang="en-US" sz="900" dirty="0">
+                <a:solidFill>
+                  <a:srgbClr val="94A3B8"/>
+                </a:solidFill>
+                <a:latin typeface="Calibri" pitchFamily="34" charset="0"/>
+                <a:ea typeface="Calibri" pitchFamily="34" charset="-122"/>
+                <a:cs typeface="Calibri" pitchFamily="34" charset="-120"/>
+              </a:rPr>
+              <a:t>14</a:t>
+            </a:r>
+            <a:endParaRPr lang="en-US" sz="900" dirty="0"/>
+          </a:p>
+        </p:txBody>
+      </p:sp>
+    </p:spTree>
+  </p:cSld>
+  <p:clrMapOvr>
+    <a:masterClrMapping/>
+  </p:clrMapOvr>
+</p:sld>
+</file>
+
+<file path=ppt/slides/slide15.xml><?xml version="1.0" encoding="utf-8"?>
+<p:sld xmlns:a="http://schemas.openxmlformats.org/drawingml/2006/main" xmlns:r="http://schemas.openxmlformats.org/officeDocument/2006/relationships" xmlns:p="http://schemas.openxmlformats.org/presentationml/2006/main">
+  <p:cSld name="Slide 15">
+    <p:bg>
+      <p:bgPr>
+        <a:solidFill>
+          <a:srgbClr val="1E1B4B"/>
+        </a:solidFill>
+      </p:bgPr>
+    </p:bg>
+    <p:spTree>
+      <p:nvGrpSpPr>
+        <p:cNvPr id="1" name=""/>
+        <p:cNvGrpSpPr/>
+        <p:nvPr/>
+      </p:nvGrpSpPr>
+      <p:grpSpPr>
+        <a:xfrm>
+          <a:off x="0" y="0"/>
+          <a:ext cx="0" cy="0"/>
+          <a:chOff x="0" y="0"/>
+          <a:chExt cx="0" cy="0"/>
+        </a:xfrm>
+      </p:grpSpPr>
+      <p:sp>
+        <p:nvSpPr>
           <p:cNvPr id="2" name="Shape 0"/>
           <p:cNvSpPr/>
           <p:nvPr/>
@@ -6885,7 +9974,7 @@
     <p:bg>
       <p:bgPr>
         <a:solidFill>
-          <a:srgbClr val="F8FAFC"/>
+          <a:srgbClr val="1E1B4B"/>
         </a:solidFill>
       </p:bgPr>
     </p:bg>
@@ -6930,13 +10019,13 @@
             <a:r>
               <a:rPr lang="en-US" sz="1300" b="1" spc="200" kern="0" dirty="0">
                 <a:solidFill>
-                  <a:srgbClr val="7C3AED"/>
-                </a:solidFill>
-                <a:latin typeface="Calibri" pitchFamily="34" charset="0"/>
-                <a:ea typeface="Calibri" pitchFamily="34" charset="-122"/>
-                <a:cs typeface="Calibri" pitchFamily="34" charset="-120"/>
-              </a:rPr>
-              <a:t>BEYOND ONE VEHICLE</a:t>
+                  <a:srgbClr val="22D3EE"/>
+                </a:solidFill>
+                <a:latin typeface="Calibri" pitchFamily="34" charset="0"/>
+                <a:ea typeface="Calibri" pitchFamily="34" charset="-122"/>
+                <a:cs typeface="Calibri" pitchFamily="34" charset="-120"/>
+              </a:rPr>
+              <a:t>BENCHMARK — EXPERIMENT 3</a:t>
             </a:r>
             <a:endParaRPr lang="en-US" sz="1300" dirty="0"/>
           </a:p>
@@ -6969,13 +10058,13 @@
             <a:r>
               <a:rPr lang="en-US" sz="3200" b="1" dirty="0">
                 <a:solidFill>
-                  <a:srgbClr val="1E1B4B"/>
+                  <a:srgbClr val="FFFFFF"/>
                 </a:solidFill>
                 <a:latin typeface="Cambria" pitchFamily="34" charset="0"/>
                 <a:ea typeface="Cambria" pitchFamily="34" charset="-122"/>
                 <a:cs typeface="Cambria" pitchFamily="34" charset="-120"/>
               </a:rPr>
-              <a:t>Multi-vehicle dispatch, with capacity that means what it says</a:t>
+              <a:t>Compose constraints together — that's the real claim</a:t>
             </a:r>
             <a:endParaRPr lang="en-US" sz="3200" dirty="0"/>
           </a:p>
@@ -6989,18 +10078,25 @@
         </p:nvSpPr>
         <p:spPr>
           <a:xfrm>
-            <a:off x="548640" y="1874520"/>
-            <a:ext cx="457200" cy="457200"/>
-          </a:xfrm>
-          <a:prstGeom prst="ellipse">
-            <a:avLst/>
+            <a:off x="548640" y="1920240"/>
+            <a:ext cx="3566160" cy="2377440"/>
+          </a:xfrm>
+          <a:prstGeom prst="roundRect">
+            <a:avLst>
+              <a:gd name="adj" fmla="val 4615"/>
+            </a:avLst>
           </a:prstGeom>
           <a:solidFill>
-            <a:srgbClr val="7C3AED">
-              <a:alpha val="15000"/>
-            </a:srgbClr>
+            <a:srgbClr val="312E81"/>
           </a:solidFill>
           <a:ln/>
+          <a:effectLst>
+            <a:outerShdw sx="100000" sy="100000" kx="0" ky="0" algn="bl" rotWithShape="0" blurRad="76200" dist="38100" dir="5400000">
+              <a:srgbClr val="0F172A">
+                <a:alpha val="25000"/>
+              </a:srgbClr>
+            </a:outerShdw>
+          </a:effectLst>
         </p:spPr>
       </p:sp>
       <p:sp>
@@ -7011,8 +10107,8 @@
         </p:nvSpPr>
         <p:spPr>
           <a:xfrm>
-            <a:off x="548640" y="1874520"/>
-            <a:ext cx="457200" cy="457200"/>
+            <a:off x="548640" y="2103120"/>
+            <a:ext cx="3566160" cy="1051560"/>
           </a:xfrm>
           <a:prstGeom prst="rect">
             <a:avLst/>
@@ -7028,17 +10124,17 @@
               <a:buNone/>
             </a:pPr>
             <a:r>
-              <a:rPr lang="en-US" sz="1600" b="1" dirty="0">
-                <a:solidFill>
-                  <a:srgbClr val="7C3AED"/>
+              <a:rPr lang="en-US" sz="4000" b="1" dirty="0">
+                <a:solidFill>
+                  <a:srgbClr val="22C55E"/>
                 </a:solidFill>
                 <a:latin typeface="Cambria" pitchFamily="34" charset="0"/>
                 <a:ea typeface="Cambria" pitchFamily="34" charset="-122"/>
                 <a:cs typeface="Cambria" pitchFamily="34" charset="-120"/>
               </a:rPr>
-              <a:t>1</a:t>
-            </a:r>
-            <a:endParaRPr lang="en-US" sz="1600" dirty="0"/>
+              <a:t>14/14</a:t>
+            </a:r>
+            <a:endParaRPr lang="en-US" sz="4000" dirty="0"/>
           </a:p>
         </p:txBody>
       </p:sp>
@@ -7050,59 +10146,150 @@
         </p:nvSpPr>
         <p:spPr>
           <a:xfrm>
-            <a:off x="1234440" y="1783080"/>
-            <a:ext cx="2834640" cy="1005840"/>
-          </a:xfrm>
-          <a:prstGeom prst="rect">
-            <a:avLst/>
-          </a:prstGeom>
-          <a:noFill/>
-          <a:ln/>
-        </p:spPr>
-        <p:txBody>
-          <a:bodyPr wrap="square" rtlCol="0" anchor="ctr"/>
-          <a:lstStyle/>
-          <a:p>
-            <a:pPr indent="0" marL="0">
-              <a:buNone/>
-            </a:pPr>
-            <a:r>
-              <a:rPr lang="en-US" sz="1450" b="1" dirty="0">
-                <a:solidFill>
-                  <a:srgbClr val="1E1B4B"/>
+            <a:off x="731520" y="3154680"/>
+            <a:ext cx="3200400" cy="1005840"/>
+          </a:xfrm>
+          <a:prstGeom prst="rect">
+            <a:avLst/>
+          </a:prstGeom>
+          <a:noFill/>
+          <a:ln/>
+        </p:spPr>
+        <p:txBody>
+          <a:bodyPr wrap="square" rtlCol="0" anchor="ctr"/>
+          <a:lstStyle/>
+          <a:p>
+            <a:pPr algn="ctr" indent="0" marL="0">
+              <a:lnSpc>
+                <a:spcPct val="120000"/>
+              </a:lnSpc>
+              <a:buNone/>
+            </a:pPr>
+            <a:r>
+              <a:rPr lang="en-US" sz="1250" dirty="0">
+                <a:solidFill>
+                  <a:srgbClr val="C7D2FE"/>
+                </a:solidFill>
+                <a:latin typeface="Calibri" pitchFamily="34" charset="0"/>
+                <a:ea typeface="Calibri" pitchFamily="34" charset="-122"/>
+                <a:cs typeface="Calibri" pitchFamily="34" charset="-120"/>
+              </a:rPr>
+              <a:t>COMPOSED (capacity AND</a:t>
+            </a:r>
+            <a:endParaRPr lang="en-US" sz="1250" dirty="0"/>
+          </a:p>
+          <a:p>
+            <a:pPr algn="ctr" indent="0" marL="0">
+              <a:lnSpc>
+                <a:spcPct val="120000"/>
+              </a:lnSpc>
+              <a:buNone/>
+            </a:pPr>
+            <a:r>
+              <a:rPr lang="en-US" sz="1250" dirty="0">
+                <a:solidFill>
+                  <a:srgbClr val="C7D2FE"/>
+                </a:solidFill>
+                <a:latin typeface="Calibri" pitchFamily="34" charset="0"/>
+                <a:ea typeface="Calibri" pitchFamily="34" charset="-122"/>
+                <a:cs typeface="Calibri" pitchFamily="34" charset="-120"/>
+              </a:rPr>
+              <a:t>precedence together) satisfied both</a:t>
+            </a:r>
+            <a:endParaRPr lang="en-US" sz="1250" dirty="0"/>
+          </a:p>
+        </p:txBody>
+      </p:sp>
+      <p:sp>
+        <p:nvSpPr>
+          <p:cNvPr id="7" name="Shape 5"/>
+          <p:cNvSpPr/>
+          <p:nvPr/>
+        </p:nvSpPr>
+        <p:spPr>
+          <a:xfrm>
+            <a:off x="4343400" y="1920240"/>
+            <a:ext cx="3566160" cy="2377440"/>
+          </a:xfrm>
+          <a:prstGeom prst="roundRect">
+            <a:avLst>
+              <a:gd name="adj" fmla="val 4615"/>
+            </a:avLst>
+          </a:prstGeom>
+          <a:solidFill>
+            <a:srgbClr val="312E81"/>
+          </a:solidFill>
+          <a:ln/>
+          <a:effectLst>
+            <a:outerShdw sx="100000" sy="100000" kx="0" ky="0" algn="bl" rotWithShape="0" blurRad="76200" dist="38100" dir="5400000">
+              <a:srgbClr val="0F172A">
+                <a:alpha val="25000"/>
+              </a:srgbClr>
+            </a:outerShdw>
+          </a:effectLst>
+        </p:spPr>
+      </p:sp>
+      <p:sp>
+        <p:nvSpPr>
+          <p:cNvPr id="8" name="Text 6"/>
+          <p:cNvSpPr txBox="1"/>
+          <p:nvPr/>
+        </p:nvSpPr>
+        <p:spPr>
+          <a:xfrm>
+            <a:off x="4343400" y="2103120"/>
+            <a:ext cx="3566160" cy="1051560"/>
+          </a:xfrm>
+          <a:prstGeom prst="rect">
+            <a:avLst/>
+          </a:prstGeom>
+          <a:noFill/>
+          <a:ln/>
+        </p:spPr>
+        <p:txBody>
+          <a:bodyPr wrap="square" rtlCol="0" anchor="ctr"/>
+          <a:lstStyle/>
+          <a:p>
+            <a:pPr algn="ctr" indent="0" marL="0">
+              <a:buNone/>
+            </a:pPr>
+            <a:r>
+              <a:rPr lang="en-US" sz="4000" b="1" dirty="0">
+                <a:solidFill>
+                  <a:srgbClr val="F97316"/>
                 </a:solidFill>
                 <a:latin typeface="Cambria" pitchFamily="34" charset="0"/>
                 <a:ea typeface="Cambria" pitchFamily="34" charset="-122"/>
                 <a:cs typeface="Cambria" pitchFamily="34" charset="-120"/>
               </a:rPr>
-              <a:t>Balanced by default</a:t>
-            </a:r>
-            <a:endParaRPr lang="en-US" sz="1450" dirty="0"/>
-          </a:p>
-        </p:txBody>
-      </p:sp>
-      <p:sp>
-        <p:nvSpPr>
-          <p:cNvPr id="7" name="Text 5"/>
-          <p:cNvSpPr txBox="1"/>
-          <p:nvPr/>
-        </p:nvSpPr>
-        <p:spPr>
-          <a:xfrm>
-            <a:off x="4206240" y="1783080"/>
-            <a:ext cx="7406640" cy="1005840"/>
-          </a:xfrm>
-          <a:prstGeom prst="rect">
-            <a:avLst/>
-          </a:prstGeom>
-          <a:noFill/>
-          <a:ln/>
-        </p:spPr>
-        <p:txBody>
-          <a:bodyPr wrap="square" rtlCol="0" anchor="ctr"/>
-          <a:lstStyle/>
-          <a:p>
-            <a:pPr indent="0" marL="0">
+              <a:t>6/14</a:t>
+            </a:r>
+            <a:endParaRPr lang="en-US" sz="4000" dirty="0"/>
+          </a:p>
+        </p:txBody>
+      </p:sp>
+      <p:sp>
+        <p:nvSpPr>
+          <p:cNvPr id="9" name="Text 7"/>
+          <p:cNvSpPr txBox="1"/>
+          <p:nvPr/>
+        </p:nvSpPr>
+        <p:spPr>
+          <a:xfrm>
+            <a:off x="4526280" y="3154680"/>
+            <a:ext cx="3200400" cy="1005840"/>
+          </a:xfrm>
+          <a:prstGeom prst="rect">
+            <a:avLst/>
+          </a:prstGeom>
+          <a:noFill/>
+          <a:ln/>
+        </p:spPr>
+        <p:txBody>
+          <a:bodyPr wrap="square" rtlCol="0" anchor="ctr"/>
+          <a:lstStyle/>
+          <a:p>
+            <a:pPr algn="ctr" indent="0" marL="0">
               <a:lnSpc>
                 <a:spcPct val="120000"/>
               </a:lnSpc>
@@ -7111,50 +10298,77 @@
             <a:r>
               <a:rPr lang="en-US" sz="1250" dirty="0">
                 <a:solidFill>
-                  <a:srgbClr val="475569"/>
-                </a:solidFill>
-                <a:latin typeface="Calibri" pitchFamily="34" charset="0"/>
-                <a:ea typeface="Calibri" pitchFamily="34" charset="-122"/>
-                <a:cs typeface="Calibri" pitchFamily="34" charset="-120"/>
-              </a:rPr>
-              <a:t>Farthest-point clustering alone can hand one vehicle 14 stops and another 2 — every split is rebalanced against a fair-share target automatically.</a:t>
+                  <a:srgbClr val="C7D2FE"/>
+                </a:solidFill>
+                <a:latin typeface="Calibri" pitchFamily="34" charset="0"/>
+                <a:ea typeface="Calibri" pitchFamily="34" charset="-122"/>
+                <a:cs typeface="Calibri" pitchFamily="34" charset="-120"/>
+              </a:rPr>
+              <a:t>CAPACITY-ONLY (precedence-blind)</a:t>
             </a:r>
             <a:endParaRPr lang="en-US" sz="1250" dirty="0"/>
           </a:p>
-        </p:txBody>
-      </p:sp>
-      <p:sp>
-        <p:nvSpPr>
-          <p:cNvPr id="8" name="Shape 6"/>
+          <a:p>
+            <a:pPr algn="ctr" indent="0" marL="0">
+              <a:lnSpc>
+                <a:spcPct val="120000"/>
+              </a:lnSpc>
+              <a:buNone/>
+            </a:pPr>
+            <a:r>
+              <a:rPr lang="en-US" sz="1250" dirty="0">
+                <a:solidFill>
+                  <a:srgbClr val="C7D2FE"/>
+                </a:solidFill>
+                <a:latin typeface="Calibri" pitchFamily="34" charset="0"/>
+                <a:ea typeface="Calibri" pitchFamily="34" charset="-122"/>
+                <a:cs typeface="Calibri" pitchFamily="34" charset="-120"/>
+              </a:rPr>
+              <a:t>violated precedence anyway</a:t>
+            </a:r>
+            <a:endParaRPr lang="en-US" sz="1250" dirty="0"/>
+          </a:p>
+        </p:txBody>
+      </p:sp>
+      <p:sp>
+        <p:nvSpPr>
+          <p:cNvPr id="10" name="Shape 8"/>
           <p:cNvSpPr/>
           <p:nvPr/>
         </p:nvSpPr>
         <p:spPr>
           <a:xfrm>
-            <a:off x="548640" y="2953512"/>
-            <a:ext cx="457200" cy="457200"/>
-          </a:xfrm>
-          <a:prstGeom prst="ellipse">
-            <a:avLst/>
+            <a:off x="8138160" y="1920240"/>
+            <a:ext cx="3566160" cy="2377440"/>
+          </a:xfrm>
+          <a:prstGeom prst="roundRect">
+            <a:avLst>
+              <a:gd name="adj" fmla="val 4615"/>
+            </a:avLst>
           </a:prstGeom>
           <a:solidFill>
-            <a:srgbClr val="7C3AED">
-              <a:alpha val="15000"/>
-            </a:srgbClr>
+            <a:srgbClr val="312E81"/>
           </a:solidFill>
           <a:ln/>
-        </p:spPr>
-      </p:sp>
-      <p:sp>
-        <p:nvSpPr>
-          <p:cNvPr id="9" name="Text 7"/>
-          <p:cNvSpPr txBox="1"/>
-          <p:nvPr/>
-        </p:nvSpPr>
-        <p:spPr>
-          <a:xfrm>
-            <a:off x="548640" y="2953512"/>
-            <a:ext cx="457200" cy="457200"/>
+          <a:effectLst>
+            <a:outerShdw sx="100000" sy="100000" kx="0" ky="0" algn="bl" rotWithShape="0" blurRad="76200" dist="38100" dir="5400000">
+              <a:srgbClr val="0F172A">
+                <a:alpha val="25000"/>
+              </a:srgbClr>
+            </a:outerShdw>
+          </a:effectLst>
+        </p:spPr>
+      </p:sp>
+      <p:sp>
+        <p:nvSpPr>
+          <p:cNvPr id="11" name="Text 9"/>
+          <p:cNvSpPr txBox="1"/>
+          <p:nvPr/>
+        </p:nvSpPr>
+        <p:spPr>
+          <a:xfrm>
+            <a:off x="8138160" y="2103120"/>
+            <a:ext cx="3566160" cy="1051560"/>
           </a:xfrm>
           <a:prstGeom prst="rect">
             <a:avLst/>
@@ -7170,81 +10384,42 @@
               <a:buNone/>
             </a:pPr>
             <a:r>
-              <a:rPr lang="en-US" sz="1600" b="1" dirty="0">
-                <a:solidFill>
-                  <a:srgbClr val="7C3AED"/>
+              <a:rPr lang="en-US" sz="4000" b="1" dirty="0">
+                <a:solidFill>
+                  <a:srgbClr val="F97316"/>
                 </a:solidFill>
                 <a:latin typeface="Cambria" pitchFamily="34" charset="0"/>
                 <a:ea typeface="Cambria" pitchFamily="34" charset="-122"/>
                 <a:cs typeface="Cambria" pitchFamily="34" charset="-120"/>
               </a:rPr>
-              <a:t>2</a:t>
-            </a:r>
-            <a:endParaRPr lang="en-US" sz="1600" dirty="0"/>
-          </a:p>
-        </p:txBody>
-      </p:sp>
-      <p:sp>
-        <p:nvSpPr>
-          <p:cNvPr id="10" name="Text 8"/>
-          <p:cNvSpPr txBox="1"/>
-          <p:nvPr/>
-        </p:nvSpPr>
-        <p:spPr>
-          <a:xfrm>
-            <a:off x="1234440" y="2862072"/>
-            <a:ext cx="2834640" cy="1005840"/>
-          </a:xfrm>
-          <a:prstGeom prst="rect">
-            <a:avLst/>
-          </a:prstGeom>
-          <a:noFill/>
-          <a:ln/>
-        </p:spPr>
-        <p:txBody>
-          <a:bodyPr wrap="square" rtlCol="0" anchor="ctr"/>
-          <a:lstStyle/>
-          <a:p>
-            <a:pPr indent="0" marL="0">
-              <a:buNone/>
-            </a:pPr>
-            <a:r>
-              <a:rPr lang="en-US" sz="1450" b="1" dirty="0">
-                <a:solidFill>
-                  <a:srgbClr val="1E1B4B"/>
-                </a:solidFill>
-                <a:latin typeface="Cambria" pitchFamily="34" charset="0"/>
-                <a:ea typeface="Cambria" pitchFamily="34" charset="-122"/>
-                <a:cs typeface="Cambria" pitchFamily="34" charset="-120"/>
-              </a:rPr>
-              <a:t>A real, enforced cap</a:t>
-            </a:r>
-            <a:endParaRPr lang="en-US" sz="1450" dirty="0"/>
-          </a:p>
-        </p:txBody>
-      </p:sp>
-      <p:sp>
-        <p:nvSpPr>
-          <p:cNvPr id="11" name="Text 9"/>
-          <p:cNvSpPr txBox="1"/>
-          <p:nvPr/>
-        </p:nvSpPr>
-        <p:spPr>
-          <a:xfrm>
-            <a:off x="4206240" y="2862072"/>
-            <a:ext cx="7406640" cy="1005840"/>
-          </a:xfrm>
-          <a:prstGeom prst="rect">
-            <a:avLst/>
-          </a:prstGeom>
-          <a:noFill/>
-          <a:ln/>
-        </p:spPr>
-        <p:txBody>
-          <a:bodyPr wrap="square" rtlCol="0" anchor="ctr"/>
-          <a:lstStyle/>
-          <a:p>
-            <a:pPr indent="0" marL="0">
+              <a:t>+51.5%</a:t>
+            </a:r>
+            <a:endParaRPr lang="en-US" sz="4000" dirty="0"/>
+          </a:p>
+        </p:txBody>
+      </p:sp>
+      <p:sp>
+        <p:nvSpPr>
+          <p:cNvPr id="12" name="Text 10"/>
+          <p:cNvSpPr txBox="1"/>
+          <p:nvPr/>
+        </p:nvSpPr>
+        <p:spPr>
+          <a:xfrm>
+            <a:off x="8321040" y="3154680"/>
+            <a:ext cx="3200400" cy="1005840"/>
+          </a:xfrm>
+          <a:prstGeom prst="rect">
+            <a:avLst/>
+          </a:prstGeom>
+          <a:noFill/>
+          <a:ln/>
+        </p:spPr>
+        <p:txBody>
+          <a:bodyPr wrap="square" rtlCol="0" anchor="ctr"/>
+          <a:lstStyle/>
+          <a:p>
+            <a:pPr algn="ctr" indent="0" marL="0">
               <a:lnSpc>
                 <a:spcPct val="120000"/>
               </a:lnSpc>
@@ -7253,140 +10428,18 @@
             <a:r>
               <a:rPr lang="en-US" sz="1250" dirty="0">
                 <a:solidFill>
-                  <a:srgbClr val="475569"/>
-                </a:solidFill>
-                <a:latin typeface="Calibri" pitchFamily="34" charset="0"/>
-                <a:ea typeface="Calibri" pitchFamily="34" charset="-122"/>
-                <a:cs typeface="Calibri" pitchFamily="34" charset="-120"/>
-              </a:rPr>
-              <a:t>“Max/vehicle” genuinely limits every vehicle's stop count, auto-raising the fleet size if the requested vehicles can't satisfy it — not a suggestion.</a:t>
+                  <a:srgbClr val="C7D2FE"/>
+                </a:solidFill>
+                <a:latin typeface="Calibri" pitchFamily="34" charset="0"/>
+                <a:ea typeface="Calibri" pitchFamily="34" charset="-122"/>
+                <a:cs typeface="Calibri" pitchFamily="34" charset="-120"/>
+              </a:rPr>
+              <a:t>worst overload from a</a:t>
             </a:r>
             <a:endParaRPr lang="en-US" sz="1250" dirty="0"/>
           </a:p>
-        </p:txBody>
-      </p:sp>
-      <p:sp>
-        <p:nvSpPr>
-          <p:cNvPr id="12" name="Shape 10"/>
-          <p:cNvSpPr/>
-          <p:nvPr/>
-        </p:nvSpPr>
-        <p:spPr>
-          <a:xfrm>
-            <a:off x="548640" y="4032504"/>
-            <a:ext cx="457200" cy="457200"/>
-          </a:xfrm>
-          <a:prstGeom prst="ellipse">
-            <a:avLst/>
-          </a:prstGeom>
-          <a:solidFill>
-            <a:srgbClr val="7C3AED">
-              <a:alpha val="15000"/>
-            </a:srgbClr>
-          </a:solidFill>
-          <a:ln/>
-        </p:spPr>
-      </p:sp>
-      <p:sp>
-        <p:nvSpPr>
-          <p:cNvPr id="13" name="Text 11"/>
-          <p:cNvSpPr txBox="1"/>
-          <p:nvPr/>
-        </p:nvSpPr>
-        <p:spPr>
-          <a:xfrm>
-            <a:off x="548640" y="4032504"/>
-            <a:ext cx="457200" cy="457200"/>
-          </a:xfrm>
-          <a:prstGeom prst="rect">
-            <a:avLst/>
-          </a:prstGeom>
-          <a:noFill/>
-          <a:ln/>
-        </p:spPr>
-        <p:txBody>
-          <a:bodyPr wrap="square" rtlCol="0" anchor="ctr"/>
-          <a:lstStyle/>
           <a:p>
             <a:pPr algn="ctr" indent="0" marL="0">
-              <a:buNone/>
-            </a:pPr>
-            <a:r>
-              <a:rPr lang="en-US" sz="1600" b="1" dirty="0">
-                <a:solidFill>
-                  <a:srgbClr val="7C3AED"/>
-                </a:solidFill>
-                <a:latin typeface="Cambria" pitchFamily="34" charset="0"/>
-                <a:ea typeface="Cambria" pitchFamily="34" charset="-122"/>
-                <a:cs typeface="Cambria" pitchFamily="34" charset="-120"/>
-              </a:rPr>
-              <a:t>3</a:t>
-            </a:r>
-            <a:endParaRPr lang="en-US" sz="1600" dirty="0"/>
-          </a:p>
-        </p:txBody>
-      </p:sp>
-      <p:sp>
-        <p:nvSpPr>
-          <p:cNvPr id="14" name="Text 12"/>
-          <p:cNvSpPr txBox="1"/>
-          <p:nvPr/>
-        </p:nvSpPr>
-        <p:spPr>
-          <a:xfrm>
-            <a:off x="1234440" y="3941064"/>
-            <a:ext cx="2834640" cy="1005840"/>
-          </a:xfrm>
-          <a:prstGeom prst="rect">
-            <a:avLst/>
-          </a:prstGeom>
-          <a:noFill/>
-          <a:ln/>
-        </p:spPr>
-        <p:txBody>
-          <a:bodyPr wrap="square" rtlCol="0" anchor="ctr"/>
-          <a:lstStyle/>
-          <a:p>
-            <a:pPr indent="0" marL="0">
-              <a:buNone/>
-            </a:pPr>
-            <a:r>
-              <a:rPr lang="en-US" sz="1450" b="1" dirty="0">
-                <a:solidFill>
-                  <a:srgbClr val="1E1B4B"/>
-                </a:solidFill>
-                <a:latin typeface="Cambria" pitchFamily="34" charset="0"/>
-                <a:ea typeface="Cambria" pitchFamily="34" charset="-122"/>
-                <a:cs typeface="Cambria" pitchFamily="34" charset="-120"/>
-              </a:rPr>
-              <a:t>Capacity by load, not just count</a:t>
-            </a:r>
-            <a:endParaRPr lang="en-US" sz="1450" dirty="0"/>
-          </a:p>
-        </p:txBody>
-      </p:sp>
-      <p:sp>
-        <p:nvSpPr>
-          <p:cNvPr id="15" name="Text 13"/>
-          <p:cNvSpPr txBox="1"/>
-          <p:nvPr/>
-        </p:nvSpPr>
-        <p:spPr>
-          <a:xfrm>
-            <a:off x="4206240" y="3941064"/>
-            <a:ext cx="7406640" cy="1005840"/>
-          </a:xfrm>
-          <a:prstGeom prst="rect">
-            <a:avLst/>
-          </a:prstGeom>
-          <a:noFill/>
-          <a:ln/>
-        </p:spPr>
-        <p:txBody>
-          <a:bodyPr wrap="square" rtlCol="0" anchor="ctr"/>
-          <a:lstStyle/>
-          <a:p>
-            <a:pPr indent="0" marL="0">
               <a:lnSpc>
                 <a:spcPct val="120000"/>
               </a:lnSpc>
@@ -7395,13 +10448,13 @@
             <a:r>
               <a:rPr lang="en-US" sz="1250" dirty="0">
                 <a:solidFill>
-                  <a:srgbClr val="475569"/>
-                </a:solidFill>
-                <a:latin typeface="Calibri" pitchFamily="34" charset="0"/>
-                <a:ea typeface="Calibri" pitchFamily="34" charset="-122"/>
-                <a:cs typeface="Calibri" pitchFamily="34" charset="-120"/>
-              </a:rPr>
-              <a:t>Per-stop demand weights turn the same cap into a total-weight limit, for when a crate and a pallet aren't the same “one stop.”</a:t>
+                  <a:srgbClr val="C7D2FE"/>
+                </a:solidFill>
+                <a:latin typeface="Calibri" pitchFamily="34" charset="0"/>
+                <a:ea typeface="Calibri" pitchFamily="34" charset="-122"/>
+                <a:cs typeface="Calibri" pitchFamily="34" charset="-120"/>
+              </a:rPr>
+              <a:t>PRECEDENCE-ONLY (demand-blind) split</a:t>
             </a:r>
             <a:endParaRPr lang="en-US" sz="1250" dirty="0"/>
           </a:p>
@@ -7409,114 +10462,14 @@
       </p:sp>
       <p:sp>
         <p:nvSpPr>
-          <p:cNvPr id="16" name="Shape 14"/>
-          <p:cNvSpPr/>
-          <p:nvPr/>
-        </p:nvSpPr>
-        <p:spPr>
-          <a:xfrm>
-            <a:off x="548640" y="5111496"/>
-            <a:ext cx="457200" cy="457200"/>
-          </a:xfrm>
-          <a:prstGeom prst="ellipse">
-            <a:avLst/>
-          </a:prstGeom>
-          <a:solidFill>
-            <a:srgbClr val="7C3AED">
-              <a:alpha val="15000"/>
-            </a:srgbClr>
-          </a:solidFill>
-          <a:ln/>
-        </p:spPr>
-      </p:sp>
-      <p:sp>
-        <p:nvSpPr>
-          <p:cNvPr id="17" name="Text 15"/>
-          <p:cNvSpPr txBox="1"/>
-          <p:nvPr/>
-        </p:nvSpPr>
-        <p:spPr>
-          <a:xfrm>
-            <a:off x="548640" y="5111496"/>
-            <a:ext cx="457200" cy="457200"/>
-          </a:xfrm>
-          <a:prstGeom prst="rect">
-            <a:avLst/>
-          </a:prstGeom>
-          <a:noFill/>
-          <a:ln/>
-        </p:spPr>
-        <p:txBody>
-          <a:bodyPr wrap="square" rtlCol="0" anchor="ctr"/>
-          <a:lstStyle/>
-          <a:p>
-            <a:pPr algn="ctr" indent="0" marL="0">
-              <a:buNone/>
-            </a:pPr>
-            <a:r>
-              <a:rPr lang="en-US" sz="1600" b="1" dirty="0">
-                <a:solidFill>
-                  <a:srgbClr val="7C3AED"/>
-                </a:solidFill>
-                <a:latin typeface="Cambria" pitchFamily="34" charset="0"/>
-                <a:ea typeface="Cambria" pitchFamily="34" charset="-122"/>
-                <a:cs typeface="Cambria" pitchFamily="34" charset="-120"/>
-              </a:rPr>
-              <a:t>4</a:t>
-            </a:r>
-            <a:endParaRPr lang="en-US" sz="1600" dirty="0"/>
-          </a:p>
-        </p:txBody>
-      </p:sp>
-      <p:sp>
-        <p:nvSpPr>
-          <p:cNvPr id="18" name="Text 16"/>
-          <p:cNvSpPr txBox="1"/>
-          <p:nvPr/>
-        </p:nvSpPr>
-        <p:spPr>
-          <a:xfrm>
-            <a:off x="1234440" y="5020056"/>
-            <a:ext cx="2834640" cy="1005840"/>
-          </a:xfrm>
-          <a:prstGeom prst="rect">
-            <a:avLst/>
-          </a:prstGeom>
-          <a:noFill/>
-          <a:ln/>
-        </p:spPr>
-        <p:txBody>
-          <a:bodyPr wrap="square" rtlCol="0" anchor="ctr"/>
-          <a:lstStyle/>
-          <a:p>
-            <a:pPr indent="0" marL="0">
-              <a:buNone/>
-            </a:pPr>
-            <a:r>
-              <a:rPr lang="en-US" sz="1450" b="1" dirty="0">
-                <a:solidFill>
-                  <a:srgbClr val="1E1B4B"/>
-                </a:solidFill>
-                <a:latin typeface="Cambria" pitchFamily="34" charset="0"/>
-                <a:ea typeface="Cambria" pitchFamily="34" charset="-122"/>
-                <a:cs typeface="Cambria" pitchFamily="34" charset="-120"/>
-              </a:rPr>
-              <a:t>A bin-packing bug we caught ourselves</a:t>
-            </a:r>
-            <a:endParaRPr lang="en-US" sz="1450" dirty="0"/>
-          </a:p>
-        </p:txBody>
-      </p:sp>
-      <p:sp>
-        <p:nvSpPr>
-          <p:cNvPr id="19" name="Text 17"/>
-          <p:cNvSpPr txBox="1"/>
-          <p:nvPr/>
-        </p:nvSpPr>
-        <p:spPr>
-          <a:xfrm>
-            <a:off x="4206240" y="5020056"/>
-            <a:ext cx="7406640" cy="1005840"/>
+          <p:cNvPr id="13" name="Text 11"/>
+          <p:cNvSpPr txBox="1"/>
+          <p:nvPr/>
+        </p:nvSpPr>
+        <p:spPr>
+          <a:xfrm>
+            <a:off x="548640" y="4617720"/>
+            <a:ext cx="11064240" cy="1508760"/>
           </a:xfrm>
           <a:prstGeom prst="rect">
             <a:avLst/>
@@ -7530,28 +10483,28 @@
           <a:p>
             <a:pPr indent="0" marL="0">
               <a:lnSpc>
-                <a:spcPct val="120000"/>
+                <a:spcPct val="130000"/>
               </a:lnSpc>
               <a:buNone/>
             </a:pPr>
             <a:r>
-              <a:rPr lang="en-US" sz="1250" dirty="0">
-                <a:solidFill>
-                  <a:srgbClr val="475569"/>
-                </a:solidFill>
-                <a:latin typeface="Calibri" pitchFamily="34" charset="0"/>
-                <a:ea typeface="Calibri" pitchFamily="34" charset="-122"/>
-                <a:cs typeface="Calibri" pitchFamily="34" charset="-120"/>
-              </a:rPr>
-              <a:t>ceil(total demand / capacity) is only a lower bound with uneven weights — our own test suite caught the undercount; fixed with a retry loop that's now covered by regression tests.</a:t>
-            </a:r>
-            <a:endParaRPr lang="en-US" sz="1250" dirty="0"/>
-          </a:p>
-        </p:txBody>
-      </p:sp>
-      <p:sp>
-        <p:nvSpPr>
-          <p:cNvPr id="20" name="Text 18"/>
+              <a:rPr lang="en-US" sz="1400" dirty="0">
+                <a:solidFill>
+                  <a:srgbClr val="E0E7FF"/>
+                </a:solidFill>
+                <a:latin typeface="Calibri" pitchFamily="34" charset="0"/>
+                <a:ea typeface="Calibri" pitchFamily="34" charset="-122"/>
+                <a:cs typeface="Calibri" pitchFamily="34" charset="-120"/>
+              </a:rPr>
+              <a:t>Handling one constraint type correctly doesn't mean the fleet-dispatch DECISION stays valid once a second constraint type enters: the demand-blind PRECEDENCE-ONLY split additionally put the two stops on different vehicles entirely in 1/14 trials — the split itself became incompatible with the rule — and overloaded a vehicle in 13/13 of the rest. Composing constraint types into one solve_multi_vehicle call, not any single type alone, is what keeps the whole decision valid — and it's the finding neither prior-art paper in the patent-readiness report covers (see "Why this is patent-shaped").</a:t>
+            </a:r>
+            <a:endParaRPr lang="en-US" sz="1400" dirty="0"/>
+          </a:p>
+        </p:txBody>
+      </p:sp>
+      <p:sp>
+        <p:nvSpPr>
+          <p:cNvPr id="14" name="Text 12"/>
           <p:cNvSpPr txBox="1"/>
           <p:nvPr/>
         </p:nvSpPr>
@@ -7590,7 +10543,7 @@
       </p:sp>
       <p:sp>
         <p:nvSpPr>
-          <p:cNvPr id="21" name="Text 19"/>
+          <p:cNvPr id="15" name="Text 13"/>
           <p:cNvSpPr txBox="1"/>
           <p:nvPr/>
         </p:nvSpPr>
@@ -7692,7 +10645,7 @@
                 <a:ea typeface="Calibri" pitchFamily="34" charset="-122"/>
                 <a:cs typeface="Calibri" pitchFamily="34" charset="-120"/>
               </a:rPr>
-              <a:t>A PRODUCT, NOT JUST AN ALGORITHM</a:t>
+              <a:t>BENCHMARK — EXPERIMENT 4</a:t>
             </a:r>
             <a:endParaRPr lang="en-US" sz="1300" dirty="0"/>
           </a:p>
@@ -7731,7 +10684,7 @@
                 <a:ea typeface="Cambria" pitchFamily="34" charset="-122"/>
                 <a:cs typeface="Cambria" pitchFamily="34" charset="-120"/>
               </a:rPr>
-              <a:t>Everything a judge can click, today</a:t>
+              <a:t>Time and distance are a real trade-off, not one number twice</a:t>
             </a:r>
             <a:endParaRPr lang="en-US" sz="3200" dirty="0"/>
           </a:p>
@@ -7739,18 +10692,60 @@
       </p:sp>
       <p:sp>
         <p:nvSpPr>
-          <p:cNvPr id="4" name="Shape 2"/>
+          <p:cNvPr id="4" name="Text 2"/>
+          <p:cNvSpPr txBox="1"/>
+          <p:nvPr/>
+        </p:nvSpPr>
+        <p:spPr>
+          <a:xfrm>
+            <a:off x="548640" y="1737360"/>
+            <a:ext cx="11064240" cy="1051560"/>
+          </a:xfrm>
+          <a:prstGeom prst="rect">
+            <a:avLst/>
+          </a:prstGeom>
+          <a:noFill/>
+          <a:ln/>
+        </p:spPr>
+        <p:txBody>
+          <a:bodyPr wrap="square" rtlCol="0" anchor="ctr"/>
+          <a:lstStyle/>
+          <a:p>
+            <a:pPr indent="0" marL="0">
+              <a:lnSpc>
+                <a:spcPct val="130000"/>
+              </a:lnSpc>
+              <a:buNone/>
+            </a:pPr>
+            <a:r>
+              <a:rPr lang="en-US" sz="1500" dirty="0">
+                <a:solidFill>
+                  <a:srgbClr val="475569"/>
+                </a:solidFill>
+                <a:latin typeface="Calibri" pitchFamily="34" charset="0"/>
+                <a:ea typeface="Calibri" pitchFamily="34" charset="-122"/>
+                <a:cs typeface="Calibri" pitchFamily="34" charset="-120"/>
+              </a:rPr>
+              <a:t>For each waypoint set, the TRUE fastest tour and the TRUE shortest tour are found by exhaustive search, then each is scored against the OTHER objective to measure what optimizing for only one actually costs. combine_objectives() lets the same QUBO solver minimize a weighted sum of both — zero changes to the underlying formulation.</a:t>
+            </a:r>
+            <a:endParaRPr lang="en-US" sz="1500" dirty="0"/>
+          </a:p>
+        </p:txBody>
+      </p:sp>
+      <p:sp>
+        <p:nvSpPr>
+          <p:cNvPr id="5" name="Shape 3"/>
           <p:cNvSpPr/>
           <p:nvPr/>
         </p:nvSpPr>
         <p:spPr>
           <a:xfrm>
-            <a:off x="548640" y="1828800"/>
-            <a:ext cx="2724912" cy="1965960"/>
+            <a:off x="548640" y="3017520"/>
+            <a:ext cx="3566160" cy="2651760"/>
           </a:xfrm>
           <a:prstGeom prst="roundRect">
             <a:avLst>
-              <a:gd name="adj" fmla="val 4651"/>
+              <a:gd name="adj" fmla="val 4138"/>
             </a:avLst>
           </a:prstGeom>
           <a:solidFill>
@@ -7773,60 +10768,43 @@
       </p:sp>
       <p:sp>
         <p:nvSpPr>
-          <p:cNvPr id="5" name="Shape 3"/>
-          <p:cNvSpPr/>
-          <p:nvPr/>
-        </p:nvSpPr>
-        <p:spPr>
-          <a:xfrm>
-            <a:off x="749808" y="2029968"/>
-            <a:ext cx="384048" cy="384048"/>
-          </a:xfrm>
-          <a:prstGeom prst="ellipse">
-            <a:avLst/>
-          </a:prstGeom>
-          <a:solidFill>
-            <a:srgbClr val="7C3AED"/>
-          </a:solidFill>
-          <a:ln/>
-        </p:spPr>
-      </p:sp>
-      <p:sp>
-        <p:nvSpPr>
           <p:cNvPr id="6" name="Text 4"/>
           <p:cNvSpPr txBox="1"/>
           <p:nvPr/>
         </p:nvSpPr>
         <p:spPr>
           <a:xfrm>
-            <a:off x="731520" y="2542032"/>
-            <a:ext cx="2359152" cy="457200"/>
-          </a:xfrm>
-          <a:prstGeom prst="rect">
-            <a:avLst/>
-          </a:prstGeom>
-          <a:noFill/>
-          <a:ln/>
-        </p:spPr>
-        <p:txBody>
-          <a:bodyPr wrap="square" rtlCol="0" anchor="ctr"/>
-          <a:lstStyle/>
-          <a:p>
-            <a:pPr indent="0" marL="0">
-              <a:buNone/>
-            </a:pPr>
-            <a:r>
-              <a:rPr lang="en-US" sz="1350" b="1" dirty="0">
-                <a:solidFill>
-                  <a:srgbClr val="1E1B4B"/>
+            <a:off x="548640" y="3246120"/>
+            <a:ext cx="3566160" cy="1234440"/>
+          </a:xfrm>
+          <a:prstGeom prst="rect">
+            <a:avLst/>
+          </a:prstGeom>
+          <a:noFill/>
+          <a:ln/>
+        </p:spPr>
+        <p:txBody>
+          <a:bodyPr wrap="square" rtlCol="0" anchor="ctr"/>
+          <a:lstStyle/>
+          <a:p>
+            <a:pPr algn="ctr" indent="0" marL="0">
+              <a:lnSpc>
+                <a:spcPct val="105000"/>
+              </a:lnSpc>
+              <a:buNone/>
+            </a:pPr>
+            <a:r>
+              <a:rPr lang="en-US" sz="2600" b="1" dirty="0">
+                <a:solidFill>
+                  <a:srgbClr val="7C3AED"/>
                 </a:solidFill>
                 <a:latin typeface="Cambria" pitchFamily="34" charset="0"/>
                 <a:ea typeface="Cambria" pitchFamily="34" charset="-122"/>
                 <a:cs typeface="Cambria" pitchFamily="34" charset="-120"/>
               </a:rPr>
-              <a:t>Bulk import</a:t>
-            </a:r>
-            <a:endParaRPr lang="en-US" sz="1350" dirty="0"/>
+              <a:t>7/12</a:t>
+            </a:r>
+            <a:endParaRPr lang="en-US" sz="2600" dirty="0"/>
           </a:p>
         </p:txBody>
       </p:sp>
@@ -7838,27 +10816,27 @@
         </p:nvSpPr>
         <p:spPr>
           <a:xfrm>
-            <a:off x="731520" y="2971800"/>
-            <a:ext cx="2359152" cy="777240"/>
-          </a:xfrm>
-          <a:prstGeom prst="rect">
-            <a:avLst/>
-          </a:prstGeom>
-          <a:noFill/>
-          <a:ln/>
-        </p:spPr>
-        <p:txBody>
-          <a:bodyPr wrap="square" rtlCol="0" anchor="ctr"/>
-          <a:lstStyle/>
-          <a:p>
-            <a:pPr indent="0" marL="0">
+            <a:off x="731520" y="4526280"/>
+            <a:ext cx="3200400" cy="1005840"/>
+          </a:xfrm>
+          <a:prstGeom prst="rect">
+            <a:avLst/>
+          </a:prstGeom>
+          <a:noFill/>
+          <a:ln/>
+        </p:spPr>
+        <p:txBody>
+          <a:bodyPr wrap="square" rtlCol="0" anchor="ctr"/>
+          <a:lstStyle/>
+          <a:p>
+            <a:pPr algn="ctr" indent="0" marL="0">
               <a:lnSpc>
                 <a:spcPct val="120000"/>
               </a:lnSpc>
               <a:buNone/>
             </a:pPr>
             <a:r>
-              <a:rPr lang="en-US" sz="1050" dirty="0">
+              <a:rPr lang="en-US" sz="1250" dirty="0">
                 <a:solidFill>
                   <a:srgbClr val="475569"/>
                 </a:solidFill>
@@ -7866,9 +10844,29 @@
                 <a:ea typeface="Calibri" pitchFamily="34" charset="-122"/>
                 <a:cs typeface="Calibri" pitchFamily="34" charset="-120"/>
               </a:rPr>
-              <a:t>Paste or upload a CSV of stops — geocoded automatically.</a:t>
-            </a:r>
-            <a:endParaRPr lang="en-US" sz="1050" dirty="0"/>
+              <a:t>trials where optimizing for only</a:t>
+            </a:r>
+            <a:endParaRPr lang="en-US" sz="1250" dirty="0"/>
+          </a:p>
+          <a:p>
+            <a:pPr algn="ctr" indent="0" marL="0">
+              <a:lnSpc>
+                <a:spcPct val="120000"/>
+              </a:lnSpc>
+              <a:buNone/>
+            </a:pPr>
+            <a:r>
+              <a:rPr lang="en-US" sz="1250" dirty="0">
+                <a:solidFill>
+                  <a:srgbClr val="475569"/>
+                </a:solidFill>
+                <a:latin typeface="Calibri" pitchFamily="34" charset="0"/>
+                <a:ea typeface="Calibri" pitchFamily="34" charset="-122"/>
+                <a:cs typeface="Calibri" pitchFamily="34" charset="-120"/>
+              </a:rPr>
+              <a:t>one objective provably costs the other</a:t>
+            </a:r>
+            <a:endParaRPr lang="en-US" sz="1250" dirty="0"/>
           </a:p>
         </p:txBody>
       </p:sp>
@@ -7880,12 +10878,12 @@
         </p:nvSpPr>
         <p:spPr>
           <a:xfrm>
-            <a:off x="3328416" y="1828800"/>
-            <a:ext cx="2724912" cy="1965960"/>
+            <a:off x="4343400" y="3017520"/>
+            <a:ext cx="3566160" cy="2651760"/>
           </a:xfrm>
           <a:prstGeom prst="roundRect">
             <a:avLst>
-              <a:gd name="adj" fmla="val 4651"/>
+              <a:gd name="adj" fmla="val 4138"/>
             </a:avLst>
           </a:prstGeom>
           <a:solidFill>
@@ -7908,92 +10906,95 @@
       </p:sp>
       <p:sp>
         <p:nvSpPr>
-          <p:cNvPr id="9" name="Shape 7"/>
-          <p:cNvSpPr/>
-          <p:nvPr/>
-        </p:nvSpPr>
-        <p:spPr>
-          <a:xfrm>
-            <a:off x="3529584" y="2029968"/>
-            <a:ext cx="384048" cy="384048"/>
-          </a:xfrm>
-          <a:prstGeom prst="ellipse">
-            <a:avLst/>
-          </a:prstGeom>
-          <a:solidFill>
-            <a:srgbClr val="22D3EE"/>
-          </a:solidFill>
-          <a:ln/>
-        </p:spPr>
-      </p:sp>
-      <p:sp>
-        <p:nvSpPr>
-          <p:cNvPr id="10" name="Text 8"/>
-          <p:cNvSpPr txBox="1"/>
-          <p:nvPr/>
-        </p:nvSpPr>
-        <p:spPr>
-          <a:xfrm>
-            <a:off x="3511296" y="2542032"/>
-            <a:ext cx="2359152" cy="457200"/>
-          </a:xfrm>
-          <a:prstGeom prst="rect">
-            <a:avLst/>
-          </a:prstGeom>
-          <a:noFill/>
-          <a:ln/>
-        </p:spPr>
-        <p:txBody>
-          <a:bodyPr wrap="square" rtlCol="0" anchor="ctr"/>
-          <a:lstStyle/>
-          <a:p>
-            <a:pPr indent="0" marL="0">
-              <a:buNone/>
-            </a:pPr>
-            <a:r>
-              <a:rPr lang="en-US" sz="1350" b="1" dirty="0">
-                <a:solidFill>
-                  <a:srgbClr val="1E1B4B"/>
+          <p:cNvPr id="9" name="Text 7"/>
+          <p:cNvSpPr txBox="1"/>
+          <p:nvPr/>
+        </p:nvSpPr>
+        <p:spPr>
+          <a:xfrm>
+            <a:off x="4343400" y="3246120"/>
+            <a:ext cx="3566160" cy="1234440"/>
+          </a:xfrm>
+          <a:prstGeom prst="rect">
+            <a:avLst/>
+          </a:prstGeom>
+          <a:noFill/>
+          <a:ln/>
+        </p:spPr>
+        <p:txBody>
+          <a:bodyPr wrap="square" rtlCol="0" anchor="ctr"/>
+          <a:lstStyle/>
+          <a:p>
+            <a:pPr algn="ctr" indent="0" marL="0">
+              <a:lnSpc>
+                <a:spcPct val="105000"/>
+              </a:lnSpc>
+              <a:buNone/>
+            </a:pPr>
+            <a:r>
+              <a:rPr lang="en-US" sz="2600" b="1" dirty="0">
+                <a:solidFill>
+                  <a:srgbClr val="F97316"/>
                 </a:solidFill>
                 <a:latin typeface="Cambria" pitchFamily="34" charset="0"/>
                 <a:ea typeface="Cambria" pitchFamily="34" charset="-122"/>
                 <a:cs typeface="Cambria" pitchFamily="34" charset="-120"/>
               </a:rPr>
-              <a:t>Shareable link</a:t>
-            </a:r>
-            <a:endParaRPr lang="en-US" sz="1350" dirty="0"/>
-          </a:p>
-        </p:txBody>
-      </p:sp>
-      <p:sp>
-        <p:nvSpPr>
-          <p:cNvPr id="11" name="Text 9"/>
-          <p:cNvSpPr txBox="1"/>
-          <p:nvPr/>
-        </p:nvSpPr>
-        <p:spPr>
-          <a:xfrm>
-            <a:off x="3511296" y="2971800"/>
-            <a:ext cx="2359152" cy="777240"/>
-          </a:xfrm>
-          <a:prstGeom prst="rect">
-            <a:avLst/>
-          </a:prstGeom>
-          <a:noFill/>
-          <a:ln/>
-        </p:spPr>
-        <p:txBody>
-          <a:bodyPr wrap="square" rtlCol="0" anchor="ctr"/>
-          <a:lstStyle/>
-          <a:p>
-            <a:pPr indent="0" marL="0">
+              <a:t>+1.0% avg</a:t>
+            </a:r>
+            <a:endParaRPr lang="en-US" sz="2600" dirty="0"/>
+          </a:p>
+          <a:p>
+            <a:pPr algn="ctr" indent="0" marL="0">
+              <a:lnSpc>
+                <a:spcPct val="105000"/>
+              </a:lnSpc>
+              <a:buNone/>
+            </a:pPr>
+            <a:r>
+              <a:rPr lang="en-US" sz="2600" b="1" dirty="0">
+                <a:solidFill>
+                  <a:srgbClr val="F97316"/>
+                </a:solidFill>
+                <a:latin typeface="Cambria" pitchFamily="34" charset="0"/>
+                <a:ea typeface="Cambria" pitchFamily="34" charset="-122"/>
+                <a:cs typeface="Cambria" pitchFamily="34" charset="-120"/>
+              </a:rPr>
+              <a:t>+1.9% worst</a:t>
+            </a:r>
+            <a:endParaRPr lang="en-US" sz="2600" dirty="0"/>
+          </a:p>
+        </p:txBody>
+      </p:sp>
+      <p:sp>
+        <p:nvSpPr>
+          <p:cNvPr id="10" name="Text 8"/>
+          <p:cNvSpPr txBox="1"/>
+          <p:nvPr/>
+        </p:nvSpPr>
+        <p:spPr>
+          <a:xfrm>
+            <a:off x="4526280" y="4526280"/>
+            <a:ext cx="3200400" cy="1005840"/>
+          </a:xfrm>
+          <a:prstGeom prst="rect">
+            <a:avLst/>
+          </a:prstGeom>
+          <a:noFill/>
+          <a:ln/>
+        </p:spPr>
+        <p:txBody>
+          <a:bodyPr wrap="square" rtlCol="0" anchor="ctr"/>
+          <a:lstStyle/>
+          <a:p>
+            <a:pPr algn="ctr" indent="0" marL="0">
               <a:lnSpc>
                 <a:spcPct val="120000"/>
               </a:lnSpc>
               <a:buNone/>
             </a:pPr>
             <a:r>
-              <a:rPr lang="en-US" sz="1050" dirty="0">
+              <a:rPr lang="en-US" sz="1250" dirty="0">
                 <a:solidFill>
                   <a:srgbClr val="475569"/>
                 </a:solidFill>
@@ -8001,26 +11002,46 @@
                 <a:ea typeface="Calibri" pitchFamily="34" charset="-122"/>
                 <a:cs typeface="Calibri" pitchFamily="34" charset="-120"/>
               </a:rPr>
-              <a:t>One URL encodes the whole route — city, stops, method, rules.</a:t>
-            </a:r>
-            <a:endParaRPr lang="en-US" sz="1050" dirty="0"/>
-          </a:p>
-        </p:txBody>
-      </p:sp>
-      <p:sp>
-        <p:nvSpPr>
-          <p:cNvPr id="12" name="Shape 10"/>
+              <a:t>extra DISTANCE from</a:t>
+            </a:r>
+            <a:endParaRPr lang="en-US" sz="1250" dirty="0"/>
+          </a:p>
+          <a:p>
+            <a:pPr algn="ctr" indent="0" marL="0">
+              <a:lnSpc>
+                <a:spcPct val="120000"/>
+              </a:lnSpc>
+              <a:buNone/>
+            </a:pPr>
+            <a:r>
+              <a:rPr lang="en-US" sz="1250" dirty="0">
+                <a:solidFill>
+                  <a:srgbClr val="475569"/>
+                </a:solidFill>
+                <a:latin typeface="Calibri" pitchFamily="34" charset="0"/>
+                <a:ea typeface="Calibri" pitchFamily="34" charset="-122"/>
+                <a:cs typeface="Calibri" pitchFamily="34" charset="-120"/>
+              </a:rPr>
+              <a:t>optimizing time only, when they differ</a:t>
+            </a:r>
+            <a:endParaRPr lang="en-US" sz="1250" dirty="0"/>
+          </a:p>
+        </p:txBody>
+      </p:sp>
+      <p:sp>
+        <p:nvSpPr>
+          <p:cNvPr id="11" name="Shape 9"/>
           <p:cNvSpPr/>
           <p:nvPr/>
         </p:nvSpPr>
         <p:spPr>
           <a:xfrm>
-            <a:off x="6108192" y="1828800"/>
-            <a:ext cx="2724912" cy="1965960"/>
+            <a:off x="8138160" y="3017520"/>
+            <a:ext cx="3566160" cy="2651760"/>
           </a:xfrm>
           <a:prstGeom prst="roundRect">
             <a:avLst>
-              <a:gd name="adj" fmla="val 4651"/>
+              <a:gd name="adj" fmla="val 4138"/>
             </a:avLst>
           </a:prstGeom>
           <a:solidFill>
@@ -8043,92 +11064,95 @@
       </p:sp>
       <p:sp>
         <p:nvSpPr>
-          <p:cNvPr id="13" name="Shape 11"/>
-          <p:cNvSpPr/>
-          <p:nvPr/>
-        </p:nvSpPr>
-        <p:spPr>
-          <a:xfrm>
-            <a:off x="6309360" y="2029968"/>
-            <a:ext cx="384048" cy="384048"/>
-          </a:xfrm>
-          <a:prstGeom prst="ellipse">
-            <a:avLst/>
-          </a:prstGeom>
-          <a:solidFill>
-            <a:srgbClr val="7C3AED"/>
-          </a:solidFill>
-          <a:ln/>
-        </p:spPr>
-      </p:sp>
-      <p:sp>
-        <p:nvSpPr>
-          <p:cNvPr id="14" name="Text 12"/>
-          <p:cNvSpPr txBox="1"/>
-          <p:nvPr/>
-        </p:nvSpPr>
-        <p:spPr>
-          <a:xfrm>
-            <a:off x="6291072" y="2542032"/>
-            <a:ext cx="2359152" cy="457200"/>
-          </a:xfrm>
-          <a:prstGeom prst="rect">
-            <a:avLst/>
-          </a:prstGeom>
-          <a:noFill/>
-          <a:ln/>
-        </p:spPr>
-        <p:txBody>
-          <a:bodyPr wrap="square" rtlCol="0" anchor="ctr"/>
-          <a:lstStyle/>
-          <a:p>
-            <a:pPr indent="0" marL="0">
-              <a:buNone/>
-            </a:pPr>
-            <a:r>
-              <a:rPr lang="en-US" sz="1350" b="1" dirty="0">
-                <a:solidFill>
-                  <a:srgbClr val="1E1B4B"/>
+          <p:cNvPr id="12" name="Text 10"/>
+          <p:cNvSpPr txBox="1"/>
+          <p:nvPr/>
+        </p:nvSpPr>
+        <p:spPr>
+          <a:xfrm>
+            <a:off x="8138160" y="3246120"/>
+            <a:ext cx="3566160" cy="1234440"/>
+          </a:xfrm>
+          <a:prstGeom prst="rect">
+            <a:avLst/>
+          </a:prstGeom>
+          <a:noFill/>
+          <a:ln/>
+        </p:spPr>
+        <p:txBody>
+          <a:bodyPr wrap="square" rtlCol="0" anchor="ctr"/>
+          <a:lstStyle/>
+          <a:p>
+            <a:pPr algn="ctr" indent="0" marL="0">
+              <a:lnSpc>
+                <a:spcPct val="105000"/>
+              </a:lnSpc>
+              <a:buNone/>
+            </a:pPr>
+            <a:r>
+              <a:rPr lang="en-US" sz="2600" b="1" dirty="0">
+                <a:solidFill>
+                  <a:srgbClr val="F97316"/>
                 </a:solidFill>
                 <a:latin typeface="Cambria" pitchFamily="34" charset="0"/>
                 <a:ea typeface="Cambria" pitchFamily="34" charset="-122"/>
                 <a:cs typeface="Cambria" pitchFamily="34" charset="-120"/>
               </a:rPr>
-              <a:t>GPX + PDF export</a:t>
-            </a:r>
-            <a:endParaRPr lang="en-US" sz="1350" dirty="0"/>
-          </a:p>
-        </p:txBody>
-      </p:sp>
-      <p:sp>
-        <p:nvSpPr>
-          <p:cNvPr id="15" name="Text 13"/>
-          <p:cNvSpPr txBox="1"/>
-          <p:nvPr/>
-        </p:nvSpPr>
-        <p:spPr>
-          <a:xfrm>
-            <a:off x="6291072" y="2971800"/>
-            <a:ext cx="2359152" cy="777240"/>
-          </a:xfrm>
-          <a:prstGeom prst="rect">
-            <a:avLst/>
-          </a:prstGeom>
-          <a:noFill/>
-          <a:ln/>
-        </p:spPr>
-        <p:txBody>
-          <a:bodyPr wrap="square" rtlCol="0" anchor="ctr"/>
-          <a:lstStyle/>
-          <a:p>
-            <a:pPr indent="0" marL="0">
+              <a:t>+0.8% avg</a:t>
+            </a:r>
+            <a:endParaRPr lang="en-US" sz="2600" dirty="0"/>
+          </a:p>
+          <a:p>
+            <a:pPr algn="ctr" indent="0" marL="0">
+              <a:lnSpc>
+                <a:spcPct val="105000"/>
+              </a:lnSpc>
+              <a:buNone/>
+            </a:pPr>
+            <a:r>
+              <a:rPr lang="en-US" sz="2600" b="1" dirty="0">
+                <a:solidFill>
+                  <a:srgbClr val="F97316"/>
+                </a:solidFill>
+                <a:latin typeface="Cambria" pitchFamily="34" charset="0"/>
+                <a:ea typeface="Cambria" pitchFamily="34" charset="-122"/>
+                <a:cs typeface="Cambria" pitchFamily="34" charset="-120"/>
+              </a:rPr>
+              <a:t>+2.4% worst</a:t>
+            </a:r>
+            <a:endParaRPr lang="en-US" sz="2600" dirty="0"/>
+          </a:p>
+        </p:txBody>
+      </p:sp>
+      <p:sp>
+        <p:nvSpPr>
+          <p:cNvPr id="13" name="Text 11"/>
+          <p:cNvSpPr txBox="1"/>
+          <p:nvPr/>
+        </p:nvSpPr>
+        <p:spPr>
+          <a:xfrm>
+            <a:off x="8321040" y="4526280"/>
+            <a:ext cx="3200400" cy="1005840"/>
+          </a:xfrm>
+          <a:prstGeom prst="rect">
+            <a:avLst/>
+          </a:prstGeom>
+          <a:noFill/>
+          <a:ln/>
+        </p:spPr>
+        <p:txBody>
+          <a:bodyPr wrap="square" rtlCol="0" anchor="ctr"/>
+          <a:lstStyle/>
+          <a:p>
+            <a:pPr algn="ctr" indent="0" marL="0">
               <a:lnSpc>
                 <a:spcPct val="120000"/>
               </a:lnSpc>
               <a:buNone/>
             </a:pPr>
             <a:r>
-              <a:rPr lang="en-US" sz="1050" dirty="0">
+              <a:rPr lang="en-US" sz="1250" dirty="0">
                 <a:solidFill>
                   <a:srgbClr val="475569"/>
                 </a:solidFill>
@@ -8136,134 +11160,19 @@
                 <a:ea typeface="Calibri" pitchFamily="34" charset="-122"/>
                 <a:cs typeface="Calibri" pitchFamily="34" charset="-120"/>
               </a:rPr>
-              <a:t>Take the solved route into any GPS device, or print it.</a:t>
-            </a:r>
-            <a:endParaRPr lang="en-US" sz="1050" dirty="0"/>
-          </a:p>
-        </p:txBody>
-      </p:sp>
-      <p:sp>
-        <p:nvSpPr>
-          <p:cNvPr id="16" name="Shape 14"/>
-          <p:cNvSpPr/>
-          <p:nvPr/>
-        </p:nvSpPr>
-        <p:spPr>
-          <a:xfrm>
-            <a:off x="8887968" y="1828800"/>
-            <a:ext cx="2724912" cy="1965960"/>
-          </a:xfrm>
-          <a:prstGeom prst="roundRect">
-            <a:avLst>
-              <a:gd name="adj" fmla="val 4651"/>
-            </a:avLst>
-          </a:prstGeom>
-          <a:solidFill>
-            <a:srgbClr val="FFFFFF"/>
-          </a:solidFill>
-          <a:ln w="12700">
-            <a:solidFill>
-              <a:srgbClr val="E2E8F0"/>
-            </a:solidFill>
-            <a:prstDash val="solid"/>
-          </a:ln>
-          <a:effectLst>
-            <a:outerShdw sx="100000" sy="100000" kx="0" ky="0" algn="bl" rotWithShape="0" blurRad="76200" dist="38100" dir="5400000">
-              <a:srgbClr val="0F172A">
-                <a:alpha val="25000"/>
-              </a:srgbClr>
-            </a:outerShdw>
-          </a:effectLst>
-        </p:spPr>
-      </p:sp>
-      <p:sp>
-        <p:nvSpPr>
-          <p:cNvPr id="17" name="Shape 15"/>
-          <p:cNvSpPr/>
-          <p:nvPr/>
-        </p:nvSpPr>
-        <p:spPr>
-          <a:xfrm>
-            <a:off x="9089136" y="2029968"/>
-            <a:ext cx="384048" cy="384048"/>
-          </a:xfrm>
-          <a:prstGeom prst="ellipse">
-            <a:avLst/>
-          </a:prstGeom>
-          <a:solidFill>
-            <a:srgbClr val="22D3EE"/>
-          </a:solidFill>
-          <a:ln/>
-        </p:spPr>
-      </p:sp>
-      <p:sp>
-        <p:nvSpPr>
-          <p:cNvPr id="18" name="Text 16"/>
-          <p:cNvSpPr txBox="1"/>
-          <p:nvPr/>
-        </p:nvSpPr>
-        <p:spPr>
-          <a:xfrm>
-            <a:off x="9070848" y="2542032"/>
-            <a:ext cx="2359152" cy="457200"/>
-          </a:xfrm>
-          <a:prstGeom prst="rect">
-            <a:avLst/>
-          </a:prstGeom>
-          <a:noFill/>
-          <a:ln/>
-        </p:spPr>
-        <p:txBody>
-          <a:bodyPr wrap="square" rtlCol="0" anchor="ctr"/>
-          <a:lstStyle/>
-          <a:p>
-            <a:pPr indent="0" marL="0">
-              <a:buNone/>
-            </a:pPr>
-            <a:r>
-              <a:rPr lang="en-US" sz="1350" b="1" dirty="0">
-                <a:solidFill>
-                  <a:srgbClr val="1E1B4B"/>
-                </a:solidFill>
-                <a:latin typeface="Cambria" pitchFamily="34" charset="0"/>
-                <a:ea typeface="Cambria" pitchFamily="34" charset="-122"/>
-                <a:cs typeface="Cambria" pitchFamily="34" charset="-120"/>
-              </a:rPr>
-              <a:t>Dark / light theme</a:t>
-            </a:r>
-            <a:endParaRPr lang="en-US" sz="1350" dirty="0"/>
-          </a:p>
-        </p:txBody>
-      </p:sp>
-      <p:sp>
-        <p:nvSpPr>
-          <p:cNvPr id="19" name="Text 17"/>
-          <p:cNvSpPr txBox="1"/>
-          <p:nvPr/>
-        </p:nvSpPr>
-        <p:spPr>
-          <a:xfrm>
-            <a:off x="9070848" y="2971800"/>
-            <a:ext cx="2359152" cy="777240"/>
-          </a:xfrm>
-          <a:prstGeom prst="rect">
-            <a:avLst/>
-          </a:prstGeom>
-          <a:noFill/>
-          <a:ln/>
-        </p:spPr>
-        <p:txBody>
-          <a:bodyPr wrap="square" rtlCol="0" anchor="ctr"/>
-          <a:lstStyle/>
-          <a:p>
-            <a:pPr indent="0" marL="0">
+              <a:t>extra TIME from</a:t>
+            </a:r>
+            <a:endParaRPr lang="en-US" sz="1250" dirty="0"/>
+          </a:p>
+          <a:p>
+            <a:pPr algn="ctr" indent="0" marL="0">
               <a:lnSpc>
                 <a:spcPct val="120000"/>
               </a:lnSpc>
               <a:buNone/>
             </a:pPr>
             <a:r>
-              <a:rPr lang="en-US" sz="1050" dirty="0">
+              <a:rPr lang="en-US" sz="1250" dirty="0">
                 <a:solidFill>
                   <a:srgbClr val="475569"/>
                 </a:solidFill>
@@ -8271,555 +11180,15 @@
                 <a:ea typeface="Calibri" pitchFamily="34" charset="-122"/>
                 <a:cs typeface="Calibri" pitchFamily="34" charset="-120"/>
               </a:rPr>
-              <a:t>A real design system, not default browser styling.</a:t>
-            </a:r>
-            <a:endParaRPr lang="en-US" sz="1050" dirty="0"/>
-          </a:p>
-        </p:txBody>
-      </p:sp>
-      <p:sp>
-        <p:nvSpPr>
-          <p:cNvPr id="20" name="Shape 18"/>
-          <p:cNvSpPr/>
-          <p:nvPr/>
-        </p:nvSpPr>
-        <p:spPr>
-          <a:xfrm>
-            <a:off x="548640" y="3931920"/>
-            <a:ext cx="2724912" cy="1965960"/>
-          </a:xfrm>
-          <a:prstGeom prst="roundRect">
-            <a:avLst>
-              <a:gd name="adj" fmla="val 4651"/>
-            </a:avLst>
-          </a:prstGeom>
-          <a:solidFill>
-            <a:srgbClr val="FFFFFF"/>
-          </a:solidFill>
-          <a:ln w="12700">
-            <a:solidFill>
-              <a:srgbClr val="E2E8F0"/>
-            </a:solidFill>
-            <a:prstDash val="solid"/>
-          </a:ln>
-          <a:effectLst>
-            <a:outerShdw sx="100000" sy="100000" kx="0" ky="0" algn="bl" rotWithShape="0" blurRad="76200" dist="38100" dir="5400000">
-              <a:srgbClr val="0F172A">
-                <a:alpha val="25000"/>
-              </a:srgbClr>
-            </a:outerShdw>
-          </a:effectLst>
-        </p:spPr>
-      </p:sp>
-      <p:sp>
-        <p:nvSpPr>
-          <p:cNvPr id="21" name="Shape 19"/>
-          <p:cNvSpPr/>
-          <p:nvPr/>
-        </p:nvSpPr>
-        <p:spPr>
-          <a:xfrm>
-            <a:off x="749808" y="4133088"/>
-            <a:ext cx="384048" cy="384048"/>
-          </a:xfrm>
-          <a:prstGeom prst="ellipse">
-            <a:avLst/>
-          </a:prstGeom>
-          <a:solidFill>
-            <a:srgbClr val="7C3AED"/>
-          </a:solidFill>
-          <a:ln/>
-        </p:spPr>
-      </p:sp>
-      <p:sp>
-        <p:nvSpPr>
-          <p:cNvPr id="22" name="Text 20"/>
-          <p:cNvSpPr txBox="1"/>
-          <p:nvPr/>
-        </p:nvSpPr>
-        <p:spPr>
-          <a:xfrm>
-            <a:off x="731520" y="4645152"/>
-            <a:ext cx="2359152" cy="457200"/>
-          </a:xfrm>
-          <a:prstGeom prst="rect">
-            <a:avLst/>
-          </a:prstGeom>
-          <a:noFill/>
-          <a:ln/>
-        </p:spPr>
-        <p:txBody>
-          <a:bodyPr wrap="square" rtlCol="0" anchor="ctr"/>
-          <a:lstStyle/>
-          <a:p>
-            <a:pPr indent="0" marL="0">
-              <a:buNone/>
-            </a:pPr>
-            <a:r>
-              <a:rPr lang="en-US" sz="1350" b="1" dirty="0">
-                <a:solidFill>
-                  <a:srgbClr val="1E1B4B"/>
-                </a:solidFill>
-                <a:latin typeface="Cambria" pitchFamily="34" charset="0"/>
-                <a:ea typeface="Cambria" pitchFamily="34" charset="-122"/>
-                <a:cs typeface="Cambria" pitchFamily="34" charset="-120"/>
-              </a:rPr>
-              <a:t>Precedence rules</a:t>
-            </a:r>
-            <a:endParaRPr lang="en-US" sz="1350" dirty="0"/>
-          </a:p>
-        </p:txBody>
-      </p:sp>
-      <p:sp>
-        <p:nvSpPr>
-          <p:cNvPr id="23" name="Text 21"/>
-          <p:cNvSpPr txBox="1"/>
-          <p:nvPr/>
-        </p:nvSpPr>
-        <p:spPr>
-          <a:xfrm>
-            <a:off x="731520" y="5074920"/>
-            <a:ext cx="2359152" cy="777240"/>
-          </a:xfrm>
-          <a:prstGeom prst="rect">
-            <a:avLst/>
-          </a:prstGeom>
-          <a:noFill/>
-          <a:ln/>
-        </p:spPr>
-        <p:txBody>
-          <a:bodyPr wrap="square" rtlCol="0" anchor="ctr"/>
-          <a:lstStyle/>
-          <a:p>
-            <a:pPr indent="0" marL="0">
-              <a:lnSpc>
-                <a:spcPct val="120000"/>
-              </a:lnSpc>
-              <a:buNone/>
-            </a:pPr>
-            <a:r>
-              <a:rPr lang="en-US" sz="1050" dirty="0">
-                <a:solidFill>
-                  <a:srgbClr val="475569"/>
-                </a:solidFill>
-                <a:latin typeface="Calibri" pitchFamily="34" charset="0"/>
-                <a:ea typeface="Calibri" pitchFamily="34" charset="-122"/>
-                <a:cs typeface="Calibri" pitchFamily="34" charset="-120"/>
-              </a:rPr>
-              <a:t>“Visit A before B” — baked into the same QUBO, not bolted on.</a:t>
-            </a:r>
-            <a:endParaRPr lang="en-US" sz="1050" dirty="0"/>
-          </a:p>
-        </p:txBody>
-      </p:sp>
-      <p:sp>
-        <p:nvSpPr>
-          <p:cNvPr id="24" name="Shape 22"/>
-          <p:cNvSpPr/>
-          <p:nvPr/>
-        </p:nvSpPr>
-        <p:spPr>
-          <a:xfrm>
-            <a:off x="3328416" y="3931920"/>
-            <a:ext cx="2724912" cy="1965960"/>
-          </a:xfrm>
-          <a:prstGeom prst="roundRect">
-            <a:avLst>
-              <a:gd name="adj" fmla="val 4651"/>
-            </a:avLst>
-          </a:prstGeom>
-          <a:solidFill>
-            <a:srgbClr val="FFFFFF"/>
-          </a:solidFill>
-          <a:ln w="12700">
-            <a:solidFill>
-              <a:srgbClr val="E2E8F0"/>
-            </a:solidFill>
-            <a:prstDash val="solid"/>
-          </a:ln>
-          <a:effectLst>
-            <a:outerShdw sx="100000" sy="100000" kx="0" ky="0" algn="bl" rotWithShape="0" blurRad="76200" dist="38100" dir="5400000">
-              <a:srgbClr val="0F172A">
-                <a:alpha val="25000"/>
-              </a:srgbClr>
-            </a:outerShdw>
-          </a:effectLst>
-        </p:spPr>
-      </p:sp>
-      <p:sp>
-        <p:nvSpPr>
-          <p:cNvPr id="25" name="Shape 23"/>
-          <p:cNvSpPr/>
-          <p:nvPr/>
-        </p:nvSpPr>
-        <p:spPr>
-          <a:xfrm>
-            <a:off x="3529584" y="4133088"/>
-            <a:ext cx="384048" cy="384048"/>
-          </a:xfrm>
-          <a:prstGeom prst="ellipse">
-            <a:avLst/>
-          </a:prstGeom>
-          <a:solidFill>
-            <a:srgbClr val="22D3EE"/>
-          </a:solidFill>
-          <a:ln/>
-        </p:spPr>
-      </p:sp>
-      <p:sp>
-        <p:nvSpPr>
-          <p:cNvPr id="26" name="Text 24"/>
-          <p:cNvSpPr txBox="1"/>
-          <p:nvPr/>
-        </p:nvSpPr>
-        <p:spPr>
-          <a:xfrm>
-            <a:off x="3511296" y="4645152"/>
-            <a:ext cx="2359152" cy="457200"/>
-          </a:xfrm>
-          <a:prstGeom prst="rect">
-            <a:avLst/>
-          </a:prstGeom>
-          <a:noFill/>
-          <a:ln/>
-        </p:spPr>
-        <p:txBody>
-          <a:bodyPr wrap="square" rtlCol="0" anchor="ctr"/>
-          <a:lstStyle/>
-          <a:p>
-            <a:pPr indent="0" marL="0">
-              <a:buNone/>
-            </a:pPr>
-            <a:r>
-              <a:rPr lang="en-US" sz="1350" b="1" dirty="0">
-                <a:solidFill>
-                  <a:srgbClr val="1E1B4B"/>
-                </a:solidFill>
-                <a:latin typeface="Cambria" pitchFamily="34" charset="0"/>
-                <a:ea typeface="Cambria" pitchFamily="34" charset="-122"/>
-                <a:cs typeface="Cambria" pitchFamily="34" charset="-120"/>
-              </a:rPr>
-              <a:t>Live analytics</a:t>
-            </a:r>
-            <a:endParaRPr lang="en-US" sz="1350" dirty="0"/>
-          </a:p>
-        </p:txBody>
-      </p:sp>
-      <p:sp>
-        <p:nvSpPr>
-          <p:cNvPr id="27" name="Text 25"/>
-          <p:cNvSpPr txBox="1"/>
-          <p:nvPr/>
-        </p:nvSpPr>
-        <p:spPr>
-          <a:xfrm>
-            <a:off x="3511296" y="5074920"/>
-            <a:ext cx="2359152" cy="777240"/>
-          </a:xfrm>
-          <a:prstGeom prst="rect">
-            <a:avLst/>
-          </a:prstGeom>
-          <a:noFill/>
-          <a:ln/>
-        </p:spPr>
-        <p:txBody>
-          <a:bodyPr wrap="square" rtlCol="0" anchor="ctr"/>
-          <a:lstStyle/>
-          <a:p>
-            <a:pPr indent="0" marL="0">
-              <a:lnSpc>
-                <a:spcPct val="120000"/>
-              </a:lnSpc>
-              <a:buNone/>
-            </a:pPr>
-            <a:r>
-              <a:rPr lang="en-US" sz="1050" dirty="0">
-                <a:solidFill>
-                  <a:srgbClr val="475569"/>
-                </a:solidFill>
-                <a:latin typeface="Calibri" pitchFamily="34" charset="0"/>
-                <a:ea typeface="Calibri" pitchFamily="34" charset="-122"/>
-                <a:cs typeface="Calibri" pitchFamily="34" charset="-120"/>
-              </a:rPr>
-              <a:t>GET /api/analytics — a real usage counter, honestly scoped.</a:t>
-            </a:r>
-            <a:endParaRPr lang="en-US" sz="1050" dirty="0"/>
-          </a:p>
-        </p:txBody>
-      </p:sp>
-      <p:sp>
-        <p:nvSpPr>
-          <p:cNvPr id="28" name="Shape 26"/>
-          <p:cNvSpPr/>
-          <p:nvPr/>
-        </p:nvSpPr>
-        <p:spPr>
-          <a:xfrm>
-            <a:off x="6108192" y="3931920"/>
-            <a:ext cx="2724912" cy="1965960"/>
-          </a:xfrm>
-          <a:prstGeom prst="roundRect">
-            <a:avLst>
-              <a:gd name="adj" fmla="val 4651"/>
-            </a:avLst>
-          </a:prstGeom>
-          <a:solidFill>
-            <a:srgbClr val="FFFFFF"/>
-          </a:solidFill>
-          <a:ln w="12700">
-            <a:solidFill>
-              <a:srgbClr val="E2E8F0"/>
-            </a:solidFill>
-            <a:prstDash val="solid"/>
-          </a:ln>
-          <a:effectLst>
-            <a:outerShdw sx="100000" sy="100000" kx="0" ky="0" algn="bl" rotWithShape="0" blurRad="76200" dist="38100" dir="5400000">
-              <a:srgbClr val="0F172A">
-                <a:alpha val="25000"/>
-              </a:srgbClr>
-            </a:outerShdw>
-          </a:effectLst>
-        </p:spPr>
-      </p:sp>
-      <p:sp>
-        <p:nvSpPr>
-          <p:cNvPr id="29" name="Shape 27"/>
-          <p:cNvSpPr/>
-          <p:nvPr/>
-        </p:nvSpPr>
-        <p:spPr>
-          <a:xfrm>
-            <a:off x="6309360" y="4133088"/>
-            <a:ext cx="384048" cy="384048"/>
-          </a:xfrm>
-          <a:prstGeom prst="ellipse">
-            <a:avLst/>
-          </a:prstGeom>
-          <a:solidFill>
-            <a:srgbClr val="7C3AED"/>
-          </a:solidFill>
-          <a:ln/>
-        </p:spPr>
-      </p:sp>
-      <p:sp>
-        <p:nvSpPr>
-          <p:cNvPr id="30" name="Text 28"/>
-          <p:cNvSpPr txBox="1"/>
-          <p:nvPr/>
-        </p:nvSpPr>
-        <p:spPr>
-          <a:xfrm>
-            <a:off x="6291072" y="4645152"/>
-            <a:ext cx="2359152" cy="457200"/>
-          </a:xfrm>
-          <a:prstGeom prst="rect">
-            <a:avLst/>
-          </a:prstGeom>
-          <a:noFill/>
-          <a:ln/>
-        </p:spPr>
-        <p:txBody>
-          <a:bodyPr wrap="square" rtlCol="0" anchor="ctr"/>
-          <a:lstStyle/>
-          <a:p>
-            <a:pPr indent="0" marL="0">
-              <a:buNone/>
-            </a:pPr>
-            <a:r>
-              <a:rPr lang="en-US" sz="1350" b="1" dirty="0">
-                <a:solidFill>
-                  <a:srgbClr val="1E1B4B"/>
-                </a:solidFill>
-                <a:latin typeface="Cambria" pitchFamily="34" charset="0"/>
-                <a:ea typeface="Cambria" pitchFamily="34" charset="-122"/>
-                <a:cs typeface="Cambria" pitchFamily="34" charset="-120"/>
-              </a:rPr>
-              <a:t>OpenAPI spec</a:t>
-            </a:r>
-            <a:endParaRPr lang="en-US" sz="1350" dirty="0"/>
-          </a:p>
-        </p:txBody>
-      </p:sp>
-      <p:sp>
-        <p:nvSpPr>
-          <p:cNvPr id="31" name="Text 29"/>
-          <p:cNvSpPr txBox="1"/>
-          <p:nvPr/>
-        </p:nvSpPr>
-        <p:spPr>
-          <a:xfrm>
-            <a:off x="6291072" y="5074920"/>
-            <a:ext cx="2359152" cy="777240"/>
-          </a:xfrm>
-          <a:prstGeom prst="rect">
-            <a:avLst/>
-          </a:prstGeom>
-          <a:noFill/>
-          <a:ln/>
-        </p:spPr>
-        <p:txBody>
-          <a:bodyPr wrap="square" rtlCol="0" anchor="ctr"/>
-          <a:lstStyle/>
-          <a:p>
-            <a:pPr indent="0" marL="0">
-              <a:lnSpc>
-                <a:spcPct val="120000"/>
-              </a:lnSpc>
-              <a:buNone/>
-            </a:pPr>
-            <a:r>
-              <a:rPr lang="en-US" sz="1050" dirty="0">
-                <a:solidFill>
-                  <a:srgbClr val="475569"/>
-                </a:solidFill>
-                <a:latin typeface="Calibri" pitchFamily="34" charset="0"/>
-                <a:ea typeface="Calibri" pitchFamily="34" charset="-122"/>
-                <a:cs typeface="Calibri" pitchFamily="34" charset="-120"/>
-              </a:rPr>
-              <a:t>Every field tested against the real Flask responses.</a:t>
-            </a:r>
-            <a:endParaRPr lang="en-US" sz="1050" dirty="0"/>
-          </a:p>
-        </p:txBody>
-      </p:sp>
-      <p:sp>
-        <p:nvSpPr>
-          <p:cNvPr id="32" name="Shape 30"/>
-          <p:cNvSpPr/>
-          <p:nvPr/>
-        </p:nvSpPr>
-        <p:spPr>
-          <a:xfrm>
-            <a:off x="8887968" y="3931920"/>
-            <a:ext cx="2724912" cy="1965960"/>
-          </a:xfrm>
-          <a:prstGeom prst="roundRect">
-            <a:avLst>
-              <a:gd name="adj" fmla="val 4651"/>
-            </a:avLst>
-          </a:prstGeom>
-          <a:solidFill>
-            <a:srgbClr val="FFFFFF"/>
-          </a:solidFill>
-          <a:ln w="12700">
-            <a:solidFill>
-              <a:srgbClr val="E2E8F0"/>
-            </a:solidFill>
-            <a:prstDash val="solid"/>
-          </a:ln>
-          <a:effectLst>
-            <a:outerShdw sx="100000" sy="100000" kx="0" ky="0" algn="bl" rotWithShape="0" blurRad="76200" dist="38100" dir="5400000">
-              <a:srgbClr val="0F172A">
-                <a:alpha val="25000"/>
-              </a:srgbClr>
-            </a:outerShdw>
-          </a:effectLst>
-        </p:spPr>
-      </p:sp>
-      <p:sp>
-        <p:nvSpPr>
-          <p:cNvPr id="33" name="Shape 31"/>
-          <p:cNvSpPr/>
-          <p:nvPr/>
-        </p:nvSpPr>
-        <p:spPr>
-          <a:xfrm>
-            <a:off x="9089136" y="4133088"/>
-            <a:ext cx="384048" cy="384048"/>
-          </a:xfrm>
-          <a:prstGeom prst="ellipse">
-            <a:avLst/>
-          </a:prstGeom>
-          <a:solidFill>
-            <a:srgbClr val="22D3EE"/>
-          </a:solidFill>
-          <a:ln/>
-        </p:spPr>
-      </p:sp>
-      <p:sp>
-        <p:nvSpPr>
-          <p:cNvPr id="34" name="Text 32"/>
-          <p:cNvSpPr txBox="1"/>
-          <p:nvPr/>
-        </p:nvSpPr>
-        <p:spPr>
-          <a:xfrm>
-            <a:off x="9070848" y="4645152"/>
-            <a:ext cx="2359152" cy="457200"/>
-          </a:xfrm>
-          <a:prstGeom prst="rect">
-            <a:avLst/>
-          </a:prstGeom>
-          <a:noFill/>
-          <a:ln/>
-        </p:spPr>
-        <p:txBody>
-          <a:bodyPr wrap="square" rtlCol="0" anchor="ctr"/>
-          <a:lstStyle/>
-          <a:p>
-            <a:pPr indent="0" marL="0">
-              <a:buNone/>
-            </a:pPr>
-            <a:r>
-              <a:rPr lang="en-US" sz="1350" b="1" dirty="0">
-                <a:solidFill>
-                  <a:srgbClr val="1E1B4B"/>
-                </a:solidFill>
-                <a:latin typeface="Cambria" pitchFamily="34" charset="0"/>
-                <a:ea typeface="Cambria" pitchFamily="34" charset="-122"/>
-                <a:cs typeface="Cambria" pitchFamily="34" charset="-120"/>
-              </a:rPr>
-              <a:t>One-command deploy</a:t>
-            </a:r>
-            <a:endParaRPr lang="en-US" sz="1350" dirty="0"/>
-          </a:p>
-        </p:txBody>
-      </p:sp>
-      <p:sp>
-        <p:nvSpPr>
-          <p:cNvPr id="35" name="Text 33"/>
-          <p:cNvSpPr txBox="1"/>
-          <p:nvPr/>
-        </p:nvSpPr>
-        <p:spPr>
-          <a:xfrm>
-            <a:off x="9070848" y="5074920"/>
-            <a:ext cx="2359152" cy="777240"/>
-          </a:xfrm>
-          <a:prstGeom prst="rect">
-            <a:avLst/>
-          </a:prstGeom>
-          <a:noFill/>
-          <a:ln/>
-        </p:spPr>
-        <p:txBody>
-          <a:bodyPr wrap="square" rtlCol="0" anchor="ctr"/>
-          <a:lstStyle/>
-          <a:p>
-            <a:pPr indent="0" marL="0">
-              <a:lnSpc>
-                <a:spcPct val="120000"/>
-              </a:lnSpc>
-              <a:buNone/>
-            </a:pPr>
-            <a:r>
-              <a:rPr lang="en-US" sz="1050" dirty="0">
-                <a:solidFill>
-                  <a:srgbClr val="475569"/>
-                </a:solidFill>
-                <a:latin typeface="Calibri" pitchFamily="34" charset="0"/>
-                <a:ea typeface="Calibri" pitchFamily="34" charset="-122"/>
-                <a:cs typeface="Calibri" pitchFamily="34" charset="-120"/>
-              </a:rPr>
-              <a:t>Dockerfile + Render/GitHub Pages guides included.</a:t>
-            </a:r>
-            <a:endParaRPr lang="en-US" sz="1050" dirty="0"/>
-          </a:p>
-        </p:txBody>
-      </p:sp>
-      <p:sp>
-        <p:nvSpPr>
-          <p:cNvPr id="36" name="Text 34"/>
+              <a:t>optimizing distance only, when they differ</a:t>
+            </a:r>
+            <a:endParaRPr lang="en-US" sz="1250" dirty="0"/>
+          </a:p>
+        </p:txBody>
+      </p:sp>
+      <p:sp>
+        <p:nvSpPr>
+          <p:cNvPr id="14" name="Text 12"/>
           <p:cNvSpPr txBox="1"/>
           <p:nvPr/>
         </p:nvSpPr>
@@ -8858,7 +11227,7 @@
       </p:sp>
       <p:sp>
         <p:nvSpPr>
-          <p:cNvPr id="37" name="Text 35"/>
+          <p:cNvPr id="15" name="Text 13"/>
           <p:cNvSpPr txBox="1"/>
           <p:nvPr/>
         </p:nvSpPr>
@@ -8909,7 +11278,7 @@
     <p:bg>
       <p:bgPr>
         <a:solidFill>
-          <a:srgbClr val="1E1B4B"/>
+          <a:srgbClr val="F8FAFC"/>
         </a:solidFill>
       </p:bgPr>
     </p:bg>
@@ -8954,13 +11323,13 @@
             <a:r>
               <a:rPr lang="en-US" sz="1300" b="1" spc="200" kern="0" dirty="0">
                 <a:solidFill>
-                  <a:srgbClr val="22D3EE"/>
-                </a:solidFill>
-                <a:latin typeface="Calibri" pitchFamily="34" charset="0"/>
-                <a:ea typeface="Calibri" pitchFamily="34" charset="-122"/>
-                <a:cs typeface="Calibri" pitchFamily="34" charset="-120"/>
-              </a:rPr>
-              <a:t>NOT JUST A NOTEBOOK DEMO</a:t>
+                  <a:srgbClr val="F97316"/>
+                </a:solidFill>
+                <a:latin typeface="Calibri" pitchFamily="34" charset="0"/>
+                <a:ea typeface="Calibri" pitchFamily="34" charset="-122"/>
+                <a:cs typeface="Calibri" pitchFamily="34" charset="-120"/>
+              </a:rPr>
+              <a:t>BENCHMARK — EXPERIMENT 5</a:t>
             </a:r>
             <a:endParaRPr lang="en-US" sz="1300" dirty="0"/>
           </a:p>
@@ -8993,13 +11362,13 @@
             <a:r>
               <a:rPr lang="en-US" sz="3200" b="1" dirty="0">
                 <a:solidFill>
-                  <a:srgbClr val="FFFFFF"/>
+                  <a:srgbClr val="1E1B4B"/>
                 </a:solidFill>
                 <a:latin typeface="Cambria" pitchFamily="34" charset="0"/>
                 <a:ea typeface="Cambria" pitchFamily="34" charset="-122"/>
                 <a:cs typeface="Cambria" pitchFamily="34" charset="-120"/>
               </a:rPr>
-              <a:t>Tested, documented, and deployable</a:t>
+              <a:t>Time-window pruning helps — it is not a wall-clock guarantee</a:t>
             </a:r>
             <a:endParaRPr lang="en-US" sz="3200" dirty="0"/>
           </a:p>
@@ -9013,16 +11382,16 @@
         </p:nvSpPr>
         <p:spPr>
           <a:xfrm>
-            <a:off x="548640" y="1965960"/>
-            <a:ext cx="2606040" cy="2286000"/>
+            <a:off x="548640" y="1737360"/>
+            <a:ext cx="11064240" cy="4343400"/>
           </a:xfrm>
           <a:prstGeom prst="roundRect">
             <a:avLst>
-              <a:gd name="adj" fmla="val 4800"/>
+              <a:gd name="adj" fmla="val 2526"/>
             </a:avLst>
           </a:prstGeom>
           <a:solidFill>
-            <a:srgbClr val="312E81"/>
+            <a:srgbClr val="1E1B4B"/>
           </a:solidFill>
           <a:ln/>
           <a:effectLst>
@@ -9042,8 +11411,8 @@
         </p:nvSpPr>
         <p:spPr>
           <a:xfrm>
-            <a:off x="548640" y="2148840"/>
-            <a:ext cx="2606040" cy="1005840"/>
+            <a:off x="914400" y="2011680"/>
+            <a:ext cx="4937760" cy="1051560"/>
           </a:xfrm>
           <a:prstGeom prst="rect">
             <a:avLst/>
@@ -9059,17 +11428,17 @@
               <a:buNone/>
             </a:pPr>
             <a:r>
-              <a:rPr lang="en-US" sz="3400" b="1" dirty="0">
-                <a:solidFill>
-                  <a:srgbClr val="22D3EE"/>
+              <a:rPr lang="en-US" sz="4000" b="1" dirty="0">
+                <a:solidFill>
+                  <a:srgbClr val="F97316"/>
                 </a:solidFill>
                 <a:latin typeface="Cambria" pitchFamily="34" charset="0"/>
                 <a:ea typeface="Cambria" pitchFamily="34" charset="-122"/>
                 <a:cs typeface="Cambria" pitchFamily="34" charset="-120"/>
               </a:rPr>
-              <a:t>476</a:t>
-            </a:r>
-            <a:endParaRPr lang="en-US" sz="3400" dirty="0"/>
+              <a:t>0/15</a:t>
+            </a:r>
+            <a:endParaRPr lang="en-US" sz="4000" dirty="0"/>
           </a:p>
         </p:txBody>
       </p:sp>
@@ -9081,8 +11450,8 @@
         </p:nvSpPr>
         <p:spPr>
           <a:xfrm>
-            <a:off x="685800" y="3200400"/>
-            <a:ext cx="2331720" cy="914400"/>
+            <a:off x="914400" y="3063240"/>
+            <a:ext cx="4937760" cy="822960"/>
           </a:xfrm>
           <a:prstGeom prst="rect">
             <a:avLst/>
@@ -9101,7 +11470,7 @@
               <a:buNone/>
             </a:pPr>
             <a:r>
-              <a:rPr lang="en-US" sz="1150" dirty="0">
+              <a:rPr lang="en-US" sz="1300" dirty="0">
                 <a:solidFill>
                   <a:srgbClr val="C7D2FE"/>
                 </a:solidFill>
@@ -9109,9 +11478,9 @@
                 <a:ea typeface="Calibri" pitchFamily="34" charset="-122"/>
                 <a:cs typeface="Calibri" pitchFamily="34" charset="-120"/>
               </a:rPr>
-              <a:t>automated tests</a:t>
-            </a:r>
-            <a:endParaRPr lang="en-US" sz="1150" dirty="0"/>
+              <a:t>WITHOUT position pruning, the unconstrained</a:t>
+            </a:r>
+            <a:endParaRPr lang="en-US" sz="1300" dirty="0"/>
           </a:p>
           <a:p>
             <a:pPr algn="ctr" indent="0" marL="0">
@@ -9121,7 +11490,7 @@
               <a:buNone/>
             </a:pPr>
             <a:r>
-              <a:rPr lang="en-US" sz="1150" dirty="0">
+              <a:rPr lang="en-US" sz="1300" dirty="0">
                 <a:solidFill>
                   <a:srgbClr val="C7D2FE"/>
                 </a:solidFill>
@@ -9129,51 +11498,22 @@
                 <a:ea typeface="Calibri" pitchFamily="34" charset="-122"/>
                 <a:cs typeface="Calibri" pitchFamily="34" charset="-120"/>
               </a:rPr>
-              <a:t>(pytest + Playwright + Node)</a:t>
-            </a:r>
-            <a:endParaRPr lang="en-US" sz="1150" dirty="0"/>
-          </a:p>
-        </p:txBody>
-      </p:sp>
-      <p:sp>
-        <p:nvSpPr>
-          <p:cNvPr id="7" name="Shape 5"/>
-          <p:cNvSpPr/>
-          <p:nvPr/>
-        </p:nvSpPr>
-        <p:spPr>
-          <a:xfrm>
-            <a:off x="3355848" y="1965960"/>
-            <a:ext cx="2606040" cy="2286000"/>
-          </a:xfrm>
-          <a:prstGeom prst="roundRect">
-            <a:avLst>
-              <a:gd name="adj" fmla="val 4800"/>
-            </a:avLst>
-          </a:prstGeom>
-          <a:solidFill>
-            <a:srgbClr val="312E81"/>
-          </a:solidFill>
-          <a:ln/>
-          <a:effectLst>
-            <a:outerShdw sx="100000" sy="100000" kx="0" ky="0" algn="bl" rotWithShape="0" blurRad="76200" dist="38100" dir="5400000">
-              <a:srgbClr val="0F172A">
-                <a:alpha val="25000"/>
-              </a:srgbClr>
-            </a:outerShdw>
-          </a:effectLst>
-        </p:spPr>
-      </p:sp>
-      <p:sp>
-        <p:nvSpPr>
-          <p:cNvPr id="8" name="Text 6"/>
-          <p:cNvSpPr txBox="1"/>
-          <p:nvPr/>
-        </p:nvSpPr>
-        <p:spPr>
-          <a:xfrm>
-            <a:off x="3355848" y="2148840"/>
-            <a:ext cx="2606040" cy="1005840"/>
+              <a:t>schedule already satisfied the window</a:t>
+            </a:r>
+            <a:endParaRPr lang="en-US" sz="1300" dirty="0"/>
+          </a:p>
+        </p:txBody>
+      </p:sp>
+      <p:sp>
+        <p:nvSpPr>
+          <p:cNvPr id="7" name="Text 5"/>
+          <p:cNvSpPr txBox="1"/>
+          <p:nvPr/>
+        </p:nvSpPr>
+        <p:spPr>
+          <a:xfrm>
+            <a:off x="6126480" y="2011680"/>
+            <a:ext cx="4937760" cy="1051560"/>
           </a:xfrm>
           <a:prstGeom prst="rect">
             <a:avLst/>
@@ -9189,30 +11529,30 @@
               <a:buNone/>
             </a:pPr>
             <a:r>
-              <a:rPr lang="en-US" sz="3400" b="1" dirty="0">
-                <a:solidFill>
-                  <a:srgbClr val="22D3EE"/>
+              <a:rPr lang="en-US" sz="4000" b="1" dirty="0">
+                <a:solidFill>
+                  <a:srgbClr val="22C55E"/>
                 </a:solidFill>
                 <a:latin typeface="Cambria" pitchFamily="34" charset="0"/>
                 <a:ea typeface="Cambria" pitchFamily="34" charset="-122"/>
                 <a:cs typeface="Cambria" pitchFamily="34" charset="-120"/>
               </a:rPr>
-              <a:t>100%</a:t>
-            </a:r>
-            <a:endParaRPr lang="en-US" sz="3400" dirty="0"/>
-          </a:p>
-        </p:txBody>
-      </p:sp>
-      <p:sp>
-        <p:nvSpPr>
-          <p:cNvPr id="9" name="Text 7"/>
-          <p:cNvSpPr txBox="1"/>
-          <p:nvPr/>
-        </p:nvSpPr>
-        <p:spPr>
-          <a:xfrm>
-            <a:off x="3493008" y="3200400"/>
-            <a:ext cx="2331720" cy="914400"/>
+              <a:t>3/15</a:t>
+            </a:r>
+            <a:endParaRPr lang="en-US" sz="4000" dirty="0"/>
+          </a:p>
+        </p:txBody>
+      </p:sp>
+      <p:sp>
+        <p:nvSpPr>
+          <p:cNvPr id="8" name="Text 6"/>
+          <p:cNvSpPr txBox="1"/>
+          <p:nvPr/>
+        </p:nvSpPr>
+        <p:spPr>
+          <a:xfrm>
+            <a:off x="6126480" y="3063240"/>
+            <a:ext cx="4937760" cy="822960"/>
           </a:xfrm>
           <a:prstGeom prst="rect">
             <a:avLst/>
@@ -9231,7 +11571,7 @@
               <a:buNone/>
             </a:pPr>
             <a:r>
-              <a:rPr lang="en-US" sz="1150" dirty="0">
+              <a:rPr lang="en-US" sz="1300" dirty="0">
                 <a:solidFill>
                   <a:srgbClr val="C7D2FE"/>
                 </a:solidFill>
@@ -9239,9 +11579,9 @@
                 <a:ea typeface="Calibri" pitchFamily="34" charset="-122"/>
                 <a:cs typeface="Calibri" pitchFamily="34" charset="-120"/>
               </a:rPr>
-              <a:t>of the test suite runs</a:t>
-            </a:r>
-            <a:endParaRPr lang="en-US" sz="1150" dirty="0"/>
+              <a:t>WITH position pruning, the</a:t>
+            </a:r>
+            <a:endParaRPr lang="en-US" sz="1300" dirty="0"/>
           </a:p>
           <a:p>
             <a:pPr algn="ctr" indent="0" marL="0">
@@ -9251,7 +11591,7 @@
               <a:buNone/>
             </a:pPr>
             <a:r>
-              <a:rPr lang="en-US" sz="1150" dirty="0">
+              <a:rPr lang="en-US" sz="1300" dirty="0">
                 <a:solidFill>
                   <a:srgbClr val="C7D2FE"/>
                 </a:solidFill>
@@ -9259,282 +11599,45 @@
                 <a:ea typeface="Calibri" pitchFamily="34" charset="-122"/>
                 <a:cs typeface="Calibri" pitchFamily="34" charset="-120"/>
               </a:rPr>
-              <a:t>on every push via CI</a:t>
-            </a:r>
-            <a:endParaRPr lang="en-US" sz="1150" dirty="0"/>
-          </a:p>
-        </p:txBody>
-      </p:sp>
-      <p:sp>
-        <p:nvSpPr>
-          <p:cNvPr id="10" name="Shape 8"/>
+              <a:t>window was actually satisfied</a:t>
+            </a:r>
+            <a:endParaRPr lang="en-US" sz="1300" dirty="0"/>
+          </a:p>
+        </p:txBody>
+      </p:sp>
+      <p:sp>
+        <p:nvSpPr>
+          <p:cNvPr id="9" name="Shape 7"/>
           <p:cNvSpPr/>
           <p:nvPr/>
         </p:nvSpPr>
         <p:spPr>
           <a:xfrm>
-            <a:off x="6163056" y="1965960"/>
-            <a:ext cx="2606040" cy="2286000"/>
-          </a:xfrm>
-          <a:prstGeom prst="roundRect">
-            <a:avLst>
-              <a:gd name="adj" fmla="val 4800"/>
-            </a:avLst>
-          </a:prstGeom>
-          <a:solidFill>
-            <a:srgbClr val="312E81"/>
-          </a:solidFill>
-          <a:ln/>
-          <a:effectLst>
-            <a:outerShdw sx="100000" sy="100000" kx="0" ky="0" algn="bl" rotWithShape="0" blurRad="76200" dist="38100" dir="5400000">
-              <a:srgbClr val="0F172A">
-                <a:alpha val="25000"/>
-              </a:srgbClr>
-            </a:outerShdw>
-          </a:effectLst>
-        </p:spPr>
-      </p:sp>
-      <p:sp>
-        <p:nvSpPr>
-          <p:cNvPr id="11" name="Text 9"/>
-          <p:cNvSpPr txBox="1"/>
-          <p:nvPr/>
-        </p:nvSpPr>
-        <p:spPr>
-          <a:xfrm>
-            <a:off x="6163056" y="2148840"/>
-            <a:ext cx="2606040" cy="1005840"/>
-          </a:xfrm>
-          <a:prstGeom prst="rect">
-            <a:avLst/>
-          </a:prstGeom>
-          <a:noFill/>
-          <a:ln/>
-        </p:spPr>
-        <p:txBody>
-          <a:bodyPr wrap="square" rtlCol="0" anchor="ctr"/>
-          <a:lstStyle/>
-          <a:p>
-            <a:pPr algn="ctr" indent="0" marL="0">
-              <a:buNone/>
-            </a:pPr>
-            <a:r>
-              <a:rPr lang="en-US" sz="3400" b="1" dirty="0">
-                <a:solidFill>
-                  <a:srgbClr val="22D3EE"/>
-                </a:solidFill>
-                <a:latin typeface="Cambria" pitchFamily="34" charset="0"/>
-                <a:ea typeface="Cambria" pitchFamily="34" charset="-122"/>
-                <a:cs typeface="Cambria" pitchFamily="34" charset="-120"/>
-              </a:rPr>
-              <a:t>3</a:t>
-            </a:r>
-            <a:endParaRPr lang="en-US" sz="3400" dirty="0"/>
-          </a:p>
-        </p:txBody>
-      </p:sp>
-      <p:sp>
-        <p:nvSpPr>
-          <p:cNvPr id="12" name="Text 10"/>
-          <p:cNvSpPr txBox="1"/>
-          <p:nvPr/>
-        </p:nvSpPr>
-        <p:spPr>
-          <a:xfrm>
-            <a:off x="6300216" y="3200400"/>
-            <a:ext cx="2331720" cy="914400"/>
-          </a:xfrm>
-          <a:prstGeom prst="rect">
-            <a:avLst/>
-          </a:prstGeom>
-          <a:noFill/>
-          <a:ln/>
-        </p:spPr>
-        <p:txBody>
-          <a:bodyPr wrap="square" rtlCol="0" anchor="ctr"/>
-          <a:lstStyle/>
-          <a:p>
-            <a:pPr algn="ctr" indent="0" marL="0">
-              <a:lnSpc>
-                <a:spcPct val="120000"/>
-              </a:lnSpc>
-              <a:buNone/>
-            </a:pPr>
-            <a:r>
-              <a:rPr lang="en-US" sz="1150" dirty="0">
-                <a:solidFill>
-                  <a:srgbClr val="C7D2FE"/>
-                </a:solidFill>
-                <a:latin typeface="Calibri" pitchFamily="34" charset="0"/>
-                <a:ea typeface="Calibri" pitchFamily="34" charset="-122"/>
-                <a:cs typeface="Calibri" pitchFamily="34" charset="-120"/>
-              </a:rPr>
-              <a:t>solvers benchmarked side by side</a:t>
-            </a:r>
-            <a:endParaRPr lang="en-US" sz="1150" dirty="0"/>
-          </a:p>
-          <a:p>
-            <a:pPr algn="ctr" indent="0" marL="0">
-              <a:lnSpc>
-                <a:spcPct val="120000"/>
-              </a:lnSpc>
-              <a:buNone/>
-            </a:pPr>
-            <a:r>
-              <a:rPr lang="en-US" sz="1150" dirty="0">
-                <a:solidFill>
-                  <a:srgbClr val="C7D2FE"/>
-                </a:solidFill>
-                <a:latin typeface="Calibri" pitchFamily="34" charset="0"/>
-                <a:ea typeface="Calibri" pitchFamily="34" charset="-122"/>
-                <a:cs typeface="Calibri" pitchFamily="34" charset="-120"/>
-              </a:rPr>
-              <a:t>(2-opt, OR-Tools, QUBO+SA)</a:t>
-            </a:r>
-            <a:endParaRPr lang="en-US" sz="1150" dirty="0"/>
-          </a:p>
-        </p:txBody>
-      </p:sp>
-      <p:sp>
-        <p:nvSpPr>
-          <p:cNvPr id="13" name="Shape 11"/>
-          <p:cNvSpPr/>
-          <p:nvPr/>
-        </p:nvSpPr>
-        <p:spPr>
-          <a:xfrm>
-            <a:off x="8970264" y="1965960"/>
-            <a:ext cx="2606040" cy="2286000"/>
-          </a:xfrm>
-          <a:prstGeom prst="roundRect">
-            <a:avLst>
-              <a:gd name="adj" fmla="val 4800"/>
-            </a:avLst>
-          </a:prstGeom>
-          <a:solidFill>
-            <a:srgbClr val="312E81"/>
-          </a:solidFill>
-          <a:ln/>
-          <a:effectLst>
-            <a:outerShdw sx="100000" sy="100000" kx="0" ky="0" algn="bl" rotWithShape="0" blurRad="76200" dist="38100" dir="5400000">
-              <a:srgbClr val="0F172A">
-                <a:alpha val="25000"/>
-              </a:srgbClr>
-            </a:outerShdw>
-          </a:effectLst>
-        </p:spPr>
-      </p:sp>
-      <p:sp>
-        <p:nvSpPr>
-          <p:cNvPr id="14" name="Text 12"/>
-          <p:cNvSpPr txBox="1"/>
-          <p:nvPr/>
-        </p:nvSpPr>
-        <p:spPr>
-          <a:xfrm>
-            <a:off x="8970264" y="2148840"/>
-            <a:ext cx="2606040" cy="1005840"/>
-          </a:xfrm>
-          <a:prstGeom prst="rect">
-            <a:avLst/>
-          </a:prstGeom>
-          <a:noFill/>
-          <a:ln/>
-        </p:spPr>
-        <p:txBody>
-          <a:bodyPr wrap="square" rtlCol="0" anchor="ctr"/>
-          <a:lstStyle/>
-          <a:p>
-            <a:pPr algn="ctr" indent="0" marL="0">
-              <a:buNone/>
-            </a:pPr>
-            <a:r>
-              <a:rPr lang="en-US" sz="3400" b="1" dirty="0">
-                <a:solidFill>
-                  <a:srgbClr val="22D3EE"/>
-                </a:solidFill>
-                <a:latin typeface="Cambria" pitchFamily="34" charset="0"/>
-                <a:ea typeface="Cambria" pitchFamily="34" charset="-122"/>
-                <a:cs typeface="Cambria" pitchFamily="34" charset="-120"/>
-              </a:rPr>
-              <a:t>1</a:t>
-            </a:r>
-            <a:endParaRPr lang="en-US" sz="3400" dirty="0"/>
-          </a:p>
-        </p:txBody>
-      </p:sp>
-      <p:sp>
-        <p:nvSpPr>
-          <p:cNvPr id="15" name="Text 13"/>
-          <p:cNvSpPr txBox="1"/>
-          <p:nvPr/>
-        </p:nvSpPr>
-        <p:spPr>
-          <a:xfrm>
-            <a:off x="9107424" y="3200400"/>
-            <a:ext cx="2331720" cy="914400"/>
-          </a:xfrm>
-          <a:prstGeom prst="rect">
-            <a:avLst/>
-          </a:prstGeom>
-          <a:noFill/>
-          <a:ln/>
-        </p:spPr>
-        <p:txBody>
-          <a:bodyPr wrap="square" rtlCol="0" anchor="ctr"/>
-          <a:lstStyle/>
-          <a:p>
-            <a:pPr algn="ctr" indent="0" marL="0">
-              <a:lnSpc>
-                <a:spcPct val="120000"/>
-              </a:lnSpc>
-              <a:buNone/>
-            </a:pPr>
-            <a:r>
-              <a:rPr lang="en-US" sz="1150" dirty="0">
-                <a:solidFill>
-                  <a:srgbClr val="C7D2FE"/>
-                </a:solidFill>
-                <a:latin typeface="Calibri" pitchFamily="34" charset="0"/>
-                <a:ea typeface="Calibri" pitchFamily="34" charset="-122"/>
-                <a:cs typeface="Calibri" pitchFamily="34" charset="-120"/>
-              </a:rPr>
-              <a:t>command to self-host</a:t>
-            </a:r>
-            <a:endParaRPr lang="en-US" sz="1150" dirty="0"/>
-          </a:p>
-          <a:p>
-            <a:pPr algn="ctr" indent="0" marL="0">
-              <a:lnSpc>
-                <a:spcPct val="120000"/>
-              </a:lnSpc>
-              <a:buNone/>
-            </a:pPr>
-            <a:r>
-              <a:rPr lang="en-US" sz="1150" dirty="0">
-                <a:solidFill>
-                  <a:srgbClr val="C7D2FE"/>
-                </a:solidFill>
-                <a:latin typeface="Calibri" pitchFamily="34" charset="0"/>
-                <a:ea typeface="Calibri" pitchFamily="34" charset="-122"/>
-                <a:cs typeface="Calibri" pitchFamily="34" charset="-120"/>
-              </a:rPr>
-              <a:t>(Dockerfile included)</a:t>
-            </a:r>
-            <a:endParaRPr lang="en-US" sz="1150" dirty="0"/>
-          </a:p>
-        </p:txBody>
-      </p:sp>
-      <p:sp>
-        <p:nvSpPr>
-          <p:cNvPr id="16" name="Text 14"/>
-          <p:cNvSpPr txBox="1"/>
-          <p:nvPr/>
-        </p:nvSpPr>
-        <p:spPr>
-          <a:xfrm>
-            <a:off x="548640" y="4663440"/>
-            <a:ext cx="11064240" cy="914400"/>
+            <a:off x="1097280" y="4023360"/>
+            <a:ext cx="9966960" cy="0"/>
+          </a:xfrm>
+          <a:prstGeom prst="line">
+            <a:avLst/>
+          </a:prstGeom>
+          <a:noFill/>
+          <a:ln w="12700">
+            <a:solidFill>
+              <a:srgbClr val="3730A3"/>
+            </a:solidFill>
+            <a:prstDash val="solid"/>
+          </a:ln>
+        </p:spPr>
+      </p:sp>
+      <p:sp>
+        <p:nvSpPr>
+          <p:cNvPr id="10" name="Text 8"/>
+          <p:cNvSpPr txBox="1"/>
+          <p:nvPr/>
+        </p:nvSpPr>
+        <p:spPr>
+          <a:xfrm>
+            <a:off x="914400" y="4206240"/>
+            <a:ext cx="10332720" cy="1691640"/>
           </a:xfrm>
           <a:prstGeom prst="rect">
             <a:avLst/>
@@ -9553,23 +11656,23 @@
               <a:buNone/>
             </a:pPr>
             <a:r>
-              <a:rPr lang="en-US" sz="1400" i="1" dirty="0">
-                <a:solidFill>
-                  <a:srgbClr val="C7D2FE"/>
-                </a:solidFill>
-                <a:latin typeface="Calibri" pitchFamily="34" charset="0"/>
-                <a:ea typeface="Calibri" pitchFamily="34" charset="-122"/>
-                <a:cs typeface="Calibri" pitchFamily="34" charset="-120"/>
-              </a:rPr>
-              <a:t>openapi.yaml is checked against the live Flask responses by the test suite itself — so the documentation can't silently drift from what the API actually returns.</a:t>
-            </a:r>
-            <a:endParaRPr lang="en-US" sz="1400" dirty="0"/>
-          </a:p>
-        </p:txBody>
-      </p:sp>
-      <p:sp>
-        <p:nvSpPr>
-          <p:cNvPr id="17" name="Text 15"/>
+              <a:rPr lang="en-US" sz="1300" dirty="0">
+                <a:solidFill>
+                  <a:srgbClr val="E0E7FF"/>
+                </a:solidFill>
+                <a:latin typeface="Calibri" pitchFamily="34" charset="0"/>
+                <a:ea typeface="Calibri" pitchFamily="34" charset="-122"/>
+                <a:cs typeface="Calibri" pitchFamily="34" charset="-120"/>
+              </a:rPr>
+              <a:t>The QUBO encodes a tour by POSITION, not clock time — so a provably-safe prune of positions that could never satisfy a window measurably helps (never worse than no time-awareness at all) but isn't a satisfaction guarantee: two tours can share the same allowed position while arriving at very different real times. A true wall-clock guarantee needs a different formulation (arc-based variables plus time propagation) — flagged as the highest-formulation-risk roadmap item, not claimed solved here.</a:t>
+            </a:r>
+            <a:endParaRPr lang="en-US" sz="1300" dirty="0"/>
+          </a:p>
+        </p:txBody>
+      </p:sp>
+      <p:sp>
+        <p:nvSpPr>
+          <p:cNvPr id="11" name="Text 9"/>
           <p:cNvSpPr txBox="1"/>
           <p:nvPr/>
         </p:nvSpPr>
@@ -9608,7 +11711,7 @@
       </p:sp>
       <p:sp>
         <p:nvSpPr>
-          <p:cNvPr id="18" name="Text 16"/>
+          <p:cNvPr id="12" name="Text 10"/>
           <p:cNvSpPr txBox="1"/>
           <p:nvPr/>
         </p:nvSpPr>
